--- a/ADS/PPTs/UNIT1 ADS Basic Concepts.pptx
+++ b/ADS/PPTs/UNIT1 ADS Basic Concepts.pptx
@@ -1,41 +1,41 @@
 
 <file path=ppt/presentation.xml><?xml version="1.0" encoding="utf-8"?>
-<p:presentation xmlns:a="http://schemas.openxmlformats.org/drawingml/2006/main" xmlns:r="http://schemas.openxmlformats.org/officeDocument/2006/relationships" xmlns:p="http://schemas.openxmlformats.org/presentationml/2006/main" showSpecialPlsOnTitleSld="0" saveSubsetFonts="1">
+<p:presentation xmlns:a="http://schemas.openxmlformats.org/drawingml/2006/main" xmlns:r="http://schemas.openxmlformats.org/officeDocument/2006/relationships" xmlns:p="http://schemas.openxmlformats.org/presentationml/2006/main" showSpecialPlsOnTitleSld="0">
   <p:sldMasterIdLst>
     <p:sldMasterId id="2147483648" r:id="rId1"/>
-    <p:sldMasterId id="2147483658" r:id="rId2"/>
+    <p:sldMasterId id="2147483656" r:id="rId3"/>
   </p:sldMasterIdLst>
   <p:notesMasterIdLst>
-    <p:notesMasterId r:id="rId30"/>
+    <p:notesMasterId r:id="rId31"/>
   </p:notesMasterIdLst>
   <p:sldIdLst>
-    <p:sldId id="259" r:id="rId3"/>
-    <p:sldId id="260" r:id="rId4"/>
-    <p:sldId id="289" r:id="rId5"/>
-    <p:sldId id="291" r:id="rId6"/>
-    <p:sldId id="292" r:id="rId7"/>
-    <p:sldId id="290" r:id="rId8"/>
-    <p:sldId id="293" r:id="rId9"/>
-    <p:sldId id="312" r:id="rId10"/>
-    <p:sldId id="294" r:id="rId11"/>
-    <p:sldId id="310" r:id="rId12"/>
-    <p:sldId id="311" r:id="rId13"/>
-    <p:sldId id="295" r:id="rId14"/>
-    <p:sldId id="296" r:id="rId15"/>
-    <p:sldId id="297" r:id="rId16"/>
-    <p:sldId id="298" r:id="rId17"/>
-    <p:sldId id="299" r:id="rId18"/>
-    <p:sldId id="300" r:id="rId19"/>
-    <p:sldId id="301" r:id="rId20"/>
-    <p:sldId id="302" r:id="rId21"/>
-    <p:sldId id="303" r:id="rId22"/>
-    <p:sldId id="304" r:id="rId23"/>
-    <p:sldId id="305" r:id="rId24"/>
-    <p:sldId id="306" r:id="rId25"/>
-    <p:sldId id="307" r:id="rId26"/>
-    <p:sldId id="308" r:id="rId27"/>
-    <p:sldId id="309" r:id="rId28"/>
-    <p:sldId id="288" r:id="rId29"/>
+    <p:sldId id="259" r:id="rId4"/>
+    <p:sldId id="260" r:id="rId5"/>
+    <p:sldId id="289" r:id="rId6"/>
+    <p:sldId id="291" r:id="rId7"/>
+    <p:sldId id="292" r:id="rId8"/>
+    <p:sldId id="290" r:id="rId9"/>
+    <p:sldId id="293" r:id="rId10"/>
+    <p:sldId id="312" r:id="rId11"/>
+    <p:sldId id="294" r:id="rId12"/>
+    <p:sldId id="310" r:id="rId13"/>
+    <p:sldId id="311" r:id="rId14"/>
+    <p:sldId id="295" r:id="rId15"/>
+    <p:sldId id="296" r:id="rId16"/>
+    <p:sldId id="297" r:id="rId17"/>
+    <p:sldId id="298" r:id="rId18"/>
+    <p:sldId id="299" r:id="rId19"/>
+    <p:sldId id="300" r:id="rId20"/>
+    <p:sldId id="301" r:id="rId21"/>
+    <p:sldId id="302" r:id="rId22"/>
+    <p:sldId id="303" r:id="rId23"/>
+    <p:sldId id="304" r:id="rId24"/>
+    <p:sldId id="305" r:id="rId25"/>
+    <p:sldId id="306" r:id="rId26"/>
+    <p:sldId id="307" r:id="rId27"/>
+    <p:sldId id="308" r:id="rId28"/>
+    <p:sldId id="309" r:id="rId29"/>
+    <p:sldId id="288" r:id="rId30"/>
   </p:sldIdLst>
   <p:sldSz cx="12192000" cy="6858000"/>
   <p:notesSz cx="6858000" cy="9144000"/>
@@ -134,11 +134,6 @@
       </a:defRPr>
     </a:lvl9pPr>
   </p:defaultTextStyle>
-  <p:extLst>
-    <p:ext uri="{EFAFB233-063F-42B5-8137-9DF3F51BA10A}">
-      <p15:sldGuideLst xmlns:p15="http://schemas.microsoft.com/office/powerpoint/2012/main" xmlns=""/>
-    </p:ext>
-  </p:extLst>
 </p:presentation>
 </file>
 
@@ -224,8 +219,6 @@
           <a:p>
             <a:fld id="{0744C04D-762D-4F62-B299-DE0EEDF403F1}" type="datetimeFigureOut">
               <a:rPr lang="en-IN" smtClean="0"/>
-              <a:pPr/>
-              <a:t>21-07-2026</a:t>
             </a:fld>
             <a:endParaRPr lang="en-IN"/>
           </a:p>
@@ -292,6 +285,7 @@
               <a:rPr lang="en-US"/>
               <a:t>Click to edit Master text styles</a:t>
             </a:r>
+            <a:endParaRPr lang="en-US"/>
           </a:p>
           <a:p>
             <a:pPr lvl="1"/>
@@ -299,6 +293,7 @@
               <a:rPr lang="en-US"/>
               <a:t>Second level</a:t>
             </a:r>
+            <a:endParaRPr lang="en-US"/>
           </a:p>
           <a:p>
             <a:pPr lvl="2"/>
@@ -306,6 +301,7 @@
               <a:rPr lang="en-US"/>
               <a:t>Third level</a:t>
             </a:r>
+            <a:endParaRPr lang="en-US"/>
           </a:p>
           <a:p>
             <a:pPr lvl="3"/>
@@ -313,6 +309,7 @@
               <a:rPr lang="en-US"/>
               <a:t>Fourth level</a:t>
             </a:r>
+            <a:endParaRPr lang="en-US"/>
           </a:p>
           <a:p>
             <a:pPr lvl="4"/>
@@ -384,19 +381,12 @@
           <a:p>
             <a:fld id="{F31DB62B-639E-4316-B306-BE015A17291F}" type="slidenum">
               <a:rPr lang="en-IN" smtClean="0"/>
-              <a:pPr/>
-              <a:t>‹#›</a:t>
             </a:fld>
             <a:endParaRPr lang="en-IN"/>
           </a:p>
         </p:txBody>
       </p:sp>
     </p:spTree>
-    <p:extLst>
-      <p:ext uri="{BB962C8B-B14F-4D97-AF65-F5344CB8AC3E}">
-        <p14:creationId xmlns:p14="http://schemas.microsoft.com/office/powerpoint/2010/main" xmlns="" val="431848450"/>
-      </p:ext>
-    </p:extLst>
   </p:cSld>
   <p:clrMap bg1="lt1" tx1="dk1" bg2="lt2" tx2="dk2" accent1="accent1" accent2="accent2" accent3="accent3" accent4="accent4" accent5="accent5" accent6="accent6" hlink="hlink" folHlink="folHlink"/>
   <p:notesStyle>
@@ -513,13 +503,7 @@
       </p:grpSpPr>
       <p:sp>
         <p:nvSpPr>
-          <p:cNvPr id="2" name="Title 1">
-            <a:extLst>
-              <a:ext uri="{FF2B5EF4-FFF2-40B4-BE49-F238E27FC236}">
-                <a16:creationId xmlns:a16="http://schemas.microsoft.com/office/drawing/2014/main" xmlns="" id="{8AA6778E-FA1A-1EB2-2128-F128248B69B7}"/>
-              </a:ext>
-            </a:extLst>
-          </p:cNvPr>
+          <p:cNvPr id="2" name="Title 1"/>
           <p:cNvSpPr>
             <a:spLocks noGrp="1"/>
           </p:cNvSpPr>
@@ -554,13 +538,7 @@
       </p:sp>
       <p:sp>
         <p:nvSpPr>
-          <p:cNvPr id="3" name="Subtitle 2">
-            <a:extLst>
-              <a:ext uri="{FF2B5EF4-FFF2-40B4-BE49-F238E27FC236}">
-                <a16:creationId xmlns:a16="http://schemas.microsoft.com/office/drawing/2014/main" xmlns="" id="{966AF16D-2EDD-F269-4F8B-01EC0EAF4FD9}"/>
-              </a:ext>
-            </a:extLst>
-          </p:cNvPr>
+          <p:cNvPr id="3" name="Subtitle 2"/>
           <p:cNvSpPr>
             <a:spLocks noGrp="1"/>
           </p:cNvSpPr>
@@ -625,13 +603,7 @@
       </p:sp>
       <p:sp>
         <p:nvSpPr>
-          <p:cNvPr id="4" name="Date Placeholder 3">
-            <a:extLst>
-              <a:ext uri="{FF2B5EF4-FFF2-40B4-BE49-F238E27FC236}">
-                <a16:creationId xmlns:a16="http://schemas.microsoft.com/office/drawing/2014/main" xmlns="" id="{A1E0A037-CCD1-D068-D158-F800AEDE870C}"/>
-              </a:ext>
-            </a:extLst>
-          </p:cNvPr>
+          <p:cNvPr id="4" name="Date Placeholder 3"/>
           <p:cNvSpPr>
             <a:spLocks noGrp="1"/>
           </p:cNvSpPr>
@@ -662,13 +634,7 @@
       </p:sp>
       <p:sp>
         <p:nvSpPr>
-          <p:cNvPr id="5" name="Footer Placeholder 4">
-            <a:extLst>
-              <a:ext uri="{FF2B5EF4-FFF2-40B4-BE49-F238E27FC236}">
-                <a16:creationId xmlns:a16="http://schemas.microsoft.com/office/drawing/2014/main" xmlns="" id="{E9A920C6-BC53-750E-DD60-707B2F3D2052}"/>
-              </a:ext>
-            </a:extLst>
-          </p:cNvPr>
+          <p:cNvPr id="5" name="Footer Placeholder 4"/>
           <p:cNvSpPr>
             <a:spLocks noGrp="1"/>
           </p:cNvSpPr>
@@ -693,18 +659,13 @@
               <a:rPr lang="en-IN"/>
               <a:t>Dr. Devyani Jadhav, Dept of AIML, Sanjivani University</a:t>
             </a:r>
-          </a:p>
-        </p:txBody>
-      </p:sp>
-      <p:sp>
-        <p:nvSpPr>
-          <p:cNvPr id="6" name="Slide Number Placeholder 5">
-            <a:extLst>
-              <a:ext uri="{FF2B5EF4-FFF2-40B4-BE49-F238E27FC236}">
-                <a16:creationId xmlns:a16="http://schemas.microsoft.com/office/drawing/2014/main" xmlns="" id="{6F07D7D4-C45C-64A5-A658-AF2B46803401}"/>
-              </a:ext>
-            </a:extLst>
-          </p:cNvPr>
+            <a:endParaRPr lang="en-IN"/>
+          </a:p>
+        </p:txBody>
+      </p:sp>
+      <p:sp>
+        <p:nvSpPr>
+          <p:cNvPr id="6" name="Slide Number Placeholder 5"/>
           <p:cNvSpPr>
             <a:spLocks noGrp="1"/>
           </p:cNvSpPr>
@@ -727,8 +688,6 @@
           <a:p>
             <a:fld id="{75B0C241-D0FA-41C4-806B-7A3C5377B352}" type="slidenum">
               <a:rPr lang="en-IN" smtClean="0"/>
-              <a:pPr/>
-              <a:t>‹#›</a:t>
             </a:fld>
             <a:endParaRPr lang="en-IN"/>
           </a:p>
@@ -736,13 +695,7 @@
       </p:sp>
       <p:pic>
         <p:nvPicPr>
-          <p:cNvPr id="7" name="Image 4">
-            <a:extLst>
-              <a:ext uri="{FF2B5EF4-FFF2-40B4-BE49-F238E27FC236}">
-                <a16:creationId xmlns:a16="http://schemas.microsoft.com/office/drawing/2014/main" xmlns="" id="{8F4F356E-DE5A-1471-E28B-4E5E3C6F0024}"/>
-              </a:ext>
-            </a:extLst>
-          </p:cNvPr>
+          <p:cNvPr id="7" name="Image 4"/>
           <p:cNvPicPr/>
           <p:nvPr userDrawn="1"/>
         </p:nvPicPr>
@@ -763,11 +716,6 @@
         </p:spPr>
       </p:pic>
     </p:spTree>
-    <p:extLst>
-      <p:ext uri="{BB962C8B-B14F-4D97-AF65-F5344CB8AC3E}">
-        <p14:creationId xmlns:p14="http://schemas.microsoft.com/office/powerpoint/2010/main" xmlns="" val="2422007696"/>
-      </p:ext>
-    </p:extLst>
   </p:cSld>
   <p:clrMapOvr>
     <a:masterClrMapping/>
@@ -794,13 +742,7 @@
       </p:grpSpPr>
       <p:sp>
         <p:nvSpPr>
-          <p:cNvPr id="2" name="Title 1">
-            <a:extLst>
-              <a:ext uri="{FF2B5EF4-FFF2-40B4-BE49-F238E27FC236}">
-                <a16:creationId xmlns:a16="http://schemas.microsoft.com/office/drawing/2014/main" xmlns="" id="{8D44913B-0B66-50C9-C99D-89D226FCCCE7}"/>
-              </a:ext>
-            </a:extLst>
-          </p:cNvPr>
+          <p:cNvPr id="2" name="Title 1"/>
           <p:cNvSpPr>
             <a:spLocks noGrp="1"/>
           </p:cNvSpPr>
@@ -832,13 +774,7 @@
       </p:sp>
       <p:sp>
         <p:nvSpPr>
-          <p:cNvPr id="3" name="Text Placeholder 2">
-            <a:extLst>
-              <a:ext uri="{FF2B5EF4-FFF2-40B4-BE49-F238E27FC236}">
-                <a16:creationId xmlns:a16="http://schemas.microsoft.com/office/drawing/2014/main" xmlns="" id="{EEDF0F0C-DF27-8544-B9EB-1A6673B20D89}"/>
-              </a:ext>
-            </a:extLst>
-          </p:cNvPr>
+          <p:cNvPr id="3" name="Text Placeholder 2"/>
           <p:cNvSpPr>
             <a:spLocks noGrp="1"/>
           </p:cNvSpPr>
@@ -952,18 +888,13 @@
               <a:rPr lang="en-US"/>
               <a:t>Click to edit Master text styles</a:t>
             </a:r>
-          </a:p>
-        </p:txBody>
-      </p:sp>
-      <p:sp>
-        <p:nvSpPr>
-          <p:cNvPr id="4" name="Date Placeholder 3">
-            <a:extLst>
-              <a:ext uri="{FF2B5EF4-FFF2-40B4-BE49-F238E27FC236}">
-                <a16:creationId xmlns:a16="http://schemas.microsoft.com/office/drawing/2014/main" xmlns="" id="{AD458084-BA3B-098B-3949-C9BD385EA7F9}"/>
-              </a:ext>
-            </a:extLst>
-          </p:cNvPr>
+            <a:endParaRPr lang="en-US"/>
+          </a:p>
+        </p:txBody>
+      </p:sp>
+      <p:sp>
+        <p:nvSpPr>
+          <p:cNvPr id="4" name="Date Placeholder 3"/>
           <p:cNvSpPr>
             <a:spLocks noGrp="1"/>
           </p:cNvSpPr>
@@ -986,13 +917,7 @@
       </p:sp>
       <p:sp>
         <p:nvSpPr>
-          <p:cNvPr id="5" name="Footer Placeholder 4">
-            <a:extLst>
-              <a:ext uri="{FF2B5EF4-FFF2-40B4-BE49-F238E27FC236}">
-                <a16:creationId xmlns:a16="http://schemas.microsoft.com/office/drawing/2014/main" xmlns="" id="{337026FF-9CC5-0306-0F14-F36FD299B10A}"/>
-              </a:ext>
-            </a:extLst>
-          </p:cNvPr>
+          <p:cNvPr id="5" name="Footer Placeholder 4"/>
           <p:cNvSpPr>
             <a:spLocks noGrp="1"/>
           </p:cNvSpPr>
@@ -1009,18 +934,13 @@
               <a:rPr lang="en-IN"/>
               <a:t>Dr. Devyani Jadhav, Dept of AIML, Sanjivani University</a:t>
             </a:r>
-          </a:p>
-        </p:txBody>
-      </p:sp>
-      <p:sp>
-        <p:nvSpPr>
-          <p:cNvPr id="6" name="Slide Number Placeholder 5">
-            <a:extLst>
-              <a:ext uri="{FF2B5EF4-FFF2-40B4-BE49-F238E27FC236}">
-                <a16:creationId xmlns:a16="http://schemas.microsoft.com/office/drawing/2014/main" xmlns="" id="{C8C814B0-9566-B342-84A5-8218EA6544E0}"/>
-              </a:ext>
-            </a:extLst>
-          </p:cNvPr>
+            <a:endParaRPr lang="en-IN"/>
+          </a:p>
+        </p:txBody>
+      </p:sp>
+      <p:sp>
+        <p:nvSpPr>
+          <p:cNvPr id="6" name="Slide Number Placeholder 5"/>
           <p:cNvSpPr>
             <a:spLocks noGrp="1"/>
           </p:cNvSpPr>
@@ -1035,19 +955,12 @@
           <a:p>
             <a:fld id="{33DAA219-780F-40A4-8E4C-A7BED1CAA639}" type="slidenum">
               <a:rPr lang="en-IN" smtClean="0"/>
-              <a:pPr/>
-              <a:t>‹#›</a:t>
             </a:fld>
             <a:endParaRPr lang="en-IN"/>
           </a:p>
         </p:txBody>
       </p:sp>
     </p:spTree>
-    <p:extLst>
-      <p:ext uri="{BB962C8B-B14F-4D97-AF65-F5344CB8AC3E}">
-        <p14:creationId xmlns:p14="http://schemas.microsoft.com/office/powerpoint/2010/main" xmlns="" val="2124117512"/>
-      </p:ext>
-    </p:extLst>
   </p:cSld>
   <p:clrMapOvr>
     <a:masterClrMapping/>
@@ -1074,13 +987,7 @@
       </p:grpSpPr>
       <p:sp>
         <p:nvSpPr>
-          <p:cNvPr id="2" name="Title 1">
-            <a:extLst>
-              <a:ext uri="{FF2B5EF4-FFF2-40B4-BE49-F238E27FC236}">
-                <a16:creationId xmlns:a16="http://schemas.microsoft.com/office/drawing/2014/main" xmlns="" id="{A4B026BF-65F1-B0AF-7172-1E77412B2946}"/>
-              </a:ext>
-            </a:extLst>
-          </p:cNvPr>
+          <p:cNvPr id="2" name="Title 1"/>
           <p:cNvSpPr>
             <a:spLocks noGrp="1"/>
           </p:cNvSpPr>
@@ -1103,13 +1010,7 @@
       </p:sp>
       <p:sp>
         <p:nvSpPr>
-          <p:cNvPr id="3" name="Content Placeholder 2">
-            <a:extLst>
-              <a:ext uri="{FF2B5EF4-FFF2-40B4-BE49-F238E27FC236}">
-                <a16:creationId xmlns:a16="http://schemas.microsoft.com/office/drawing/2014/main" xmlns="" id="{394031FF-B742-A03C-1045-D5AD2B14E02E}"/>
-              </a:ext>
-            </a:extLst>
-          </p:cNvPr>
+          <p:cNvPr id="3" name="Content Placeholder 2"/>
           <p:cNvSpPr>
             <a:spLocks noGrp="1"/>
           </p:cNvSpPr>
@@ -1132,6 +1033,7 @@
               <a:rPr lang="en-US"/>
               <a:t>Click to edit Master text styles</a:t>
             </a:r>
+            <a:endParaRPr lang="en-US"/>
           </a:p>
           <a:p>
             <a:pPr lvl="1"/>
@@ -1139,6 +1041,7 @@
               <a:rPr lang="en-US"/>
               <a:t>Second level</a:t>
             </a:r>
+            <a:endParaRPr lang="en-US"/>
           </a:p>
           <a:p>
             <a:pPr lvl="2"/>
@@ -1146,6 +1049,7 @@
               <a:rPr lang="en-US"/>
               <a:t>Third level</a:t>
             </a:r>
+            <a:endParaRPr lang="en-US"/>
           </a:p>
           <a:p>
             <a:pPr lvl="3"/>
@@ -1153,6 +1057,7 @@
               <a:rPr lang="en-US"/>
               <a:t>Fourth level</a:t>
             </a:r>
+            <a:endParaRPr lang="en-US"/>
           </a:p>
           <a:p>
             <a:pPr lvl="4"/>
@@ -1166,13 +1071,7 @@
       </p:sp>
       <p:sp>
         <p:nvSpPr>
-          <p:cNvPr id="4" name="Content Placeholder 3">
-            <a:extLst>
-              <a:ext uri="{FF2B5EF4-FFF2-40B4-BE49-F238E27FC236}">
-                <a16:creationId xmlns:a16="http://schemas.microsoft.com/office/drawing/2014/main" xmlns="" id="{1F9D4D62-55AD-621F-670D-91FE991453E5}"/>
-              </a:ext>
-            </a:extLst>
-          </p:cNvPr>
+          <p:cNvPr id="4" name="Content Placeholder 3"/>
           <p:cNvSpPr>
             <a:spLocks noGrp="1"/>
           </p:cNvSpPr>
@@ -1195,6 +1094,7 @@
               <a:rPr lang="en-US"/>
               <a:t>Click to edit Master text styles</a:t>
             </a:r>
+            <a:endParaRPr lang="en-US"/>
           </a:p>
           <a:p>
             <a:pPr lvl="1"/>
@@ -1202,6 +1102,7 @@
               <a:rPr lang="en-US"/>
               <a:t>Second level</a:t>
             </a:r>
+            <a:endParaRPr lang="en-US"/>
           </a:p>
           <a:p>
             <a:pPr lvl="2"/>
@@ -1209,6 +1110,7 @@
               <a:rPr lang="en-US"/>
               <a:t>Third level</a:t>
             </a:r>
+            <a:endParaRPr lang="en-US"/>
           </a:p>
           <a:p>
             <a:pPr lvl="3"/>
@@ -1216,6 +1118,7 @@
               <a:rPr lang="en-US"/>
               <a:t>Fourth level</a:t>
             </a:r>
+            <a:endParaRPr lang="en-US"/>
           </a:p>
           <a:p>
             <a:pPr lvl="4"/>
@@ -1229,13 +1132,7 @@
       </p:sp>
       <p:sp>
         <p:nvSpPr>
-          <p:cNvPr id="5" name="Date Placeholder 4">
-            <a:extLst>
-              <a:ext uri="{FF2B5EF4-FFF2-40B4-BE49-F238E27FC236}">
-                <a16:creationId xmlns:a16="http://schemas.microsoft.com/office/drawing/2014/main" xmlns="" id="{852E32BD-9A8F-D730-2A70-DDF08EEA37EA}"/>
-              </a:ext>
-            </a:extLst>
-          </p:cNvPr>
+          <p:cNvPr id="5" name="Date Placeholder 4"/>
           <p:cNvSpPr>
             <a:spLocks noGrp="1"/>
           </p:cNvSpPr>
@@ -1258,13 +1155,7 @@
       </p:sp>
       <p:sp>
         <p:nvSpPr>
-          <p:cNvPr id="6" name="Footer Placeholder 5">
-            <a:extLst>
-              <a:ext uri="{FF2B5EF4-FFF2-40B4-BE49-F238E27FC236}">
-                <a16:creationId xmlns:a16="http://schemas.microsoft.com/office/drawing/2014/main" xmlns="" id="{7D184393-3A7E-685B-9286-43E79E953A52}"/>
-              </a:ext>
-            </a:extLst>
-          </p:cNvPr>
+          <p:cNvPr id="6" name="Footer Placeholder 5"/>
           <p:cNvSpPr>
             <a:spLocks noGrp="1"/>
           </p:cNvSpPr>
@@ -1281,18 +1172,13 @@
               <a:rPr lang="en-IN"/>
               <a:t>Dr. Devyani Jadhav, Dept of AIML, Sanjivani University</a:t>
             </a:r>
-          </a:p>
-        </p:txBody>
-      </p:sp>
-      <p:sp>
-        <p:nvSpPr>
-          <p:cNvPr id="7" name="Slide Number Placeholder 6">
-            <a:extLst>
-              <a:ext uri="{FF2B5EF4-FFF2-40B4-BE49-F238E27FC236}">
-                <a16:creationId xmlns:a16="http://schemas.microsoft.com/office/drawing/2014/main" xmlns="" id="{40AE9FA9-9B52-ED64-76E0-A8FD5666607D}"/>
-              </a:ext>
-            </a:extLst>
-          </p:cNvPr>
+            <a:endParaRPr lang="en-IN"/>
+          </a:p>
+        </p:txBody>
+      </p:sp>
+      <p:sp>
+        <p:nvSpPr>
+          <p:cNvPr id="7" name="Slide Number Placeholder 6"/>
           <p:cNvSpPr>
             <a:spLocks noGrp="1"/>
           </p:cNvSpPr>
@@ -1307,19 +1193,12 @@
           <a:p>
             <a:fld id="{33DAA219-780F-40A4-8E4C-A7BED1CAA639}" type="slidenum">
               <a:rPr lang="en-IN" smtClean="0"/>
-              <a:pPr/>
-              <a:t>‹#›</a:t>
             </a:fld>
             <a:endParaRPr lang="en-IN"/>
           </a:p>
         </p:txBody>
       </p:sp>
     </p:spTree>
-    <p:extLst>
-      <p:ext uri="{BB962C8B-B14F-4D97-AF65-F5344CB8AC3E}">
-        <p14:creationId xmlns:p14="http://schemas.microsoft.com/office/powerpoint/2010/main" xmlns="" val="845487845"/>
-      </p:ext>
-    </p:extLst>
   </p:cSld>
   <p:clrMapOvr>
     <a:masterClrMapping/>
@@ -1346,13 +1225,7 @@
       </p:grpSpPr>
       <p:sp>
         <p:nvSpPr>
-          <p:cNvPr id="2" name="Title 1">
-            <a:extLst>
-              <a:ext uri="{FF2B5EF4-FFF2-40B4-BE49-F238E27FC236}">
-                <a16:creationId xmlns:a16="http://schemas.microsoft.com/office/drawing/2014/main" xmlns="" id="{24CA6E70-07D4-F91C-529D-A5039EFFD95C}"/>
-              </a:ext>
-            </a:extLst>
-          </p:cNvPr>
+          <p:cNvPr id="2" name="Title 1"/>
           <p:cNvSpPr>
             <a:spLocks noGrp="1"/>
           </p:cNvSpPr>
@@ -1380,13 +1253,7 @@
       </p:sp>
       <p:sp>
         <p:nvSpPr>
-          <p:cNvPr id="3" name="Text Placeholder 2">
-            <a:extLst>
-              <a:ext uri="{FF2B5EF4-FFF2-40B4-BE49-F238E27FC236}">
-                <a16:creationId xmlns:a16="http://schemas.microsoft.com/office/drawing/2014/main" xmlns="" id="{65C2AEE7-B645-AA84-CABF-3598BF059D28}"/>
-              </a:ext>
-            </a:extLst>
-          </p:cNvPr>
+          <p:cNvPr id="3" name="Text Placeholder 2"/>
           <p:cNvSpPr>
             <a:spLocks noGrp="1"/>
           </p:cNvSpPr>
@@ -1446,18 +1313,13 @@
               <a:rPr lang="en-US"/>
               <a:t>Click to edit Master text styles</a:t>
             </a:r>
-          </a:p>
-        </p:txBody>
-      </p:sp>
-      <p:sp>
-        <p:nvSpPr>
-          <p:cNvPr id="4" name="Content Placeholder 3">
-            <a:extLst>
-              <a:ext uri="{FF2B5EF4-FFF2-40B4-BE49-F238E27FC236}">
-                <a16:creationId xmlns:a16="http://schemas.microsoft.com/office/drawing/2014/main" xmlns="" id="{63770996-825E-BE41-8298-670B86308B1A}"/>
-              </a:ext>
-            </a:extLst>
-          </p:cNvPr>
+            <a:endParaRPr lang="en-US"/>
+          </a:p>
+        </p:txBody>
+      </p:sp>
+      <p:sp>
+        <p:nvSpPr>
+          <p:cNvPr id="4" name="Content Placeholder 3"/>
           <p:cNvSpPr>
             <a:spLocks noGrp="1"/>
           </p:cNvSpPr>
@@ -1480,6 +1342,7 @@
               <a:rPr lang="en-US"/>
               <a:t>Click to edit Master text styles</a:t>
             </a:r>
+            <a:endParaRPr lang="en-US"/>
           </a:p>
           <a:p>
             <a:pPr lvl="1"/>
@@ -1487,6 +1350,7 @@
               <a:rPr lang="en-US"/>
               <a:t>Second level</a:t>
             </a:r>
+            <a:endParaRPr lang="en-US"/>
           </a:p>
           <a:p>
             <a:pPr lvl="2"/>
@@ -1494,6 +1358,7 @@
               <a:rPr lang="en-US"/>
               <a:t>Third level</a:t>
             </a:r>
+            <a:endParaRPr lang="en-US"/>
           </a:p>
           <a:p>
             <a:pPr lvl="3"/>
@@ -1501,6 +1366,7 @@
               <a:rPr lang="en-US"/>
               <a:t>Fourth level</a:t>
             </a:r>
+            <a:endParaRPr lang="en-US"/>
           </a:p>
           <a:p>
             <a:pPr lvl="4"/>
@@ -1514,13 +1380,7 @@
       </p:sp>
       <p:sp>
         <p:nvSpPr>
-          <p:cNvPr id="5" name="Text Placeholder 4">
-            <a:extLst>
-              <a:ext uri="{FF2B5EF4-FFF2-40B4-BE49-F238E27FC236}">
-                <a16:creationId xmlns:a16="http://schemas.microsoft.com/office/drawing/2014/main" xmlns="" id="{908FA146-31A5-7377-4F9D-F7F956246910}"/>
-              </a:ext>
-            </a:extLst>
-          </p:cNvPr>
+          <p:cNvPr id="5" name="Text Placeholder 4"/>
           <p:cNvSpPr>
             <a:spLocks noGrp="1"/>
           </p:cNvSpPr>
@@ -1580,18 +1440,13 @@
               <a:rPr lang="en-US"/>
               <a:t>Click to edit Master text styles</a:t>
             </a:r>
-          </a:p>
-        </p:txBody>
-      </p:sp>
-      <p:sp>
-        <p:nvSpPr>
-          <p:cNvPr id="6" name="Content Placeholder 5">
-            <a:extLst>
-              <a:ext uri="{FF2B5EF4-FFF2-40B4-BE49-F238E27FC236}">
-                <a16:creationId xmlns:a16="http://schemas.microsoft.com/office/drawing/2014/main" xmlns="" id="{B50BA718-0D7C-BC69-5F9C-487DC3E7BAD7}"/>
-              </a:ext>
-            </a:extLst>
-          </p:cNvPr>
+            <a:endParaRPr lang="en-US"/>
+          </a:p>
+        </p:txBody>
+      </p:sp>
+      <p:sp>
+        <p:nvSpPr>
+          <p:cNvPr id="6" name="Content Placeholder 5"/>
           <p:cNvSpPr>
             <a:spLocks noGrp="1"/>
           </p:cNvSpPr>
@@ -1614,6 +1469,7 @@
               <a:rPr lang="en-US"/>
               <a:t>Click to edit Master text styles</a:t>
             </a:r>
+            <a:endParaRPr lang="en-US"/>
           </a:p>
           <a:p>
             <a:pPr lvl="1"/>
@@ -1621,6 +1477,7 @@
               <a:rPr lang="en-US"/>
               <a:t>Second level</a:t>
             </a:r>
+            <a:endParaRPr lang="en-US"/>
           </a:p>
           <a:p>
             <a:pPr lvl="2"/>
@@ -1628,6 +1485,7 @@
               <a:rPr lang="en-US"/>
               <a:t>Third level</a:t>
             </a:r>
+            <a:endParaRPr lang="en-US"/>
           </a:p>
           <a:p>
             <a:pPr lvl="3"/>
@@ -1635,6 +1493,7 @@
               <a:rPr lang="en-US"/>
               <a:t>Fourth level</a:t>
             </a:r>
+            <a:endParaRPr lang="en-US"/>
           </a:p>
           <a:p>
             <a:pPr lvl="4"/>
@@ -1648,13 +1507,7 @@
       </p:sp>
       <p:sp>
         <p:nvSpPr>
-          <p:cNvPr id="7" name="Date Placeholder 6">
-            <a:extLst>
-              <a:ext uri="{FF2B5EF4-FFF2-40B4-BE49-F238E27FC236}">
-                <a16:creationId xmlns:a16="http://schemas.microsoft.com/office/drawing/2014/main" xmlns="" id="{06897B24-63B2-62BD-79C8-FD9030EEB619}"/>
-              </a:ext>
-            </a:extLst>
-          </p:cNvPr>
+          <p:cNvPr id="7" name="Date Placeholder 6"/>
           <p:cNvSpPr>
             <a:spLocks noGrp="1"/>
           </p:cNvSpPr>
@@ -1677,13 +1530,7 @@
       </p:sp>
       <p:sp>
         <p:nvSpPr>
-          <p:cNvPr id="8" name="Footer Placeholder 7">
-            <a:extLst>
-              <a:ext uri="{FF2B5EF4-FFF2-40B4-BE49-F238E27FC236}">
-                <a16:creationId xmlns:a16="http://schemas.microsoft.com/office/drawing/2014/main" xmlns="" id="{4E290728-B5EC-D8D9-D2DD-EF2B6A582339}"/>
-              </a:ext>
-            </a:extLst>
-          </p:cNvPr>
+          <p:cNvPr id="8" name="Footer Placeholder 7"/>
           <p:cNvSpPr>
             <a:spLocks noGrp="1"/>
           </p:cNvSpPr>
@@ -1700,18 +1547,13 @@
               <a:rPr lang="en-IN"/>
               <a:t>Dr. Devyani Jadhav, Dept of AIML, Sanjivani University</a:t>
             </a:r>
-          </a:p>
-        </p:txBody>
-      </p:sp>
-      <p:sp>
-        <p:nvSpPr>
-          <p:cNvPr id="9" name="Slide Number Placeholder 8">
-            <a:extLst>
-              <a:ext uri="{FF2B5EF4-FFF2-40B4-BE49-F238E27FC236}">
-                <a16:creationId xmlns:a16="http://schemas.microsoft.com/office/drawing/2014/main" xmlns="" id="{C76D9EE4-F86A-28DA-6A87-7BC5E91DC122}"/>
-              </a:ext>
-            </a:extLst>
-          </p:cNvPr>
+            <a:endParaRPr lang="en-IN"/>
+          </a:p>
+        </p:txBody>
+      </p:sp>
+      <p:sp>
+        <p:nvSpPr>
+          <p:cNvPr id="9" name="Slide Number Placeholder 8"/>
           <p:cNvSpPr>
             <a:spLocks noGrp="1"/>
           </p:cNvSpPr>
@@ -1726,19 +1568,12 @@
           <a:p>
             <a:fld id="{33DAA219-780F-40A4-8E4C-A7BED1CAA639}" type="slidenum">
               <a:rPr lang="en-IN" smtClean="0"/>
-              <a:pPr/>
-              <a:t>‹#›</a:t>
             </a:fld>
             <a:endParaRPr lang="en-IN"/>
           </a:p>
         </p:txBody>
       </p:sp>
     </p:spTree>
-    <p:extLst>
-      <p:ext uri="{BB962C8B-B14F-4D97-AF65-F5344CB8AC3E}">
-        <p14:creationId xmlns:p14="http://schemas.microsoft.com/office/powerpoint/2010/main" xmlns="" val="779497131"/>
-      </p:ext>
-    </p:extLst>
   </p:cSld>
   <p:clrMapOvr>
     <a:masterClrMapping/>
@@ -1765,13 +1600,7 @@
       </p:grpSpPr>
       <p:sp>
         <p:nvSpPr>
-          <p:cNvPr id="2" name="Title 1">
-            <a:extLst>
-              <a:ext uri="{FF2B5EF4-FFF2-40B4-BE49-F238E27FC236}">
-                <a16:creationId xmlns:a16="http://schemas.microsoft.com/office/drawing/2014/main" xmlns="" id="{00E3B7FC-C43D-3FCE-BE29-08AF99C5CF54}"/>
-              </a:ext>
-            </a:extLst>
-          </p:cNvPr>
+          <p:cNvPr id="2" name="Title 1"/>
           <p:cNvSpPr>
             <a:spLocks noGrp="1"/>
           </p:cNvSpPr>
@@ -1794,13 +1623,7 @@
       </p:sp>
       <p:sp>
         <p:nvSpPr>
-          <p:cNvPr id="3" name="Date Placeholder 2">
-            <a:extLst>
-              <a:ext uri="{FF2B5EF4-FFF2-40B4-BE49-F238E27FC236}">
-                <a16:creationId xmlns:a16="http://schemas.microsoft.com/office/drawing/2014/main" xmlns="" id="{81F7222F-F35D-64C3-9D98-BF96C9DC3A17}"/>
-              </a:ext>
-            </a:extLst>
-          </p:cNvPr>
+          <p:cNvPr id="3" name="Date Placeholder 2"/>
           <p:cNvSpPr>
             <a:spLocks noGrp="1"/>
           </p:cNvSpPr>
@@ -1823,13 +1646,7 @@
       </p:sp>
       <p:sp>
         <p:nvSpPr>
-          <p:cNvPr id="4" name="Footer Placeholder 3">
-            <a:extLst>
-              <a:ext uri="{FF2B5EF4-FFF2-40B4-BE49-F238E27FC236}">
-                <a16:creationId xmlns:a16="http://schemas.microsoft.com/office/drawing/2014/main" xmlns="" id="{89FD5F53-C775-AB96-6DA5-C08A62A3987E}"/>
-              </a:ext>
-            </a:extLst>
-          </p:cNvPr>
+          <p:cNvPr id="4" name="Footer Placeholder 3"/>
           <p:cNvSpPr>
             <a:spLocks noGrp="1"/>
           </p:cNvSpPr>
@@ -1846,18 +1663,13 @@
               <a:rPr lang="en-IN"/>
               <a:t>Dr. Devyani Jadhav, Dept of AIML, Sanjivani University</a:t>
             </a:r>
-          </a:p>
-        </p:txBody>
-      </p:sp>
-      <p:sp>
-        <p:nvSpPr>
-          <p:cNvPr id="5" name="Slide Number Placeholder 4">
-            <a:extLst>
-              <a:ext uri="{FF2B5EF4-FFF2-40B4-BE49-F238E27FC236}">
-                <a16:creationId xmlns:a16="http://schemas.microsoft.com/office/drawing/2014/main" xmlns="" id="{0B7FEEA5-4CEC-9DA0-9B61-05E3425C76CE}"/>
-              </a:ext>
-            </a:extLst>
-          </p:cNvPr>
+            <a:endParaRPr lang="en-IN"/>
+          </a:p>
+        </p:txBody>
+      </p:sp>
+      <p:sp>
+        <p:nvSpPr>
+          <p:cNvPr id="5" name="Slide Number Placeholder 4"/>
           <p:cNvSpPr>
             <a:spLocks noGrp="1"/>
           </p:cNvSpPr>
@@ -1872,19 +1684,12 @@
           <a:p>
             <a:fld id="{33DAA219-780F-40A4-8E4C-A7BED1CAA639}" type="slidenum">
               <a:rPr lang="en-IN" smtClean="0"/>
-              <a:pPr/>
-              <a:t>‹#›</a:t>
             </a:fld>
             <a:endParaRPr lang="en-IN"/>
           </a:p>
         </p:txBody>
       </p:sp>
     </p:spTree>
-    <p:extLst>
-      <p:ext uri="{BB962C8B-B14F-4D97-AF65-F5344CB8AC3E}">
-        <p14:creationId xmlns:p14="http://schemas.microsoft.com/office/powerpoint/2010/main" xmlns="" val="3807913610"/>
-      </p:ext>
-    </p:extLst>
   </p:cSld>
   <p:clrMapOvr>
     <a:masterClrMapping/>
@@ -1911,13 +1716,7 @@
       </p:grpSpPr>
       <p:sp>
         <p:nvSpPr>
-          <p:cNvPr id="2" name="Date Placeholder 1">
-            <a:extLst>
-              <a:ext uri="{FF2B5EF4-FFF2-40B4-BE49-F238E27FC236}">
-                <a16:creationId xmlns:a16="http://schemas.microsoft.com/office/drawing/2014/main" xmlns="" id="{7CCBAF6D-6C3F-7CA8-5CCF-C12605B7D4FA}"/>
-              </a:ext>
-            </a:extLst>
-          </p:cNvPr>
+          <p:cNvPr id="2" name="Date Placeholder 1"/>
           <p:cNvSpPr>
             <a:spLocks noGrp="1"/>
           </p:cNvSpPr>
@@ -1940,13 +1739,7 @@
       </p:sp>
       <p:sp>
         <p:nvSpPr>
-          <p:cNvPr id="3" name="Footer Placeholder 2">
-            <a:extLst>
-              <a:ext uri="{FF2B5EF4-FFF2-40B4-BE49-F238E27FC236}">
-                <a16:creationId xmlns:a16="http://schemas.microsoft.com/office/drawing/2014/main" xmlns="" id="{132744D8-5BA9-B4D7-12F8-DFA59E326523}"/>
-              </a:ext>
-            </a:extLst>
-          </p:cNvPr>
+          <p:cNvPr id="3" name="Footer Placeholder 2"/>
           <p:cNvSpPr>
             <a:spLocks noGrp="1"/>
           </p:cNvSpPr>
@@ -1963,18 +1756,13 @@
               <a:rPr lang="en-IN"/>
               <a:t>Dr. Devyani Jadhav, Dept of AIML, Sanjivani University</a:t>
             </a:r>
-          </a:p>
-        </p:txBody>
-      </p:sp>
-      <p:sp>
-        <p:nvSpPr>
-          <p:cNvPr id="4" name="Slide Number Placeholder 3">
-            <a:extLst>
-              <a:ext uri="{FF2B5EF4-FFF2-40B4-BE49-F238E27FC236}">
-                <a16:creationId xmlns:a16="http://schemas.microsoft.com/office/drawing/2014/main" xmlns="" id="{2697E8F1-12BD-1B9F-BB44-64C8E77FA6EF}"/>
-              </a:ext>
-            </a:extLst>
-          </p:cNvPr>
+            <a:endParaRPr lang="en-IN"/>
+          </a:p>
+        </p:txBody>
+      </p:sp>
+      <p:sp>
+        <p:nvSpPr>
+          <p:cNvPr id="4" name="Slide Number Placeholder 3"/>
           <p:cNvSpPr>
             <a:spLocks noGrp="1"/>
           </p:cNvSpPr>
@@ -1989,19 +1777,12 @@
           <a:p>
             <a:fld id="{33DAA219-780F-40A4-8E4C-A7BED1CAA639}" type="slidenum">
               <a:rPr lang="en-IN" smtClean="0"/>
-              <a:pPr/>
-              <a:t>‹#›</a:t>
             </a:fld>
             <a:endParaRPr lang="en-IN"/>
           </a:p>
         </p:txBody>
       </p:sp>
     </p:spTree>
-    <p:extLst>
-      <p:ext uri="{BB962C8B-B14F-4D97-AF65-F5344CB8AC3E}">
-        <p14:creationId xmlns:p14="http://schemas.microsoft.com/office/powerpoint/2010/main" xmlns="" val="1936668215"/>
-      </p:ext>
-    </p:extLst>
   </p:cSld>
   <p:clrMapOvr>
     <a:masterClrMapping/>
@@ -2028,13 +1809,7 @@
       </p:grpSpPr>
       <p:sp>
         <p:nvSpPr>
-          <p:cNvPr id="2" name="Title 1">
-            <a:extLst>
-              <a:ext uri="{FF2B5EF4-FFF2-40B4-BE49-F238E27FC236}">
-                <a16:creationId xmlns:a16="http://schemas.microsoft.com/office/drawing/2014/main" xmlns="" id="{11ABADFF-2E1B-3B0B-386D-F36835EFEE26}"/>
-              </a:ext>
-            </a:extLst>
-          </p:cNvPr>
+          <p:cNvPr id="2" name="Title 1"/>
           <p:cNvSpPr>
             <a:spLocks noGrp="1"/>
           </p:cNvSpPr>
@@ -2066,13 +1841,7 @@
       </p:sp>
       <p:sp>
         <p:nvSpPr>
-          <p:cNvPr id="3" name="Content Placeholder 2">
-            <a:extLst>
-              <a:ext uri="{FF2B5EF4-FFF2-40B4-BE49-F238E27FC236}">
-                <a16:creationId xmlns:a16="http://schemas.microsoft.com/office/drawing/2014/main" xmlns="" id="{A3C3A737-6FB5-CFA4-3ABE-D960421598FD}"/>
-              </a:ext>
-            </a:extLst>
-          </p:cNvPr>
+          <p:cNvPr id="3" name="Content Placeholder 2"/>
           <p:cNvSpPr>
             <a:spLocks noGrp="1"/>
           </p:cNvSpPr>
@@ -2123,6 +1892,7 @@
               <a:rPr lang="en-US"/>
               <a:t>Click to edit Master text styles</a:t>
             </a:r>
+            <a:endParaRPr lang="en-US"/>
           </a:p>
           <a:p>
             <a:pPr lvl="1"/>
@@ -2130,6 +1900,7 @@
               <a:rPr lang="en-US"/>
               <a:t>Second level</a:t>
             </a:r>
+            <a:endParaRPr lang="en-US"/>
           </a:p>
           <a:p>
             <a:pPr lvl="2"/>
@@ -2137,6 +1908,7 @@
               <a:rPr lang="en-US"/>
               <a:t>Third level</a:t>
             </a:r>
+            <a:endParaRPr lang="en-US"/>
           </a:p>
           <a:p>
             <a:pPr lvl="3"/>
@@ -2144,6 +1916,7 @@
               <a:rPr lang="en-US"/>
               <a:t>Fourth level</a:t>
             </a:r>
+            <a:endParaRPr lang="en-US"/>
           </a:p>
           <a:p>
             <a:pPr lvl="4"/>
@@ -2157,13 +1930,7 @@
       </p:sp>
       <p:sp>
         <p:nvSpPr>
-          <p:cNvPr id="4" name="Text Placeholder 3">
-            <a:extLst>
-              <a:ext uri="{FF2B5EF4-FFF2-40B4-BE49-F238E27FC236}">
-                <a16:creationId xmlns:a16="http://schemas.microsoft.com/office/drawing/2014/main" xmlns="" id="{7E94E384-6C82-5D99-3BE9-F0F740503EC9}"/>
-              </a:ext>
-            </a:extLst>
-          </p:cNvPr>
+          <p:cNvPr id="4" name="Text Placeholder 3"/>
           <p:cNvSpPr>
             <a:spLocks noGrp="1"/>
           </p:cNvSpPr>
@@ -2223,18 +1990,13 @@
               <a:rPr lang="en-US"/>
               <a:t>Click to edit Master text styles</a:t>
             </a:r>
-          </a:p>
-        </p:txBody>
-      </p:sp>
-      <p:sp>
-        <p:nvSpPr>
-          <p:cNvPr id="5" name="Date Placeholder 4">
-            <a:extLst>
-              <a:ext uri="{FF2B5EF4-FFF2-40B4-BE49-F238E27FC236}">
-                <a16:creationId xmlns:a16="http://schemas.microsoft.com/office/drawing/2014/main" xmlns="" id="{6FC7E652-3A91-3E7B-8593-8766D65B481E}"/>
-              </a:ext>
-            </a:extLst>
-          </p:cNvPr>
+            <a:endParaRPr lang="en-US"/>
+          </a:p>
+        </p:txBody>
+      </p:sp>
+      <p:sp>
+        <p:nvSpPr>
+          <p:cNvPr id="5" name="Date Placeholder 4"/>
           <p:cNvSpPr>
             <a:spLocks noGrp="1"/>
           </p:cNvSpPr>
@@ -2257,13 +2019,7 @@
       </p:sp>
       <p:sp>
         <p:nvSpPr>
-          <p:cNvPr id="6" name="Footer Placeholder 5">
-            <a:extLst>
-              <a:ext uri="{FF2B5EF4-FFF2-40B4-BE49-F238E27FC236}">
-                <a16:creationId xmlns:a16="http://schemas.microsoft.com/office/drawing/2014/main" xmlns="" id="{6024453F-95E8-961C-A87A-9A09DD445EB6}"/>
-              </a:ext>
-            </a:extLst>
-          </p:cNvPr>
+          <p:cNvPr id="6" name="Footer Placeholder 5"/>
           <p:cNvSpPr>
             <a:spLocks noGrp="1"/>
           </p:cNvSpPr>
@@ -2280,18 +2036,13 @@
               <a:rPr lang="en-IN"/>
               <a:t>Dr. Devyani Jadhav, Dept of AIML, Sanjivani University</a:t>
             </a:r>
-          </a:p>
-        </p:txBody>
-      </p:sp>
-      <p:sp>
-        <p:nvSpPr>
-          <p:cNvPr id="7" name="Slide Number Placeholder 6">
-            <a:extLst>
-              <a:ext uri="{FF2B5EF4-FFF2-40B4-BE49-F238E27FC236}">
-                <a16:creationId xmlns:a16="http://schemas.microsoft.com/office/drawing/2014/main" xmlns="" id="{5BC457BB-3D96-B646-BB34-66F247031110}"/>
-              </a:ext>
-            </a:extLst>
-          </p:cNvPr>
+            <a:endParaRPr lang="en-IN"/>
+          </a:p>
+        </p:txBody>
+      </p:sp>
+      <p:sp>
+        <p:nvSpPr>
+          <p:cNvPr id="7" name="Slide Number Placeholder 6"/>
           <p:cNvSpPr>
             <a:spLocks noGrp="1"/>
           </p:cNvSpPr>
@@ -2306,19 +2057,12 @@
           <a:p>
             <a:fld id="{33DAA219-780F-40A4-8E4C-A7BED1CAA639}" type="slidenum">
               <a:rPr lang="en-IN" smtClean="0"/>
-              <a:pPr/>
-              <a:t>‹#›</a:t>
             </a:fld>
             <a:endParaRPr lang="en-IN"/>
           </a:p>
         </p:txBody>
       </p:sp>
     </p:spTree>
-    <p:extLst>
-      <p:ext uri="{BB962C8B-B14F-4D97-AF65-F5344CB8AC3E}">
-        <p14:creationId xmlns:p14="http://schemas.microsoft.com/office/powerpoint/2010/main" xmlns="" val="2976578304"/>
-      </p:ext>
-    </p:extLst>
   </p:cSld>
   <p:clrMapOvr>
     <a:masterClrMapping/>
@@ -2345,13 +2089,7 @@
       </p:grpSpPr>
       <p:sp>
         <p:nvSpPr>
-          <p:cNvPr id="2" name="Title 1">
-            <a:extLst>
-              <a:ext uri="{FF2B5EF4-FFF2-40B4-BE49-F238E27FC236}">
-                <a16:creationId xmlns:a16="http://schemas.microsoft.com/office/drawing/2014/main" xmlns="" id="{60AE7830-A8F2-0361-7EDF-061975EC2DD8}"/>
-              </a:ext>
-            </a:extLst>
-          </p:cNvPr>
+          <p:cNvPr id="2" name="Title 1"/>
           <p:cNvSpPr>
             <a:spLocks noGrp="1"/>
           </p:cNvSpPr>
@@ -2383,13 +2121,7 @@
       </p:sp>
       <p:sp>
         <p:nvSpPr>
-          <p:cNvPr id="3" name="Picture Placeholder 2">
-            <a:extLst>
-              <a:ext uri="{FF2B5EF4-FFF2-40B4-BE49-F238E27FC236}">
-                <a16:creationId xmlns:a16="http://schemas.microsoft.com/office/drawing/2014/main" xmlns="" id="{DAA65032-685C-4868-82EB-EB5E846723DA}"/>
-              </a:ext>
-            </a:extLst>
-          </p:cNvPr>
+          <p:cNvPr id="3" name="Picture Placeholder 2"/>
           <p:cNvSpPr>
             <a:spLocks noGrp="1"/>
           </p:cNvSpPr>
@@ -2450,13 +2182,7 @@
       </p:sp>
       <p:sp>
         <p:nvSpPr>
-          <p:cNvPr id="4" name="Text Placeholder 3">
-            <a:extLst>
-              <a:ext uri="{FF2B5EF4-FFF2-40B4-BE49-F238E27FC236}">
-                <a16:creationId xmlns:a16="http://schemas.microsoft.com/office/drawing/2014/main" xmlns="" id="{5123C01A-50C3-D0B6-A54E-665686AF1614}"/>
-              </a:ext>
-            </a:extLst>
-          </p:cNvPr>
+          <p:cNvPr id="4" name="Text Placeholder 3"/>
           <p:cNvSpPr>
             <a:spLocks noGrp="1"/>
           </p:cNvSpPr>
@@ -2516,18 +2242,13 @@
               <a:rPr lang="en-US"/>
               <a:t>Click to edit Master text styles</a:t>
             </a:r>
-          </a:p>
-        </p:txBody>
-      </p:sp>
-      <p:sp>
-        <p:nvSpPr>
-          <p:cNvPr id="5" name="Date Placeholder 4">
-            <a:extLst>
-              <a:ext uri="{FF2B5EF4-FFF2-40B4-BE49-F238E27FC236}">
-                <a16:creationId xmlns:a16="http://schemas.microsoft.com/office/drawing/2014/main" xmlns="" id="{2CAA4942-F4C7-EB1B-9193-A412295D14E9}"/>
-              </a:ext>
-            </a:extLst>
-          </p:cNvPr>
+            <a:endParaRPr lang="en-US"/>
+          </a:p>
+        </p:txBody>
+      </p:sp>
+      <p:sp>
+        <p:nvSpPr>
+          <p:cNvPr id="5" name="Date Placeholder 4"/>
           <p:cNvSpPr>
             <a:spLocks noGrp="1"/>
           </p:cNvSpPr>
@@ -2550,13 +2271,7 @@
       </p:sp>
       <p:sp>
         <p:nvSpPr>
-          <p:cNvPr id="6" name="Footer Placeholder 5">
-            <a:extLst>
-              <a:ext uri="{FF2B5EF4-FFF2-40B4-BE49-F238E27FC236}">
-                <a16:creationId xmlns:a16="http://schemas.microsoft.com/office/drawing/2014/main" xmlns="" id="{0C6ECD5B-57BD-C112-0FDC-3FF8DFF3783D}"/>
-              </a:ext>
-            </a:extLst>
-          </p:cNvPr>
+          <p:cNvPr id="6" name="Footer Placeholder 5"/>
           <p:cNvSpPr>
             <a:spLocks noGrp="1"/>
           </p:cNvSpPr>
@@ -2573,18 +2288,13 @@
               <a:rPr lang="en-IN"/>
               <a:t>Dr. Devyani Jadhav, Dept of AIML, Sanjivani University</a:t>
             </a:r>
-          </a:p>
-        </p:txBody>
-      </p:sp>
-      <p:sp>
-        <p:nvSpPr>
-          <p:cNvPr id="7" name="Slide Number Placeholder 6">
-            <a:extLst>
-              <a:ext uri="{FF2B5EF4-FFF2-40B4-BE49-F238E27FC236}">
-                <a16:creationId xmlns:a16="http://schemas.microsoft.com/office/drawing/2014/main" xmlns="" id="{D7CBC4A8-83AB-CE7A-4E6E-B9BDAE956CB7}"/>
-              </a:ext>
-            </a:extLst>
-          </p:cNvPr>
+            <a:endParaRPr lang="en-IN"/>
+          </a:p>
+        </p:txBody>
+      </p:sp>
+      <p:sp>
+        <p:nvSpPr>
+          <p:cNvPr id="7" name="Slide Number Placeholder 6"/>
           <p:cNvSpPr>
             <a:spLocks noGrp="1"/>
           </p:cNvSpPr>
@@ -2599,19 +2309,12 @@
           <a:p>
             <a:fld id="{33DAA219-780F-40A4-8E4C-A7BED1CAA639}" type="slidenum">
               <a:rPr lang="en-IN" smtClean="0"/>
-              <a:pPr/>
-              <a:t>‹#›</a:t>
             </a:fld>
             <a:endParaRPr lang="en-IN"/>
           </a:p>
         </p:txBody>
       </p:sp>
     </p:spTree>
-    <p:extLst>
-      <p:ext uri="{BB962C8B-B14F-4D97-AF65-F5344CB8AC3E}">
-        <p14:creationId xmlns:p14="http://schemas.microsoft.com/office/powerpoint/2010/main" xmlns="" val="2950533856"/>
-      </p:ext>
-    </p:extLst>
   </p:cSld>
   <p:clrMapOvr>
     <a:masterClrMapping/>
@@ -2638,13 +2341,7 @@
       </p:grpSpPr>
       <p:sp>
         <p:nvSpPr>
-          <p:cNvPr id="2" name="Title 1">
-            <a:extLst>
-              <a:ext uri="{FF2B5EF4-FFF2-40B4-BE49-F238E27FC236}">
-                <a16:creationId xmlns:a16="http://schemas.microsoft.com/office/drawing/2014/main" xmlns="" id="{A320A670-9FE6-9AD4-9EE9-28011522AC35}"/>
-              </a:ext>
-            </a:extLst>
-          </p:cNvPr>
+          <p:cNvPr id="2" name="Title 1"/>
           <p:cNvSpPr>
             <a:spLocks noGrp="1"/>
           </p:cNvSpPr>
@@ -2667,13 +2364,7 @@
       </p:sp>
       <p:sp>
         <p:nvSpPr>
-          <p:cNvPr id="3" name="Vertical Text Placeholder 2">
-            <a:extLst>
-              <a:ext uri="{FF2B5EF4-FFF2-40B4-BE49-F238E27FC236}">
-                <a16:creationId xmlns:a16="http://schemas.microsoft.com/office/drawing/2014/main" xmlns="" id="{02646CB7-3E51-7B3E-788E-40589739D339}"/>
-              </a:ext>
-            </a:extLst>
-          </p:cNvPr>
+          <p:cNvPr id="3" name="Vertical Text Placeholder 2"/>
           <p:cNvSpPr>
             <a:spLocks noGrp="1"/>
           </p:cNvSpPr>
@@ -2691,6 +2382,7 @@
               <a:rPr lang="en-US"/>
               <a:t>Click to edit Master text styles</a:t>
             </a:r>
+            <a:endParaRPr lang="en-US"/>
           </a:p>
           <a:p>
             <a:pPr lvl="1"/>
@@ -2698,6 +2390,7 @@
               <a:rPr lang="en-US"/>
               <a:t>Second level</a:t>
             </a:r>
+            <a:endParaRPr lang="en-US"/>
           </a:p>
           <a:p>
             <a:pPr lvl="2"/>
@@ -2705,6 +2398,7 @@
               <a:rPr lang="en-US"/>
               <a:t>Third level</a:t>
             </a:r>
+            <a:endParaRPr lang="en-US"/>
           </a:p>
           <a:p>
             <a:pPr lvl="3"/>
@@ -2712,6 +2406,7 @@
               <a:rPr lang="en-US"/>
               <a:t>Fourth level</a:t>
             </a:r>
+            <a:endParaRPr lang="en-US"/>
           </a:p>
           <a:p>
             <a:pPr lvl="4"/>
@@ -2725,13 +2420,7 @@
       </p:sp>
       <p:sp>
         <p:nvSpPr>
-          <p:cNvPr id="4" name="Date Placeholder 3">
-            <a:extLst>
-              <a:ext uri="{FF2B5EF4-FFF2-40B4-BE49-F238E27FC236}">
-                <a16:creationId xmlns:a16="http://schemas.microsoft.com/office/drawing/2014/main" xmlns="" id="{88BC58E6-EBB7-F34C-3B71-3F6044AAAAD2}"/>
-              </a:ext>
-            </a:extLst>
-          </p:cNvPr>
+          <p:cNvPr id="4" name="Date Placeholder 3"/>
           <p:cNvSpPr>
             <a:spLocks noGrp="1"/>
           </p:cNvSpPr>
@@ -2754,13 +2443,7 @@
       </p:sp>
       <p:sp>
         <p:nvSpPr>
-          <p:cNvPr id="5" name="Footer Placeholder 4">
-            <a:extLst>
-              <a:ext uri="{FF2B5EF4-FFF2-40B4-BE49-F238E27FC236}">
-                <a16:creationId xmlns:a16="http://schemas.microsoft.com/office/drawing/2014/main" xmlns="" id="{CB172BDA-99BF-047E-EAAD-97089F0A9016}"/>
-              </a:ext>
-            </a:extLst>
-          </p:cNvPr>
+          <p:cNvPr id="5" name="Footer Placeholder 4"/>
           <p:cNvSpPr>
             <a:spLocks noGrp="1"/>
           </p:cNvSpPr>
@@ -2777,18 +2460,13 @@
               <a:rPr lang="en-IN"/>
               <a:t>Dr. Devyani Jadhav, Dept of AIML, Sanjivani University</a:t>
             </a:r>
-          </a:p>
-        </p:txBody>
-      </p:sp>
-      <p:sp>
-        <p:nvSpPr>
-          <p:cNvPr id="6" name="Slide Number Placeholder 5">
-            <a:extLst>
-              <a:ext uri="{FF2B5EF4-FFF2-40B4-BE49-F238E27FC236}">
-                <a16:creationId xmlns:a16="http://schemas.microsoft.com/office/drawing/2014/main" xmlns="" id="{0EADE553-54FE-CDA6-8ACC-AE3A38B08120}"/>
-              </a:ext>
-            </a:extLst>
-          </p:cNvPr>
+            <a:endParaRPr lang="en-IN"/>
+          </a:p>
+        </p:txBody>
+      </p:sp>
+      <p:sp>
+        <p:nvSpPr>
+          <p:cNvPr id="6" name="Slide Number Placeholder 5"/>
           <p:cNvSpPr>
             <a:spLocks noGrp="1"/>
           </p:cNvSpPr>
@@ -2803,19 +2481,12 @@
           <a:p>
             <a:fld id="{33DAA219-780F-40A4-8E4C-A7BED1CAA639}" type="slidenum">
               <a:rPr lang="en-IN" smtClean="0"/>
-              <a:pPr/>
-              <a:t>‹#›</a:t>
             </a:fld>
             <a:endParaRPr lang="en-IN"/>
           </a:p>
         </p:txBody>
       </p:sp>
     </p:spTree>
-    <p:extLst>
-      <p:ext uri="{BB962C8B-B14F-4D97-AF65-F5344CB8AC3E}">
-        <p14:creationId xmlns:p14="http://schemas.microsoft.com/office/powerpoint/2010/main" xmlns="" val="3529112003"/>
-      </p:ext>
-    </p:extLst>
   </p:cSld>
   <p:clrMapOvr>
     <a:masterClrMapping/>
@@ -2842,13 +2513,7 @@
       </p:grpSpPr>
       <p:sp>
         <p:nvSpPr>
-          <p:cNvPr id="2" name="Vertical Title 1">
-            <a:extLst>
-              <a:ext uri="{FF2B5EF4-FFF2-40B4-BE49-F238E27FC236}">
-                <a16:creationId xmlns:a16="http://schemas.microsoft.com/office/drawing/2014/main" xmlns="" id="{AC9BB454-A21B-A71A-BD4C-8F4AA004C884}"/>
-              </a:ext>
-            </a:extLst>
-          </p:cNvPr>
+          <p:cNvPr id="2" name="Vertical Title 1"/>
           <p:cNvSpPr>
             <a:spLocks noGrp="1"/>
           </p:cNvSpPr>
@@ -2876,13 +2541,7 @@
       </p:sp>
       <p:sp>
         <p:nvSpPr>
-          <p:cNvPr id="3" name="Vertical Text Placeholder 2">
-            <a:extLst>
-              <a:ext uri="{FF2B5EF4-FFF2-40B4-BE49-F238E27FC236}">
-                <a16:creationId xmlns:a16="http://schemas.microsoft.com/office/drawing/2014/main" xmlns="" id="{0F1FD015-A911-43BC-98E2-D2CE5519604C}"/>
-              </a:ext>
-            </a:extLst>
-          </p:cNvPr>
+          <p:cNvPr id="3" name="Vertical Text Placeholder 2"/>
           <p:cNvSpPr>
             <a:spLocks noGrp="1"/>
           </p:cNvSpPr>
@@ -2905,6 +2564,7 @@
               <a:rPr lang="en-US"/>
               <a:t>Click to edit Master text styles</a:t>
             </a:r>
+            <a:endParaRPr lang="en-US"/>
           </a:p>
           <a:p>
             <a:pPr lvl="1"/>
@@ -2912,6 +2572,7 @@
               <a:rPr lang="en-US"/>
               <a:t>Second level</a:t>
             </a:r>
+            <a:endParaRPr lang="en-US"/>
           </a:p>
           <a:p>
             <a:pPr lvl="2"/>
@@ -2919,6 +2580,7 @@
               <a:rPr lang="en-US"/>
               <a:t>Third level</a:t>
             </a:r>
+            <a:endParaRPr lang="en-US"/>
           </a:p>
           <a:p>
             <a:pPr lvl="3"/>
@@ -2926,6 +2588,7 @@
               <a:rPr lang="en-US"/>
               <a:t>Fourth level</a:t>
             </a:r>
+            <a:endParaRPr lang="en-US"/>
           </a:p>
           <a:p>
             <a:pPr lvl="4"/>
@@ -2939,13 +2602,7 @@
       </p:sp>
       <p:sp>
         <p:nvSpPr>
-          <p:cNvPr id="4" name="Date Placeholder 3">
-            <a:extLst>
-              <a:ext uri="{FF2B5EF4-FFF2-40B4-BE49-F238E27FC236}">
-                <a16:creationId xmlns:a16="http://schemas.microsoft.com/office/drawing/2014/main" xmlns="" id="{DDD19585-AA96-4DEC-9CBB-62AEBDE2C25F}"/>
-              </a:ext>
-            </a:extLst>
-          </p:cNvPr>
+          <p:cNvPr id="4" name="Date Placeholder 3"/>
           <p:cNvSpPr>
             <a:spLocks noGrp="1"/>
           </p:cNvSpPr>
@@ -2968,13 +2625,7 @@
       </p:sp>
       <p:sp>
         <p:nvSpPr>
-          <p:cNvPr id="5" name="Footer Placeholder 4">
-            <a:extLst>
-              <a:ext uri="{FF2B5EF4-FFF2-40B4-BE49-F238E27FC236}">
-                <a16:creationId xmlns:a16="http://schemas.microsoft.com/office/drawing/2014/main" xmlns="" id="{963135E5-D0F6-CC81-91F3-DC69B46CEDD6}"/>
-              </a:ext>
-            </a:extLst>
-          </p:cNvPr>
+          <p:cNvPr id="5" name="Footer Placeholder 4"/>
           <p:cNvSpPr>
             <a:spLocks noGrp="1"/>
           </p:cNvSpPr>
@@ -2991,18 +2642,13 @@
               <a:rPr lang="en-IN"/>
               <a:t>Dr. Devyani Jadhav, Dept of AIML, Sanjivani University</a:t>
             </a:r>
-          </a:p>
-        </p:txBody>
-      </p:sp>
-      <p:sp>
-        <p:nvSpPr>
-          <p:cNvPr id="6" name="Slide Number Placeholder 5">
-            <a:extLst>
-              <a:ext uri="{FF2B5EF4-FFF2-40B4-BE49-F238E27FC236}">
-                <a16:creationId xmlns:a16="http://schemas.microsoft.com/office/drawing/2014/main" xmlns="" id="{9E0BD697-DF10-8CF8-868B-BC5EFD3A230F}"/>
-              </a:ext>
-            </a:extLst>
-          </p:cNvPr>
+            <a:endParaRPr lang="en-IN"/>
+          </a:p>
+        </p:txBody>
+      </p:sp>
+      <p:sp>
+        <p:nvSpPr>
+          <p:cNvPr id="6" name="Slide Number Placeholder 5"/>
           <p:cNvSpPr>
             <a:spLocks noGrp="1"/>
           </p:cNvSpPr>
@@ -3017,19 +2663,12 @@
           <a:p>
             <a:fld id="{33DAA219-780F-40A4-8E4C-A7BED1CAA639}" type="slidenum">
               <a:rPr lang="en-IN" smtClean="0"/>
-              <a:pPr/>
-              <a:t>‹#›</a:t>
             </a:fld>
             <a:endParaRPr lang="en-IN"/>
           </a:p>
         </p:txBody>
       </p:sp>
     </p:spTree>
-    <p:extLst>
-      <p:ext uri="{BB962C8B-B14F-4D97-AF65-F5344CB8AC3E}">
-        <p14:creationId xmlns:p14="http://schemas.microsoft.com/office/powerpoint/2010/main" xmlns="" val="3421913934"/>
-      </p:ext>
-    </p:extLst>
   </p:cSld>
   <p:clrMapOvr>
     <a:masterClrMapping/>
@@ -3056,13 +2695,7 @@
       </p:grpSpPr>
       <p:sp>
         <p:nvSpPr>
-          <p:cNvPr id="2" name="Title 1">
-            <a:extLst>
-              <a:ext uri="{FF2B5EF4-FFF2-40B4-BE49-F238E27FC236}">
-                <a16:creationId xmlns:a16="http://schemas.microsoft.com/office/drawing/2014/main" xmlns="" id="{1ADAE89D-E47E-2102-397C-B9062FCF5897}"/>
-              </a:ext>
-            </a:extLst>
-          </p:cNvPr>
+          <p:cNvPr id="2" name="Title 1"/>
           <p:cNvSpPr>
             <a:spLocks noGrp="1"/>
           </p:cNvSpPr>
@@ -3099,13 +2732,7 @@
       </p:sp>
       <p:sp>
         <p:nvSpPr>
-          <p:cNvPr id="3" name="Content Placeholder 2">
-            <a:extLst>
-              <a:ext uri="{FF2B5EF4-FFF2-40B4-BE49-F238E27FC236}">
-                <a16:creationId xmlns:a16="http://schemas.microsoft.com/office/drawing/2014/main" xmlns="" id="{AB5B4341-62DD-748D-747F-E3114EAF32A4}"/>
-              </a:ext>
-            </a:extLst>
-          </p:cNvPr>
+          <p:cNvPr id="3" name="Content Placeholder 2"/>
           <p:cNvSpPr>
             <a:spLocks noGrp="1"/>
           </p:cNvSpPr>
@@ -3123,6 +2750,7 @@
               <a:rPr lang="en-US" dirty="0"/>
               <a:t>Click to edit Master text styles</a:t>
             </a:r>
+            <a:endParaRPr lang="en-US" dirty="0"/>
           </a:p>
           <a:p>
             <a:pPr lvl="1"/>
@@ -3130,6 +2758,7 @@
               <a:rPr lang="en-US" dirty="0"/>
               <a:t>Second level</a:t>
             </a:r>
+            <a:endParaRPr lang="en-US" dirty="0"/>
           </a:p>
           <a:p>
             <a:pPr lvl="2"/>
@@ -3137,6 +2766,7 @@
               <a:rPr lang="en-US" dirty="0"/>
               <a:t>Third level</a:t>
             </a:r>
+            <a:endParaRPr lang="en-US" dirty="0"/>
           </a:p>
           <a:p>
             <a:pPr lvl="3"/>
@@ -3144,6 +2774,7 @@
               <a:rPr lang="en-US" dirty="0"/>
               <a:t>Fourth level</a:t>
             </a:r>
+            <a:endParaRPr lang="en-US" dirty="0"/>
           </a:p>
           <a:p>
             <a:pPr lvl="4"/>
@@ -3157,13 +2788,7 @@
       </p:sp>
       <p:pic>
         <p:nvPicPr>
-          <p:cNvPr id="8" name="Image 4">
-            <a:extLst>
-              <a:ext uri="{FF2B5EF4-FFF2-40B4-BE49-F238E27FC236}">
-                <a16:creationId xmlns:a16="http://schemas.microsoft.com/office/drawing/2014/main" xmlns="" id="{8058198D-7CC8-A5B4-CF2A-F8E752D33A31}"/>
-              </a:ext>
-            </a:extLst>
-          </p:cNvPr>
+          <p:cNvPr id="8" name="Image 4"/>
           <p:cNvPicPr/>
           <p:nvPr userDrawn="1"/>
         </p:nvPicPr>
@@ -3185,13 +2810,7 @@
       </p:pic>
       <p:sp>
         <p:nvSpPr>
-          <p:cNvPr id="12" name="Flowchart: Process 11">
-            <a:extLst>
-              <a:ext uri="{FF2B5EF4-FFF2-40B4-BE49-F238E27FC236}">
-                <a16:creationId xmlns:a16="http://schemas.microsoft.com/office/drawing/2014/main" xmlns="" id="{B1D83C9B-AF13-21EE-CCD9-A38D4AB36621}"/>
-              </a:ext>
-            </a:extLst>
-          </p:cNvPr>
+          <p:cNvPr id="12" name="Flowchart: Process 11"/>
           <p:cNvSpPr/>
           <p:nvPr userDrawn="1"/>
         </p:nvSpPr>
@@ -3234,13 +2853,7 @@
       </p:sp>
       <p:sp>
         <p:nvSpPr>
-          <p:cNvPr id="4" name="Date Placeholder 3">
-            <a:extLst>
-              <a:ext uri="{FF2B5EF4-FFF2-40B4-BE49-F238E27FC236}">
-                <a16:creationId xmlns:a16="http://schemas.microsoft.com/office/drawing/2014/main" xmlns="" id="{FEC6616C-9B06-65F0-5166-ED87132C29E9}"/>
-              </a:ext>
-            </a:extLst>
-          </p:cNvPr>
+          <p:cNvPr id="4" name="Date Placeholder 3"/>
           <p:cNvSpPr>
             <a:spLocks noGrp="1"/>
           </p:cNvSpPr>
@@ -3281,13 +2894,7 @@
       </p:sp>
       <p:sp>
         <p:nvSpPr>
-          <p:cNvPr id="5" name="Footer Placeholder 4">
-            <a:extLst>
-              <a:ext uri="{FF2B5EF4-FFF2-40B4-BE49-F238E27FC236}">
-                <a16:creationId xmlns:a16="http://schemas.microsoft.com/office/drawing/2014/main" xmlns="" id="{D2C04C1A-0D86-38E7-5557-58C5AB770D58}"/>
-              </a:ext>
-            </a:extLst>
-          </p:cNvPr>
+          <p:cNvPr id="5" name="Footer Placeholder 4"/>
           <p:cNvSpPr>
             <a:spLocks noGrp="1"/>
           </p:cNvSpPr>
@@ -3322,18 +2929,13 @@
               <a:rPr lang="en-IN" dirty="0"/>
               <a:t>Dr. Devyani Jadhav, Dept of AIML, Sanjivani University</a:t>
             </a:r>
-          </a:p>
-        </p:txBody>
-      </p:sp>
-      <p:sp>
-        <p:nvSpPr>
-          <p:cNvPr id="6" name="Slide Number Placeholder 5">
-            <a:extLst>
-              <a:ext uri="{FF2B5EF4-FFF2-40B4-BE49-F238E27FC236}">
-                <a16:creationId xmlns:a16="http://schemas.microsoft.com/office/drawing/2014/main" xmlns="" id="{C81F73EB-8460-5E6B-90D2-750124BBBD74}"/>
-              </a:ext>
-            </a:extLst>
-          </p:cNvPr>
+            <a:endParaRPr lang="en-IN" dirty="0"/>
+          </a:p>
+        </p:txBody>
+      </p:sp>
+      <p:sp>
+        <p:nvSpPr>
+          <p:cNvPr id="6" name="Slide Number Placeholder 5"/>
           <p:cNvSpPr>
             <a:spLocks noGrp="1"/>
           </p:cNvSpPr>
@@ -3364,8 +2966,6 @@
           <a:p>
             <a:fld id="{75B0C241-D0FA-41C4-806B-7A3C5377B352}" type="slidenum">
               <a:rPr lang="en-IN" smtClean="0"/>
-              <a:pPr/>
-              <a:t>‹#›</a:t>
             </a:fld>
             <a:endParaRPr lang="en-IN"/>
           </a:p>
@@ -3373,13 +2973,7 @@
       </p:sp>
       <p:cxnSp>
         <p:nvCxnSpPr>
-          <p:cNvPr id="13" name="Straight Connector 12">
-            <a:extLst>
-              <a:ext uri="{FF2B5EF4-FFF2-40B4-BE49-F238E27FC236}">
-                <a16:creationId xmlns:a16="http://schemas.microsoft.com/office/drawing/2014/main" xmlns="" id="{5A380267-7AEF-7CA9-8B3C-EA6C807FFCDB}"/>
-              </a:ext>
-            </a:extLst>
-          </p:cNvPr>
+          <p:cNvPr id="13" name="Straight Connector 12"/>
           <p:cNvCxnSpPr/>
           <p:nvPr userDrawn="1"/>
         </p:nvCxnSpPr>
@@ -3414,13 +3008,7 @@
       </p:cxnSp>
       <p:cxnSp>
         <p:nvCxnSpPr>
-          <p:cNvPr id="14" name="Straight Connector 13">
-            <a:extLst>
-              <a:ext uri="{FF2B5EF4-FFF2-40B4-BE49-F238E27FC236}">
-                <a16:creationId xmlns:a16="http://schemas.microsoft.com/office/drawing/2014/main" xmlns="" id="{9E41C578-50ED-8FD4-2294-A3915E895D29}"/>
-              </a:ext>
-            </a:extLst>
-          </p:cNvPr>
+          <p:cNvPr id="14" name="Straight Connector 13"/>
           <p:cNvCxnSpPr/>
           <p:nvPr userDrawn="1"/>
         </p:nvCxnSpPr>
@@ -3454,11 +3042,6 @@
         </p:style>
       </p:cxnSp>
     </p:spTree>
-    <p:extLst>
-      <p:ext uri="{BB962C8B-B14F-4D97-AF65-F5344CB8AC3E}">
-        <p14:creationId xmlns:p14="http://schemas.microsoft.com/office/powerpoint/2010/main" xmlns="" val="4072725167"/>
-      </p:ext>
-    </p:extLst>
   </p:cSld>
   <p:clrMapOvr>
     <a:masterClrMapping/>
@@ -3485,13 +3068,7 @@
       </p:grpSpPr>
       <p:sp>
         <p:nvSpPr>
-          <p:cNvPr id="2" name="Title 1">
-            <a:extLst>
-              <a:ext uri="{FF2B5EF4-FFF2-40B4-BE49-F238E27FC236}">
-                <a16:creationId xmlns:a16="http://schemas.microsoft.com/office/drawing/2014/main" xmlns="" id="{5A539FAE-A4CC-7DB8-1693-37652D94D477}"/>
-              </a:ext>
-            </a:extLst>
-          </p:cNvPr>
+          <p:cNvPr id="2" name="Title 1"/>
           <p:cNvSpPr>
             <a:spLocks noGrp="1"/>
           </p:cNvSpPr>
@@ -3528,13 +3105,7 @@
       </p:sp>
       <p:sp>
         <p:nvSpPr>
-          <p:cNvPr id="3" name="Text Placeholder 2">
-            <a:extLst>
-              <a:ext uri="{FF2B5EF4-FFF2-40B4-BE49-F238E27FC236}">
-                <a16:creationId xmlns:a16="http://schemas.microsoft.com/office/drawing/2014/main" xmlns="" id="{46D0B15E-F428-47CF-9970-C4AE77E77E18}"/>
-              </a:ext>
-            </a:extLst>
-          </p:cNvPr>
+          <p:cNvPr id="3" name="Text Placeholder 2"/>
           <p:cNvSpPr>
             <a:spLocks noGrp="1"/>
           </p:cNvSpPr>
@@ -3648,18 +3219,13 @@
               <a:rPr lang="en-US" dirty="0"/>
               <a:t>Click to edit Master text styles</a:t>
             </a:r>
+            <a:endParaRPr lang="en-US" dirty="0"/>
           </a:p>
         </p:txBody>
       </p:sp>
       <p:pic>
         <p:nvPicPr>
-          <p:cNvPr id="8" name="Image 4">
-            <a:extLst>
-              <a:ext uri="{FF2B5EF4-FFF2-40B4-BE49-F238E27FC236}">
-                <a16:creationId xmlns:a16="http://schemas.microsoft.com/office/drawing/2014/main" xmlns="" id="{27C1816B-CA21-8EC0-4118-8DC2A4B9E729}"/>
-              </a:ext>
-            </a:extLst>
-          </p:cNvPr>
+          <p:cNvPr id="8" name="Image 4"/>
           <p:cNvPicPr/>
           <p:nvPr userDrawn="1"/>
         </p:nvPicPr>
@@ -3681,13 +3247,7 @@
       </p:pic>
       <p:sp>
         <p:nvSpPr>
-          <p:cNvPr id="11" name="Flowchart: Process 10">
-            <a:extLst>
-              <a:ext uri="{FF2B5EF4-FFF2-40B4-BE49-F238E27FC236}">
-                <a16:creationId xmlns:a16="http://schemas.microsoft.com/office/drawing/2014/main" xmlns="" id="{E2D1091F-33D9-2226-9ED6-908D3B6926C4}"/>
-              </a:ext>
-            </a:extLst>
-          </p:cNvPr>
+          <p:cNvPr id="11" name="Flowchart: Process 10"/>
           <p:cNvSpPr/>
           <p:nvPr userDrawn="1"/>
         </p:nvSpPr>
@@ -3730,13 +3290,7 @@
       </p:sp>
       <p:sp>
         <p:nvSpPr>
-          <p:cNvPr id="12" name="Date Placeholder 3">
-            <a:extLst>
-              <a:ext uri="{FF2B5EF4-FFF2-40B4-BE49-F238E27FC236}">
-                <a16:creationId xmlns:a16="http://schemas.microsoft.com/office/drawing/2014/main" xmlns="" id="{B439AF9D-FB3A-9C1D-9A9B-CBA376EDF636}"/>
-              </a:ext>
-            </a:extLst>
-          </p:cNvPr>
+          <p:cNvPr id="12" name="Date Placeholder 3"/>
           <p:cNvSpPr>
             <a:spLocks noGrp="1"/>
           </p:cNvSpPr>
@@ -3777,13 +3331,7 @@
       </p:sp>
       <p:sp>
         <p:nvSpPr>
-          <p:cNvPr id="13" name="Footer Placeholder 4">
-            <a:extLst>
-              <a:ext uri="{FF2B5EF4-FFF2-40B4-BE49-F238E27FC236}">
-                <a16:creationId xmlns:a16="http://schemas.microsoft.com/office/drawing/2014/main" xmlns="" id="{1A2B3928-9705-4ABA-8F77-E2DB6B61F35C}"/>
-              </a:ext>
-            </a:extLst>
-          </p:cNvPr>
+          <p:cNvPr id="13" name="Footer Placeholder 4"/>
           <p:cNvSpPr>
             <a:spLocks noGrp="1"/>
           </p:cNvSpPr>
@@ -3818,18 +3366,13 @@
               <a:rPr lang="en-IN" dirty="0"/>
               <a:t>Dr. Devyani Jadhav, Dept of AIML, Sanjivani University</a:t>
             </a:r>
-          </a:p>
-        </p:txBody>
-      </p:sp>
-      <p:sp>
-        <p:nvSpPr>
-          <p:cNvPr id="14" name="Slide Number Placeholder 5">
-            <a:extLst>
-              <a:ext uri="{FF2B5EF4-FFF2-40B4-BE49-F238E27FC236}">
-                <a16:creationId xmlns:a16="http://schemas.microsoft.com/office/drawing/2014/main" xmlns="" id="{748A3DAD-0991-3987-EADF-E535B8F25985}"/>
-              </a:ext>
-            </a:extLst>
-          </p:cNvPr>
+            <a:endParaRPr lang="en-IN" dirty="0"/>
+          </a:p>
+        </p:txBody>
+      </p:sp>
+      <p:sp>
+        <p:nvSpPr>
+          <p:cNvPr id="14" name="Slide Number Placeholder 5"/>
           <p:cNvSpPr>
             <a:spLocks noGrp="1"/>
           </p:cNvSpPr>
@@ -3860,8 +3403,6 @@
           <a:p>
             <a:fld id="{75B0C241-D0FA-41C4-806B-7A3C5377B352}" type="slidenum">
               <a:rPr lang="en-IN" smtClean="0"/>
-              <a:pPr/>
-              <a:t>‹#›</a:t>
             </a:fld>
             <a:endParaRPr lang="en-IN"/>
           </a:p>
@@ -3869,13 +3410,7 @@
       </p:sp>
       <p:cxnSp>
         <p:nvCxnSpPr>
-          <p:cNvPr id="15" name="Straight Connector 14">
-            <a:extLst>
-              <a:ext uri="{FF2B5EF4-FFF2-40B4-BE49-F238E27FC236}">
-                <a16:creationId xmlns:a16="http://schemas.microsoft.com/office/drawing/2014/main" xmlns="" id="{CF819410-C1ED-8D16-F6CB-B6E039C7C2D1}"/>
-              </a:ext>
-            </a:extLst>
-          </p:cNvPr>
+          <p:cNvPr id="15" name="Straight Connector 14"/>
           <p:cNvCxnSpPr/>
           <p:nvPr userDrawn="1"/>
         </p:nvCxnSpPr>
@@ -3910,13 +3445,7 @@
       </p:cxnSp>
       <p:cxnSp>
         <p:nvCxnSpPr>
-          <p:cNvPr id="16" name="Straight Connector 15">
-            <a:extLst>
-              <a:ext uri="{FF2B5EF4-FFF2-40B4-BE49-F238E27FC236}">
-                <a16:creationId xmlns:a16="http://schemas.microsoft.com/office/drawing/2014/main" xmlns="" id="{7672DF40-E127-C9C0-3FF4-AE418D1484EC}"/>
-              </a:ext>
-            </a:extLst>
-          </p:cNvPr>
+          <p:cNvPr id="16" name="Straight Connector 15"/>
           <p:cNvCxnSpPr/>
           <p:nvPr userDrawn="1"/>
         </p:nvCxnSpPr>
@@ -3950,11 +3479,6 @@
         </p:style>
       </p:cxnSp>
     </p:spTree>
-    <p:extLst>
-      <p:ext uri="{BB962C8B-B14F-4D97-AF65-F5344CB8AC3E}">
-        <p14:creationId xmlns:p14="http://schemas.microsoft.com/office/powerpoint/2010/main" xmlns="" val="2169055268"/>
-      </p:ext>
-    </p:extLst>
   </p:cSld>
   <p:clrMapOvr>
     <a:masterClrMapping/>
@@ -3981,13 +3505,7 @@
       </p:grpSpPr>
       <p:sp>
         <p:nvSpPr>
-          <p:cNvPr id="3" name="Content Placeholder 2">
-            <a:extLst>
-              <a:ext uri="{FF2B5EF4-FFF2-40B4-BE49-F238E27FC236}">
-                <a16:creationId xmlns:a16="http://schemas.microsoft.com/office/drawing/2014/main" xmlns="" id="{90ECF36A-90A9-2A95-2645-E81FE9364D64}"/>
-              </a:ext>
-            </a:extLst>
-          </p:cNvPr>
+          <p:cNvPr id="3" name="Content Placeholder 2"/>
           <p:cNvSpPr>
             <a:spLocks noGrp="1"/>
           </p:cNvSpPr>
@@ -4010,6 +3528,7 @@
               <a:rPr lang="en-US"/>
               <a:t>Click to edit Master text styles</a:t>
             </a:r>
+            <a:endParaRPr lang="en-US"/>
           </a:p>
           <a:p>
             <a:pPr lvl="1"/>
@@ -4017,6 +3536,7 @@
               <a:rPr lang="en-US"/>
               <a:t>Second level</a:t>
             </a:r>
+            <a:endParaRPr lang="en-US"/>
           </a:p>
           <a:p>
             <a:pPr lvl="2"/>
@@ -4024,6 +3544,7 @@
               <a:rPr lang="en-US"/>
               <a:t>Third level</a:t>
             </a:r>
+            <a:endParaRPr lang="en-US"/>
           </a:p>
           <a:p>
             <a:pPr lvl="3"/>
@@ -4031,6 +3552,7 @@
               <a:rPr lang="en-US"/>
               <a:t>Fourth level</a:t>
             </a:r>
+            <a:endParaRPr lang="en-US"/>
           </a:p>
           <a:p>
             <a:pPr lvl="4"/>
@@ -4044,13 +3566,7 @@
       </p:sp>
       <p:sp>
         <p:nvSpPr>
-          <p:cNvPr id="4" name="Content Placeholder 3">
-            <a:extLst>
-              <a:ext uri="{FF2B5EF4-FFF2-40B4-BE49-F238E27FC236}">
-                <a16:creationId xmlns:a16="http://schemas.microsoft.com/office/drawing/2014/main" xmlns="" id="{85BB7054-816F-8518-C10C-43CFCCD09C6A}"/>
-              </a:ext>
-            </a:extLst>
-          </p:cNvPr>
+          <p:cNvPr id="4" name="Content Placeholder 3"/>
           <p:cNvSpPr>
             <a:spLocks noGrp="1"/>
           </p:cNvSpPr>
@@ -4073,6 +3589,7 @@
               <a:rPr lang="en-US"/>
               <a:t>Click to edit Master text styles</a:t>
             </a:r>
+            <a:endParaRPr lang="en-US"/>
           </a:p>
           <a:p>
             <a:pPr lvl="1"/>
@@ -4080,6 +3597,7 @@
               <a:rPr lang="en-US"/>
               <a:t>Second level</a:t>
             </a:r>
+            <a:endParaRPr lang="en-US"/>
           </a:p>
           <a:p>
             <a:pPr lvl="2"/>
@@ -4087,6 +3605,7 @@
               <a:rPr lang="en-US"/>
               <a:t>Third level</a:t>
             </a:r>
+            <a:endParaRPr lang="en-US"/>
           </a:p>
           <a:p>
             <a:pPr lvl="3"/>
@@ -4094,6 +3613,7 @@
               <a:rPr lang="en-US"/>
               <a:t>Fourth level</a:t>
             </a:r>
+            <a:endParaRPr lang="en-US"/>
           </a:p>
           <a:p>
             <a:pPr lvl="4"/>
@@ -4107,13 +3627,7 @@
       </p:sp>
       <p:sp>
         <p:nvSpPr>
-          <p:cNvPr id="5" name="Date Placeholder 4">
-            <a:extLst>
-              <a:ext uri="{FF2B5EF4-FFF2-40B4-BE49-F238E27FC236}">
-                <a16:creationId xmlns:a16="http://schemas.microsoft.com/office/drawing/2014/main" xmlns="" id="{FF8B0800-8641-719B-9255-91DE7E537DA9}"/>
-              </a:ext>
-            </a:extLst>
-          </p:cNvPr>
+          <p:cNvPr id="5" name="Date Placeholder 4"/>
           <p:cNvSpPr>
             <a:spLocks noGrp="1"/>
           </p:cNvSpPr>
@@ -4144,13 +3658,7 @@
       </p:sp>
       <p:sp>
         <p:nvSpPr>
-          <p:cNvPr id="6" name="Footer Placeholder 5">
-            <a:extLst>
-              <a:ext uri="{FF2B5EF4-FFF2-40B4-BE49-F238E27FC236}">
-                <a16:creationId xmlns:a16="http://schemas.microsoft.com/office/drawing/2014/main" xmlns="" id="{C074F28C-809E-B020-A9FA-C2506B496A5F}"/>
-              </a:ext>
-            </a:extLst>
-          </p:cNvPr>
+          <p:cNvPr id="6" name="Footer Placeholder 5"/>
           <p:cNvSpPr>
             <a:spLocks noGrp="1"/>
           </p:cNvSpPr>
@@ -4175,18 +3683,13 @@
               <a:rPr lang="en-IN"/>
               <a:t>Dr. Devyani Jadhav, Dept of AIML, Sanjivani University</a:t>
             </a:r>
-          </a:p>
-        </p:txBody>
-      </p:sp>
-      <p:sp>
-        <p:nvSpPr>
-          <p:cNvPr id="7" name="Slide Number Placeholder 6">
-            <a:extLst>
-              <a:ext uri="{FF2B5EF4-FFF2-40B4-BE49-F238E27FC236}">
-                <a16:creationId xmlns:a16="http://schemas.microsoft.com/office/drawing/2014/main" xmlns="" id="{13AA3BDD-9A27-03C0-C022-B2D71D19E816}"/>
-              </a:ext>
-            </a:extLst>
-          </p:cNvPr>
+            <a:endParaRPr lang="en-IN"/>
+          </a:p>
+        </p:txBody>
+      </p:sp>
+      <p:sp>
+        <p:nvSpPr>
+          <p:cNvPr id="7" name="Slide Number Placeholder 6"/>
           <p:cNvSpPr>
             <a:spLocks noGrp="1"/>
           </p:cNvSpPr>
@@ -4209,8 +3712,6 @@
           <a:p>
             <a:fld id="{75B0C241-D0FA-41C4-806B-7A3C5377B352}" type="slidenum">
               <a:rPr lang="en-IN" smtClean="0"/>
-              <a:pPr/>
-              <a:t>‹#›</a:t>
             </a:fld>
             <a:endParaRPr lang="en-IN"/>
           </a:p>
@@ -4218,16 +3719,8 @@
       </p:sp>
       <p:sp>
         <p:nvSpPr>
-          <p:cNvPr id="8" name="Title 1">
-            <a:extLst>
-              <a:ext uri="{FF2B5EF4-FFF2-40B4-BE49-F238E27FC236}">
-                <a16:creationId xmlns:a16="http://schemas.microsoft.com/office/drawing/2014/main" xmlns="" id="{3F6D1759-55E1-8CF0-2A8F-2CD112D91F09}"/>
-              </a:ext>
-            </a:extLst>
-          </p:cNvPr>
-          <p:cNvSpPr txBox="1">
-            <a:spLocks/>
-          </p:cNvSpPr>
+          <p:cNvPr id="8" name="Title 1"/>
+          <p:cNvSpPr txBox="1"/>
           <p:nvPr userDrawn="1"/>
         </p:nvSpPr>
         <p:spPr>
@@ -4277,13 +3770,7 @@
       </p:sp>
       <p:pic>
         <p:nvPicPr>
-          <p:cNvPr id="9" name="Image 4">
-            <a:extLst>
-              <a:ext uri="{FF2B5EF4-FFF2-40B4-BE49-F238E27FC236}">
-                <a16:creationId xmlns:a16="http://schemas.microsoft.com/office/drawing/2014/main" xmlns="" id="{8A5C4AAB-80A9-9337-EB15-DCD2DBD766E4}"/>
-              </a:ext>
-            </a:extLst>
-          </p:cNvPr>
+          <p:cNvPr id="9" name="Image 4"/>
           <p:cNvPicPr/>
           <p:nvPr userDrawn="1"/>
         </p:nvPicPr>
@@ -4305,13 +3792,7 @@
       </p:pic>
       <p:cxnSp>
         <p:nvCxnSpPr>
-          <p:cNvPr id="10" name="Straight Connector 9">
-            <a:extLst>
-              <a:ext uri="{FF2B5EF4-FFF2-40B4-BE49-F238E27FC236}">
-                <a16:creationId xmlns:a16="http://schemas.microsoft.com/office/drawing/2014/main" xmlns="" id="{A4B68093-98C7-901E-B415-381C8B7D2F71}"/>
-              </a:ext>
-            </a:extLst>
-          </p:cNvPr>
+          <p:cNvPr id="10" name="Straight Connector 9"/>
           <p:cNvCxnSpPr/>
           <p:nvPr userDrawn="1"/>
         </p:nvCxnSpPr>
@@ -4346,13 +3827,7 @@
       </p:cxnSp>
       <p:cxnSp>
         <p:nvCxnSpPr>
-          <p:cNvPr id="11" name="Straight Connector 10">
-            <a:extLst>
-              <a:ext uri="{FF2B5EF4-FFF2-40B4-BE49-F238E27FC236}">
-                <a16:creationId xmlns:a16="http://schemas.microsoft.com/office/drawing/2014/main" xmlns="" id="{A526E21C-0EF1-CB46-8B72-1E0B03676F07}"/>
-              </a:ext>
-            </a:extLst>
-          </p:cNvPr>
+          <p:cNvPr id="11" name="Straight Connector 10"/>
           <p:cNvCxnSpPr/>
           <p:nvPr userDrawn="1"/>
         </p:nvCxnSpPr>
@@ -4387,13 +3862,7 @@
       </p:cxnSp>
       <p:sp>
         <p:nvSpPr>
-          <p:cNvPr id="12" name="Flowchart: Process 11">
-            <a:extLst>
-              <a:ext uri="{FF2B5EF4-FFF2-40B4-BE49-F238E27FC236}">
-                <a16:creationId xmlns:a16="http://schemas.microsoft.com/office/drawing/2014/main" xmlns="" id="{68CF6092-6073-4386-1E6F-21D47E20AE0E}"/>
-              </a:ext>
-            </a:extLst>
-          </p:cNvPr>
+          <p:cNvPr id="12" name="Flowchart: Process 11"/>
           <p:cNvSpPr/>
           <p:nvPr userDrawn="1"/>
         </p:nvSpPr>
@@ -4436,16 +3905,8 @@
       </p:sp>
       <p:sp>
         <p:nvSpPr>
-          <p:cNvPr id="13" name="Date Placeholder 3">
-            <a:extLst>
-              <a:ext uri="{FF2B5EF4-FFF2-40B4-BE49-F238E27FC236}">
-                <a16:creationId xmlns:a16="http://schemas.microsoft.com/office/drawing/2014/main" xmlns="" id="{FC78D2B2-BA37-6502-5094-7B143F7C9323}"/>
-              </a:ext>
-            </a:extLst>
-          </p:cNvPr>
-          <p:cNvSpPr txBox="1">
-            <a:spLocks/>
-          </p:cNvSpPr>
+          <p:cNvPr id="13" name="Date Placeholder 3"/>
+          <p:cNvSpPr txBox="1"/>
           <p:nvPr userDrawn="1"/>
         </p:nvSpPr>
         <p:spPr>
@@ -4565,16 +4026,8 @@
       </p:sp>
       <p:sp>
         <p:nvSpPr>
-          <p:cNvPr id="14" name="Footer Placeholder 4">
-            <a:extLst>
-              <a:ext uri="{FF2B5EF4-FFF2-40B4-BE49-F238E27FC236}">
-                <a16:creationId xmlns:a16="http://schemas.microsoft.com/office/drawing/2014/main" xmlns="" id="{BCC73B21-7D29-93F9-BF3A-F63EC15D3F3E}"/>
-              </a:ext>
-            </a:extLst>
-          </p:cNvPr>
-          <p:cNvSpPr txBox="1">
-            <a:spLocks/>
-          </p:cNvSpPr>
+          <p:cNvPr id="14" name="Footer Placeholder 4"/>
+          <p:cNvSpPr txBox="1"/>
           <p:nvPr userDrawn="1"/>
         </p:nvSpPr>
         <p:spPr>
@@ -4694,16 +4147,8 @@
       </p:sp>
       <p:sp>
         <p:nvSpPr>
-          <p:cNvPr id="15" name="Slide Number Placeholder 5">
-            <a:extLst>
-              <a:ext uri="{FF2B5EF4-FFF2-40B4-BE49-F238E27FC236}">
-                <a16:creationId xmlns:a16="http://schemas.microsoft.com/office/drawing/2014/main" xmlns="" id="{90C8DA5F-4166-E1ED-822E-7E9C83D4DD65}"/>
-              </a:ext>
-            </a:extLst>
-          </p:cNvPr>
-          <p:cNvSpPr txBox="1">
-            <a:spLocks/>
-          </p:cNvSpPr>
+          <p:cNvPr id="15" name="Slide Number Placeholder 5"/>
+          <p:cNvSpPr txBox="1"/>
           <p:nvPr userDrawn="1"/>
         </p:nvSpPr>
         <p:spPr>
@@ -4815,8 +4260,6 @@
           <a:p>
             <a:fld id="{75B0C241-D0FA-41C4-806B-7A3C5377B352}" type="slidenum">
               <a:rPr lang="en-IN" smtClean="0"/>
-              <a:pPr/>
-              <a:t>‹#›</a:t>
             </a:fld>
             <a:endParaRPr lang="en-IN"/>
           </a:p>
@@ -4824,13 +4267,7 @@
       </p:sp>
       <p:cxnSp>
         <p:nvCxnSpPr>
-          <p:cNvPr id="16" name="Straight Connector 15">
-            <a:extLst>
-              <a:ext uri="{FF2B5EF4-FFF2-40B4-BE49-F238E27FC236}">
-                <a16:creationId xmlns:a16="http://schemas.microsoft.com/office/drawing/2014/main" xmlns="" id="{4852C1B1-FD35-E9CC-3AE3-DDD28E0EE203}"/>
-              </a:ext>
-            </a:extLst>
-          </p:cNvPr>
+          <p:cNvPr id="16" name="Straight Connector 15"/>
           <p:cNvCxnSpPr/>
           <p:nvPr userDrawn="1"/>
         </p:nvCxnSpPr>
@@ -4865,13 +4302,7 @@
       </p:cxnSp>
       <p:cxnSp>
         <p:nvCxnSpPr>
-          <p:cNvPr id="17" name="Straight Connector 16">
-            <a:extLst>
-              <a:ext uri="{FF2B5EF4-FFF2-40B4-BE49-F238E27FC236}">
-                <a16:creationId xmlns:a16="http://schemas.microsoft.com/office/drawing/2014/main" xmlns="" id="{DE83921E-66DD-C83E-8F8A-30ED977F5B0B}"/>
-              </a:ext>
-            </a:extLst>
-          </p:cNvPr>
+          <p:cNvPr id="17" name="Straight Connector 16"/>
           <p:cNvCxnSpPr/>
           <p:nvPr userDrawn="1"/>
         </p:nvCxnSpPr>
@@ -4905,11 +4336,6 @@
         </p:style>
       </p:cxnSp>
     </p:spTree>
-    <p:extLst>
-      <p:ext uri="{BB962C8B-B14F-4D97-AF65-F5344CB8AC3E}">
-        <p14:creationId xmlns:p14="http://schemas.microsoft.com/office/powerpoint/2010/main" xmlns="" val="3012570021"/>
-      </p:ext>
-    </p:extLst>
   </p:cSld>
   <p:clrMapOvr>
     <a:masterClrMapping/>
@@ -4936,13 +4362,7 @@
       </p:grpSpPr>
       <p:sp>
         <p:nvSpPr>
-          <p:cNvPr id="3" name="Text Placeholder 2">
-            <a:extLst>
-              <a:ext uri="{FF2B5EF4-FFF2-40B4-BE49-F238E27FC236}">
-                <a16:creationId xmlns:a16="http://schemas.microsoft.com/office/drawing/2014/main" xmlns="" id="{079CD259-61F9-A44B-426C-C7B574A8664F}"/>
-              </a:ext>
-            </a:extLst>
-          </p:cNvPr>
+          <p:cNvPr id="3" name="Text Placeholder 2"/>
           <p:cNvSpPr>
             <a:spLocks noGrp="1"/>
           </p:cNvSpPr>
@@ -5002,18 +4422,13 @@
               <a:rPr lang="en-US"/>
               <a:t>Click to edit Master text styles</a:t>
             </a:r>
-          </a:p>
-        </p:txBody>
-      </p:sp>
-      <p:sp>
-        <p:nvSpPr>
-          <p:cNvPr id="4" name="Content Placeholder 3">
-            <a:extLst>
-              <a:ext uri="{FF2B5EF4-FFF2-40B4-BE49-F238E27FC236}">
-                <a16:creationId xmlns:a16="http://schemas.microsoft.com/office/drawing/2014/main" xmlns="" id="{FB9AB06E-9FCB-4C66-A035-2546D6A77DA6}"/>
-              </a:ext>
-            </a:extLst>
-          </p:cNvPr>
+            <a:endParaRPr lang="en-US"/>
+          </a:p>
+        </p:txBody>
+      </p:sp>
+      <p:sp>
+        <p:nvSpPr>
+          <p:cNvPr id="4" name="Content Placeholder 3"/>
           <p:cNvSpPr>
             <a:spLocks noGrp="1"/>
           </p:cNvSpPr>
@@ -5036,6 +4451,7 @@
               <a:rPr lang="en-US"/>
               <a:t>Click to edit Master text styles</a:t>
             </a:r>
+            <a:endParaRPr lang="en-US"/>
           </a:p>
           <a:p>
             <a:pPr lvl="1"/>
@@ -5043,6 +4459,7 @@
               <a:rPr lang="en-US"/>
               <a:t>Second level</a:t>
             </a:r>
+            <a:endParaRPr lang="en-US"/>
           </a:p>
           <a:p>
             <a:pPr lvl="2"/>
@@ -5050,6 +4467,7 @@
               <a:rPr lang="en-US"/>
               <a:t>Third level</a:t>
             </a:r>
+            <a:endParaRPr lang="en-US"/>
           </a:p>
           <a:p>
             <a:pPr lvl="3"/>
@@ -5057,6 +4475,7 @@
               <a:rPr lang="en-US"/>
               <a:t>Fourth level</a:t>
             </a:r>
+            <a:endParaRPr lang="en-US"/>
           </a:p>
           <a:p>
             <a:pPr lvl="4"/>
@@ -5070,13 +4489,7 @@
       </p:sp>
       <p:sp>
         <p:nvSpPr>
-          <p:cNvPr id="5" name="Text Placeholder 4">
-            <a:extLst>
-              <a:ext uri="{FF2B5EF4-FFF2-40B4-BE49-F238E27FC236}">
-                <a16:creationId xmlns:a16="http://schemas.microsoft.com/office/drawing/2014/main" xmlns="" id="{BDA0D34A-CD29-0196-BB13-DC20BC79908F}"/>
-              </a:ext>
-            </a:extLst>
-          </p:cNvPr>
+          <p:cNvPr id="5" name="Text Placeholder 4"/>
           <p:cNvSpPr>
             <a:spLocks noGrp="1"/>
           </p:cNvSpPr>
@@ -5136,18 +4549,13 @@
               <a:rPr lang="en-US"/>
               <a:t>Click to edit Master text styles</a:t>
             </a:r>
-          </a:p>
-        </p:txBody>
-      </p:sp>
-      <p:sp>
-        <p:nvSpPr>
-          <p:cNvPr id="6" name="Content Placeholder 5">
-            <a:extLst>
-              <a:ext uri="{FF2B5EF4-FFF2-40B4-BE49-F238E27FC236}">
-                <a16:creationId xmlns:a16="http://schemas.microsoft.com/office/drawing/2014/main" xmlns="" id="{ED430A2B-022F-44B5-08E9-C8DB2FCEE451}"/>
-              </a:ext>
-            </a:extLst>
-          </p:cNvPr>
+            <a:endParaRPr lang="en-US"/>
+          </a:p>
+        </p:txBody>
+      </p:sp>
+      <p:sp>
+        <p:nvSpPr>
+          <p:cNvPr id="6" name="Content Placeholder 5"/>
           <p:cNvSpPr>
             <a:spLocks noGrp="1"/>
           </p:cNvSpPr>
@@ -5170,6 +4578,7 @@
               <a:rPr lang="en-US" dirty="0"/>
               <a:t>Click to edit Master text styles</a:t>
             </a:r>
+            <a:endParaRPr lang="en-US" dirty="0"/>
           </a:p>
           <a:p>
             <a:pPr lvl="1"/>
@@ -5177,6 +4586,7 @@
               <a:rPr lang="en-US" dirty="0"/>
               <a:t>Second level</a:t>
             </a:r>
+            <a:endParaRPr lang="en-US" dirty="0"/>
           </a:p>
           <a:p>
             <a:pPr lvl="2"/>
@@ -5184,6 +4594,7 @@
               <a:rPr lang="en-US" dirty="0"/>
               <a:t>Third level</a:t>
             </a:r>
+            <a:endParaRPr lang="en-US" dirty="0"/>
           </a:p>
           <a:p>
             <a:pPr lvl="3"/>
@@ -5191,6 +4602,7 @@
               <a:rPr lang="en-US" dirty="0"/>
               <a:t>Fourth level</a:t>
             </a:r>
+            <a:endParaRPr lang="en-US" dirty="0"/>
           </a:p>
           <a:p>
             <a:pPr lvl="4"/>
@@ -5204,13 +4616,7 @@
       </p:sp>
       <p:sp>
         <p:nvSpPr>
-          <p:cNvPr id="10" name="Title 1">
-            <a:extLst>
-              <a:ext uri="{FF2B5EF4-FFF2-40B4-BE49-F238E27FC236}">
-                <a16:creationId xmlns:a16="http://schemas.microsoft.com/office/drawing/2014/main" xmlns="" id="{316EB822-57A8-A0AB-EF65-F2728F5D491E}"/>
-              </a:ext>
-            </a:extLst>
-          </p:cNvPr>
+          <p:cNvPr id="10" name="Title 1"/>
           <p:cNvSpPr>
             <a:spLocks noGrp="1"/>
           </p:cNvSpPr>
@@ -5241,13 +4647,7 @@
       </p:sp>
       <p:pic>
         <p:nvPicPr>
-          <p:cNvPr id="11" name="Image 4">
-            <a:extLst>
-              <a:ext uri="{FF2B5EF4-FFF2-40B4-BE49-F238E27FC236}">
-                <a16:creationId xmlns:a16="http://schemas.microsoft.com/office/drawing/2014/main" xmlns="" id="{9EF33DFE-5259-5A9B-96A1-FD9B2649110C}"/>
-              </a:ext>
-            </a:extLst>
-          </p:cNvPr>
+          <p:cNvPr id="11" name="Image 4"/>
           <p:cNvPicPr/>
           <p:nvPr userDrawn="1"/>
         </p:nvPicPr>
@@ -5269,13 +4669,7 @@
       </p:pic>
       <p:cxnSp>
         <p:nvCxnSpPr>
-          <p:cNvPr id="12" name="Straight Connector 11">
-            <a:extLst>
-              <a:ext uri="{FF2B5EF4-FFF2-40B4-BE49-F238E27FC236}">
-                <a16:creationId xmlns:a16="http://schemas.microsoft.com/office/drawing/2014/main" xmlns="" id="{EDA289A4-396D-A6E5-707A-8AF9946556E4}"/>
-              </a:ext>
-            </a:extLst>
-          </p:cNvPr>
+          <p:cNvPr id="12" name="Straight Connector 11"/>
           <p:cNvCxnSpPr/>
           <p:nvPr userDrawn="1"/>
         </p:nvCxnSpPr>
@@ -5310,13 +4704,7 @@
       </p:cxnSp>
       <p:cxnSp>
         <p:nvCxnSpPr>
-          <p:cNvPr id="13" name="Straight Connector 12">
-            <a:extLst>
-              <a:ext uri="{FF2B5EF4-FFF2-40B4-BE49-F238E27FC236}">
-                <a16:creationId xmlns:a16="http://schemas.microsoft.com/office/drawing/2014/main" xmlns="" id="{84D09E16-797A-D520-1986-5FAF66A7649D}"/>
-              </a:ext>
-            </a:extLst>
-          </p:cNvPr>
+          <p:cNvPr id="13" name="Straight Connector 12"/>
           <p:cNvCxnSpPr/>
           <p:nvPr userDrawn="1"/>
         </p:nvCxnSpPr>
@@ -5351,13 +4739,7 @@
       </p:cxnSp>
       <p:sp>
         <p:nvSpPr>
-          <p:cNvPr id="14" name="Flowchart: Process 13">
-            <a:extLst>
-              <a:ext uri="{FF2B5EF4-FFF2-40B4-BE49-F238E27FC236}">
-                <a16:creationId xmlns:a16="http://schemas.microsoft.com/office/drawing/2014/main" xmlns="" id="{3EDC9140-9C96-49AA-EFE2-A128C3EBF2BE}"/>
-              </a:ext>
-            </a:extLst>
-          </p:cNvPr>
+          <p:cNvPr id="14" name="Flowchart: Process 13"/>
           <p:cNvSpPr/>
           <p:nvPr userDrawn="1"/>
         </p:nvSpPr>
@@ -5400,13 +4782,7 @@
       </p:sp>
       <p:sp>
         <p:nvSpPr>
-          <p:cNvPr id="15" name="Date Placeholder 3">
-            <a:extLst>
-              <a:ext uri="{FF2B5EF4-FFF2-40B4-BE49-F238E27FC236}">
-                <a16:creationId xmlns:a16="http://schemas.microsoft.com/office/drawing/2014/main" xmlns="" id="{67DCBCC3-7D5B-078C-D975-2D554B181656}"/>
-              </a:ext>
-            </a:extLst>
-          </p:cNvPr>
+          <p:cNvPr id="15" name="Date Placeholder 3"/>
           <p:cNvSpPr>
             <a:spLocks noGrp="1"/>
           </p:cNvSpPr>
@@ -5447,13 +4823,7 @@
       </p:sp>
       <p:sp>
         <p:nvSpPr>
-          <p:cNvPr id="16" name="Footer Placeholder 4">
-            <a:extLst>
-              <a:ext uri="{FF2B5EF4-FFF2-40B4-BE49-F238E27FC236}">
-                <a16:creationId xmlns:a16="http://schemas.microsoft.com/office/drawing/2014/main" xmlns="" id="{3BA787FD-CA97-DA68-4393-314AA98D727F}"/>
-              </a:ext>
-            </a:extLst>
-          </p:cNvPr>
+          <p:cNvPr id="16" name="Footer Placeholder 4"/>
           <p:cNvSpPr>
             <a:spLocks noGrp="1"/>
           </p:cNvSpPr>
@@ -5488,18 +4858,13 @@
               <a:rPr lang="en-IN" dirty="0"/>
               <a:t>Dr. Devyani Jadhav, Dept of AIML, Sanjivani University</a:t>
             </a:r>
-          </a:p>
-        </p:txBody>
-      </p:sp>
-      <p:sp>
-        <p:nvSpPr>
-          <p:cNvPr id="17" name="Slide Number Placeholder 5">
-            <a:extLst>
-              <a:ext uri="{FF2B5EF4-FFF2-40B4-BE49-F238E27FC236}">
-                <a16:creationId xmlns:a16="http://schemas.microsoft.com/office/drawing/2014/main" xmlns="" id="{87B4DF13-0440-A460-CAD0-92B58D60F1B2}"/>
-              </a:ext>
-            </a:extLst>
-          </p:cNvPr>
+            <a:endParaRPr lang="en-IN" dirty="0"/>
+          </a:p>
+        </p:txBody>
+      </p:sp>
+      <p:sp>
+        <p:nvSpPr>
+          <p:cNvPr id="17" name="Slide Number Placeholder 5"/>
           <p:cNvSpPr>
             <a:spLocks noGrp="1"/>
           </p:cNvSpPr>
@@ -5530,8 +4895,6 @@
           <a:p>
             <a:fld id="{75B0C241-D0FA-41C4-806B-7A3C5377B352}" type="slidenum">
               <a:rPr lang="en-IN" smtClean="0"/>
-              <a:pPr/>
-              <a:t>‹#›</a:t>
             </a:fld>
             <a:endParaRPr lang="en-IN"/>
           </a:p>
@@ -5539,13 +4902,7 @@
       </p:sp>
       <p:cxnSp>
         <p:nvCxnSpPr>
-          <p:cNvPr id="18" name="Straight Connector 17">
-            <a:extLst>
-              <a:ext uri="{FF2B5EF4-FFF2-40B4-BE49-F238E27FC236}">
-                <a16:creationId xmlns:a16="http://schemas.microsoft.com/office/drawing/2014/main" xmlns="" id="{37E541F0-5A24-2C54-9979-ECB976385A18}"/>
-              </a:ext>
-            </a:extLst>
-          </p:cNvPr>
+          <p:cNvPr id="18" name="Straight Connector 17"/>
           <p:cNvCxnSpPr/>
           <p:nvPr userDrawn="1"/>
         </p:nvCxnSpPr>
@@ -5580,13 +4937,7 @@
       </p:cxnSp>
       <p:cxnSp>
         <p:nvCxnSpPr>
-          <p:cNvPr id="19" name="Straight Connector 18">
-            <a:extLst>
-              <a:ext uri="{FF2B5EF4-FFF2-40B4-BE49-F238E27FC236}">
-                <a16:creationId xmlns:a16="http://schemas.microsoft.com/office/drawing/2014/main" xmlns="" id="{097935C2-5583-20F3-36AE-34E6FDF5C031}"/>
-              </a:ext>
-            </a:extLst>
-          </p:cNvPr>
+          <p:cNvPr id="19" name="Straight Connector 18"/>
           <p:cNvCxnSpPr/>
           <p:nvPr userDrawn="1"/>
         </p:nvCxnSpPr>
@@ -5620,11 +4971,6 @@
         </p:style>
       </p:cxnSp>
     </p:spTree>
-    <p:extLst>
-      <p:ext uri="{BB962C8B-B14F-4D97-AF65-F5344CB8AC3E}">
-        <p14:creationId xmlns:p14="http://schemas.microsoft.com/office/powerpoint/2010/main" xmlns="" val="3548180980"/>
-      </p:ext>
-    </p:extLst>
   </p:cSld>
   <p:clrMapOvr>
     <a:masterClrMapping/>
@@ -5651,16 +4997,8 @@
       </p:grpSpPr>
       <p:sp>
         <p:nvSpPr>
-          <p:cNvPr id="6" name="Title 1">
-            <a:extLst>
-              <a:ext uri="{FF2B5EF4-FFF2-40B4-BE49-F238E27FC236}">
-                <a16:creationId xmlns:a16="http://schemas.microsoft.com/office/drawing/2014/main" xmlns="" id="{F0BAD663-FCA0-FCC6-F7C5-2A43912A65FA}"/>
-              </a:ext>
-            </a:extLst>
-          </p:cNvPr>
-          <p:cNvSpPr txBox="1">
-            <a:spLocks/>
-          </p:cNvSpPr>
+          <p:cNvPr id="6" name="Title 1"/>
+          <p:cNvSpPr txBox="1"/>
           <p:nvPr userDrawn="1"/>
         </p:nvSpPr>
         <p:spPr>
@@ -5710,13 +5048,7 @@
       </p:sp>
       <p:pic>
         <p:nvPicPr>
-          <p:cNvPr id="7" name="Image 4">
-            <a:extLst>
-              <a:ext uri="{FF2B5EF4-FFF2-40B4-BE49-F238E27FC236}">
-                <a16:creationId xmlns:a16="http://schemas.microsoft.com/office/drawing/2014/main" xmlns="" id="{83C5DADF-BBE8-A3A2-51BE-98A5A8BF4385}"/>
-              </a:ext>
-            </a:extLst>
-          </p:cNvPr>
+          <p:cNvPr id="7" name="Image 4"/>
           <p:cNvPicPr/>
           <p:nvPr userDrawn="1"/>
         </p:nvPicPr>
@@ -5738,13 +5070,7 @@
       </p:pic>
       <p:cxnSp>
         <p:nvCxnSpPr>
-          <p:cNvPr id="8" name="Straight Connector 7">
-            <a:extLst>
-              <a:ext uri="{FF2B5EF4-FFF2-40B4-BE49-F238E27FC236}">
-                <a16:creationId xmlns:a16="http://schemas.microsoft.com/office/drawing/2014/main" xmlns="" id="{F8156C41-BA27-5110-BAC8-35573DF81C83}"/>
-              </a:ext>
-            </a:extLst>
-          </p:cNvPr>
+          <p:cNvPr id="8" name="Straight Connector 7"/>
           <p:cNvCxnSpPr/>
           <p:nvPr userDrawn="1"/>
         </p:nvCxnSpPr>
@@ -5779,13 +5105,7 @@
       </p:cxnSp>
       <p:cxnSp>
         <p:nvCxnSpPr>
-          <p:cNvPr id="9" name="Straight Connector 8">
-            <a:extLst>
-              <a:ext uri="{FF2B5EF4-FFF2-40B4-BE49-F238E27FC236}">
-                <a16:creationId xmlns:a16="http://schemas.microsoft.com/office/drawing/2014/main" xmlns="" id="{D1256CFF-0301-2645-EAA7-AEBF0E86EFB2}"/>
-              </a:ext>
-            </a:extLst>
-          </p:cNvPr>
+          <p:cNvPr id="9" name="Straight Connector 8"/>
           <p:cNvCxnSpPr/>
           <p:nvPr userDrawn="1"/>
         </p:nvCxnSpPr>
@@ -5820,13 +5140,7 @@
       </p:cxnSp>
       <p:sp>
         <p:nvSpPr>
-          <p:cNvPr id="10" name="Flowchart: Process 9">
-            <a:extLst>
-              <a:ext uri="{FF2B5EF4-FFF2-40B4-BE49-F238E27FC236}">
-                <a16:creationId xmlns:a16="http://schemas.microsoft.com/office/drawing/2014/main" xmlns="" id="{16A7FED6-3294-25E5-6287-BE20B110AA6F}"/>
-              </a:ext>
-            </a:extLst>
-          </p:cNvPr>
+          <p:cNvPr id="10" name="Flowchart: Process 9"/>
           <p:cNvSpPr/>
           <p:nvPr userDrawn="1"/>
         </p:nvSpPr>
@@ -5869,13 +5183,7 @@
       </p:sp>
       <p:sp>
         <p:nvSpPr>
-          <p:cNvPr id="11" name="Date Placeholder 3">
-            <a:extLst>
-              <a:ext uri="{FF2B5EF4-FFF2-40B4-BE49-F238E27FC236}">
-                <a16:creationId xmlns:a16="http://schemas.microsoft.com/office/drawing/2014/main" xmlns="" id="{90D97F90-9B73-E64D-0B23-5F4DA40EDD29}"/>
-              </a:ext>
-            </a:extLst>
-          </p:cNvPr>
+          <p:cNvPr id="11" name="Date Placeholder 3"/>
           <p:cNvSpPr>
             <a:spLocks noGrp="1"/>
           </p:cNvSpPr>
@@ -5916,13 +5224,7 @@
       </p:sp>
       <p:sp>
         <p:nvSpPr>
-          <p:cNvPr id="12" name="Footer Placeholder 4">
-            <a:extLst>
-              <a:ext uri="{FF2B5EF4-FFF2-40B4-BE49-F238E27FC236}">
-                <a16:creationId xmlns:a16="http://schemas.microsoft.com/office/drawing/2014/main" xmlns="" id="{447654C6-C5A4-98EF-FF35-A0CB78B4699A}"/>
-              </a:ext>
-            </a:extLst>
-          </p:cNvPr>
+          <p:cNvPr id="12" name="Footer Placeholder 4"/>
           <p:cNvSpPr>
             <a:spLocks noGrp="1"/>
           </p:cNvSpPr>
@@ -5957,18 +5259,13 @@
               <a:rPr lang="en-IN" dirty="0"/>
               <a:t>Dr. Devyani Jadhav, Dept of AIML, Sanjivani University</a:t>
             </a:r>
-          </a:p>
-        </p:txBody>
-      </p:sp>
-      <p:sp>
-        <p:nvSpPr>
-          <p:cNvPr id="13" name="Slide Number Placeholder 5">
-            <a:extLst>
-              <a:ext uri="{FF2B5EF4-FFF2-40B4-BE49-F238E27FC236}">
-                <a16:creationId xmlns:a16="http://schemas.microsoft.com/office/drawing/2014/main" xmlns="" id="{99484470-22FF-DAF0-D3DD-17BC114A288D}"/>
-              </a:ext>
-            </a:extLst>
-          </p:cNvPr>
+            <a:endParaRPr lang="en-IN" dirty="0"/>
+          </a:p>
+        </p:txBody>
+      </p:sp>
+      <p:sp>
+        <p:nvSpPr>
+          <p:cNvPr id="13" name="Slide Number Placeholder 5"/>
           <p:cNvSpPr>
             <a:spLocks noGrp="1"/>
           </p:cNvSpPr>
@@ -5999,8 +5296,6 @@
           <a:p>
             <a:fld id="{75B0C241-D0FA-41C4-806B-7A3C5377B352}" type="slidenum">
               <a:rPr lang="en-IN" smtClean="0"/>
-              <a:pPr/>
-              <a:t>‹#›</a:t>
             </a:fld>
             <a:endParaRPr lang="en-IN"/>
           </a:p>
@@ -6008,13 +5303,7 @@
       </p:sp>
       <p:cxnSp>
         <p:nvCxnSpPr>
-          <p:cNvPr id="14" name="Straight Connector 13">
-            <a:extLst>
-              <a:ext uri="{FF2B5EF4-FFF2-40B4-BE49-F238E27FC236}">
-                <a16:creationId xmlns:a16="http://schemas.microsoft.com/office/drawing/2014/main" xmlns="" id="{B0439C5A-9AE6-BAC9-2058-0BFB9ECADAE5}"/>
-              </a:ext>
-            </a:extLst>
-          </p:cNvPr>
+          <p:cNvPr id="14" name="Straight Connector 13"/>
           <p:cNvCxnSpPr/>
           <p:nvPr userDrawn="1"/>
         </p:nvCxnSpPr>
@@ -6049,13 +5338,7 @@
       </p:cxnSp>
       <p:cxnSp>
         <p:nvCxnSpPr>
-          <p:cNvPr id="15" name="Straight Connector 14">
-            <a:extLst>
-              <a:ext uri="{FF2B5EF4-FFF2-40B4-BE49-F238E27FC236}">
-                <a16:creationId xmlns:a16="http://schemas.microsoft.com/office/drawing/2014/main" xmlns="" id="{3DDBAB87-D635-C466-FBB2-9D9D8D3E5124}"/>
-              </a:ext>
-            </a:extLst>
-          </p:cNvPr>
+          <p:cNvPr id="15" name="Straight Connector 14"/>
           <p:cNvCxnSpPr/>
           <p:nvPr userDrawn="1"/>
         </p:nvCxnSpPr>
@@ -6089,11 +5372,6 @@
         </p:style>
       </p:cxnSp>
     </p:spTree>
-    <p:extLst>
-      <p:ext uri="{BB962C8B-B14F-4D97-AF65-F5344CB8AC3E}">
-        <p14:creationId xmlns:p14="http://schemas.microsoft.com/office/powerpoint/2010/main" xmlns="" val="2189536798"/>
-      </p:ext>
-    </p:extLst>
   </p:cSld>
   <p:clrMapOvr>
     <a:masterClrMapping/>
@@ -6120,13 +5398,7 @@
       </p:grpSpPr>
       <p:sp>
         <p:nvSpPr>
-          <p:cNvPr id="2" name="Title 1">
-            <a:extLst>
-              <a:ext uri="{FF2B5EF4-FFF2-40B4-BE49-F238E27FC236}">
-                <a16:creationId xmlns:a16="http://schemas.microsoft.com/office/drawing/2014/main" xmlns="" id="{D1763116-2404-760F-2F76-8E93A8761D46}"/>
-              </a:ext>
-            </a:extLst>
-          </p:cNvPr>
+          <p:cNvPr id="2" name="Title 1"/>
           <p:cNvSpPr>
             <a:spLocks noGrp="1"/>
           </p:cNvSpPr>
@@ -6161,13 +5433,7 @@
       </p:sp>
       <p:sp>
         <p:nvSpPr>
-          <p:cNvPr id="3" name="Picture Placeholder 2">
-            <a:extLst>
-              <a:ext uri="{FF2B5EF4-FFF2-40B4-BE49-F238E27FC236}">
-                <a16:creationId xmlns:a16="http://schemas.microsoft.com/office/drawing/2014/main" xmlns="" id="{E2385DB1-F5BA-C206-0969-E19B26084292}"/>
-              </a:ext>
-            </a:extLst>
-          </p:cNvPr>
+          <p:cNvPr id="3" name="Picture Placeholder 2"/>
           <p:cNvSpPr>
             <a:spLocks noGrp="1"/>
           </p:cNvSpPr>
@@ -6228,13 +5494,7 @@
       </p:sp>
       <p:sp>
         <p:nvSpPr>
-          <p:cNvPr id="4" name="Text Placeholder 3">
-            <a:extLst>
-              <a:ext uri="{FF2B5EF4-FFF2-40B4-BE49-F238E27FC236}">
-                <a16:creationId xmlns:a16="http://schemas.microsoft.com/office/drawing/2014/main" xmlns="" id="{09FA6C96-5BF4-43F4-AD28-8D4369217038}"/>
-              </a:ext>
-            </a:extLst>
-          </p:cNvPr>
+          <p:cNvPr id="4" name="Text Placeholder 3"/>
           <p:cNvSpPr>
             <a:spLocks noGrp="1"/>
           </p:cNvSpPr>
@@ -6294,21 +5554,14 @@
               <a:rPr lang="en-US"/>
               <a:t>Click to edit Master text styles</a:t>
             </a:r>
-          </a:p>
-        </p:txBody>
-      </p:sp>
-      <p:sp>
-        <p:nvSpPr>
-          <p:cNvPr id="8" name="Title 1">
-            <a:extLst>
-              <a:ext uri="{FF2B5EF4-FFF2-40B4-BE49-F238E27FC236}">
-                <a16:creationId xmlns:a16="http://schemas.microsoft.com/office/drawing/2014/main" xmlns="" id="{A3257A92-F61C-9CAF-27F4-851C47BB4D8E}"/>
-              </a:ext>
-            </a:extLst>
-          </p:cNvPr>
-          <p:cNvSpPr txBox="1">
-            <a:spLocks/>
-          </p:cNvSpPr>
+            <a:endParaRPr lang="en-US"/>
+          </a:p>
+        </p:txBody>
+      </p:sp>
+      <p:sp>
+        <p:nvSpPr>
+          <p:cNvPr id="8" name="Title 1"/>
+          <p:cNvSpPr txBox="1"/>
           <p:nvPr userDrawn="1"/>
         </p:nvSpPr>
         <p:spPr>
@@ -6358,13 +5611,7 @@
       </p:sp>
       <p:pic>
         <p:nvPicPr>
-          <p:cNvPr id="9" name="Image 4">
-            <a:extLst>
-              <a:ext uri="{FF2B5EF4-FFF2-40B4-BE49-F238E27FC236}">
-                <a16:creationId xmlns:a16="http://schemas.microsoft.com/office/drawing/2014/main" xmlns="" id="{CDFAAC1E-21F4-EF1F-F6AB-0118FBBD67DF}"/>
-              </a:ext>
-            </a:extLst>
-          </p:cNvPr>
+          <p:cNvPr id="9" name="Image 4"/>
           <p:cNvPicPr/>
           <p:nvPr userDrawn="1"/>
         </p:nvPicPr>
@@ -6386,13 +5633,7 @@
       </p:pic>
       <p:cxnSp>
         <p:nvCxnSpPr>
-          <p:cNvPr id="10" name="Straight Connector 9">
-            <a:extLst>
-              <a:ext uri="{FF2B5EF4-FFF2-40B4-BE49-F238E27FC236}">
-                <a16:creationId xmlns:a16="http://schemas.microsoft.com/office/drawing/2014/main" xmlns="" id="{FA9C4CC1-660F-EEBB-0E27-52B057BB47A9}"/>
-              </a:ext>
-            </a:extLst>
-          </p:cNvPr>
+          <p:cNvPr id="10" name="Straight Connector 9"/>
           <p:cNvCxnSpPr/>
           <p:nvPr userDrawn="1"/>
         </p:nvCxnSpPr>
@@ -6427,13 +5668,7 @@
       </p:cxnSp>
       <p:cxnSp>
         <p:nvCxnSpPr>
-          <p:cNvPr id="11" name="Straight Connector 10">
-            <a:extLst>
-              <a:ext uri="{FF2B5EF4-FFF2-40B4-BE49-F238E27FC236}">
-                <a16:creationId xmlns:a16="http://schemas.microsoft.com/office/drawing/2014/main" xmlns="" id="{DBDC333D-2D25-B5D3-2C62-7A4D8B84329F}"/>
-              </a:ext>
-            </a:extLst>
-          </p:cNvPr>
+          <p:cNvPr id="11" name="Straight Connector 10"/>
           <p:cNvCxnSpPr/>
           <p:nvPr userDrawn="1"/>
         </p:nvCxnSpPr>
@@ -6468,13 +5703,7 @@
       </p:cxnSp>
       <p:sp>
         <p:nvSpPr>
-          <p:cNvPr id="12" name="Flowchart: Process 11">
-            <a:extLst>
-              <a:ext uri="{FF2B5EF4-FFF2-40B4-BE49-F238E27FC236}">
-                <a16:creationId xmlns:a16="http://schemas.microsoft.com/office/drawing/2014/main" xmlns="" id="{C0F414D9-62BE-CBB6-B7F1-59FAB04AC57E}"/>
-              </a:ext>
-            </a:extLst>
-          </p:cNvPr>
+          <p:cNvPr id="12" name="Flowchart: Process 11"/>
           <p:cNvSpPr/>
           <p:nvPr userDrawn="1"/>
         </p:nvSpPr>
@@ -6517,13 +5746,7 @@
       </p:sp>
       <p:sp>
         <p:nvSpPr>
-          <p:cNvPr id="13" name="Date Placeholder 3">
-            <a:extLst>
-              <a:ext uri="{FF2B5EF4-FFF2-40B4-BE49-F238E27FC236}">
-                <a16:creationId xmlns:a16="http://schemas.microsoft.com/office/drawing/2014/main" xmlns="" id="{539831B7-2A54-1FB7-648B-0B5271E49C80}"/>
-              </a:ext>
-            </a:extLst>
-          </p:cNvPr>
+          <p:cNvPr id="13" name="Date Placeholder 3"/>
           <p:cNvSpPr>
             <a:spLocks noGrp="1"/>
           </p:cNvSpPr>
@@ -6564,13 +5787,7 @@
       </p:sp>
       <p:sp>
         <p:nvSpPr>
-          <p:cNvPr id="14" name="Footer Placeholder 4">
-            <a:extLst>
-              <a:ext uri="{FF2B5EF4-FFF2-40B4-BE49-F238E27FC236}">
-                <a16:creationId xmlns:a16="http://schemas.microsoft.com/office/drawing/2014/main" xmlns="" id="{B74D5A68-C242-B70D-1272-D687C13FE9BF}"/>
-              </a:ext>
-            </a:extLst>
-          </p:cNvPr>
+          <p:cNvPr id="14" name="Footer Placeholder 4"/>
           <p:cNvSpPr>
             <a:spLocks noGrp="1"/>
           </p:cNvSpPr>
@@ -6605,18 +5822,13 @@
               <a:rPr lang="en-IN" dirty="0"/>
               <a:t>Dr. Devyani Jadhav, Dept of AIML, Sanjivani University</a:t>
             </a:r>
-          </a:p>
-        </p:txBody>
-      </p:sp>
-      <p:sp>
-        <p:nvSpPr>
-          <p:cNvPr id="15" name="Slide Number Placeholder 5">
-            <a:extLst>
-              <a:ext uri="{FF2B5EF4-FFF2-40B4-BE49-F238E27FC236}">
-                <a16:creationId xmlns:a16="http://schemas.microsoft.com/office/drawing/2014/main" xmlns="" id="{D21C7ECD-87DD-6457-89D9-9E14E1C2DBF2}"/>
-              </a:ext>
-            </a:extLst>
-          </p:cNvPr>
+            <a:endParaRPr lang="en-IN" dirty="0"/>
+          </a:p>
+        </p:txBody>
+      </p:sp>
+      <p:sp>
+        <p:nvSpPr>
+          <p:cNvPr id="15" name="Slide Number Placeholder 5"/>
           <p:cNvSpPr>
             <a:spLocks noGrp="1"/>
           </p:cNvSpPr>
@@ -6647,8 +5859,6 @@
           <a:p>
             <a:fld id="{75B0C241-D0FA-41C4-806B-7A3C5377B352}" type="slidenum">
               <a:rPr lang="en-IN" smtClean="0"/>
-              <a:pPr/>
-              <a:t>‹#›</a:t>
             </a:fld>
             <a:endParaRPr lang="en-IN"/>
           </a:p>
@@ -6656,13 +5866,7 @@
       </p:sp>
       <p:cxnSp>
         <p:nvCxnSpPr>
-          <p:cNvPr id="16" name="Straight Connector 15">
-            <a:extLst>
-              <a:ext uri="{FF2B5EF4-FFF2-40B4-BE49-F238E27FC236}">
-                <a16:creationId xmlns:a16="http://schemas.microsoft.com/office/drawing/2014/main" xmlns="" id="{4CFCDD21-6412-BA28-4F00-F25E17916C32}"/>
-              </a:ext>
-            </a:extLst>
-          </p:cNvPr>
+          <p:cNvPr id="16" name="Straight Connector 15"/>
           <p:cNvCxnSpPr/>
           <p:nvPr userDrawn="1"/>
         </p:nvCxnSpPr>
@@ -6697,13 +5901,7 @@
       </p:cxnSp>
       <p:cxnSp>
         <p:nvCxnSpPr>
-          <p:cNvPr id="17" name="Straight Connector 16">
-            <a:extLst>
-              <a:ext uri="{FF2B5EF4-FFF2-40B4-BE49-F238E27FC236}">
-                <a16:creationId xmlns:a16="http://schemas.microsoft.com/office/drawing/2014/main" xmlns="" id="{91330077-5E5F-EAAE-C489-2C514B00CB04}"/>
-              </a:ext>
-            </a:extLst>
-          </p:cNvPr>
+          <p:cNvPr id="17" name="Straight Connector 16"/>
           <p:cNvCxnSpPr/>
           <p:nvPr userDrawn="1"/>
         </p:nvCxnSpPr>
@@ -6737,11 +5935,6 @@
         </p:style>
       </p:cxnSp>
     </p:spTree>
-    <p:extLst>
-      <p:ext uri="{BB962C8B-B14F-4D97-AF65-F5344CB8AC3E}">
-        <p14:creationId xmlns:p14="http://schemas.microsoft.com/office/powerpoint/2010/main" xmlns="" val="2606578603"/>
-      </p:ext>
-    </p:extLst>
   </p:cSld>
   <p:clrMapOvr>
     <a:masterClrMapping/>
@@ -6768,13 +5961,7 @@
       </p:grpSpPr>
       <p:sp>
         <p:nvSpPr>
-          <p:cNvPr id="2" name="Title 1">
-            <a:extLst>
-              <a:ext uri="{FF2B5EF4-FFF2-40B4-BE49-F238E27FC236}">
-                <a16:creationId xmlns:a16="http://schemas.microsoft.com/office/drawing/2014/main" xmlns="" id="{F6674DDE-5273-90A0-6C2F-342F86696A29}"/>
-              </a:ext>
-            </a:extLst>
-          </p:cNvPr>
+          <p:cNvPr id="2" name="Title 1"/>
           <p:cNvSpPr>
             <a:spLocks noGrp="1"/>
           </p:cNvSpPr>
@@ -6806,13 +5993,7 @@
       </p:sp>
       <p:sp>
         <p:nvSpPr>
-          <p:cNvPr id="3" name="Subtitle 2">
-            <a:extLst>
-              <a:ext uri="{FF2B5EF4-FFF2-40B4-BE49-F238E27FC236}">
-                <a16:creationId xmlns:a16="http://schemas.microsoft.com/office/drawing/2014/main" xmlns="" id="{567C7D9A-2394-1C3F-510A-0FACA59B57DD}"/>
-              </a:ext>
-            </a:extLst>
-          </p:cNvPr>
+          <p:cNvPr id="3" name="Subtitle 2"/>
           <p:cNvSpPr>
             <a:spLocks noGrp="1"/>
           </p:cNvSpPr>
@@ -6877,13 +6058,7 @@
       </p:sp>
       <p:sp>
         <p:nvSpPr>
-          <p:cNvPr id="4" name="Date Placeholder 3">
-            <a:extLst>
-              <a:ext uri="{FF2B5EF4-FFF2-40B4-BE49-F238E27FC236}">
-                <a16:creationId xmlns:a16="http://schemas.microsoft.com/office/drawing/2014/main" xmlns="" id="{348D87E1-7BF5-47F9-B382-B6AD0B7807C3}"/>
-              </a:ext>
-            </a:extLst>
-          </p:cNvPr>
+          <p:cNvPr id="4" name="Date Placeholder 3"/>
           <p:cNvSpPr>
             <a:spLocks noGrp="1"/>
           </p:cNvSpPr>
@@ -6906,13 +6081,7 @@
       </p:sp>
       <p:sp>
         <p:nvSpPr>
-          <p:cNvPr id="5" name="Footer Placeholder 4">
-            <a:extLst>
-              <a:ext uri="{FF2B5EF4-FFF2-40B4-BE49-F238E27FC236}">
-                <a16:creationId xmlns:a16="http://schemas.microsoft.com/office/drawing/2014/main" xmlns="" id="{98739060-F709-9771-4ACC-4CE70C2B2C88}"/>
-              </a:ext>
-            </a:extLst>
-          </p:cNvPr>
+          <p:cNvPr id="5" name="Footer Placeholder 4"/>
           <p:cNvSpPr>
             <a:spLocks noGrp="1"/>
           </p:cNvSpPr>
@@ -6929,18 +6098,13 @@
               <a:rPr lang="en-IN"/>
               <a:t>Dr. Devyani Jadhav, Dept of AIML, Sanjivani University</a:t>
             </a:r>
-          </a:p>
-        </p:txBody>
-      </p:sp>
-      <p:sp>
-        <p:nvSpPr>
-          <p:cNvPr id="6" name="Slide Number Placeholder 5">
-            <a:extLst>
-              <a:ext uri="{FF2B5EF4-FFF2-40B4-BE49-F238E27FC236}">
-                <a16:creationId xmlns:a16="http://schemas.microsoft.com/office/drawing/2014/main" xmlns="" id="{75EEA780-BE67-3C8F-9958-97E6D7DEF882}"/>
-              </a:ext>
-            </a:extLst>
-          </p:cNvPr>
+            <a:endParaRPr lang="en-IN"/>
+          </a:p>
+        </p:txBody>
+      </p:sp>
+      <p:sp>
+        <p:nvSpPr>
+          <p:cNvPr id="6" name="Slide Number Placeholder 5"/>
           <p:cNvSpPr>
             <a:spLocks noGrp="1"/>
           </p:cNvSpPr>
@@ -6955,19 +6119,12 @@
           <a:p>
             <a:fld id="{33DAA219-780F-40A4-8E4C-A7BED1CAA639}" type="slidenum">
               <a:rPr lang="en-IN" smtClean="0"/>
-              <a:pPr/>
-              <a:t>‹#›</a:t>
             </a:fld>
             <a:endParaRPr lang="en-IN"/>
           </a:p>
         </p:txBody>
       </p:sp>
     </p:spTree>
-    <p:extLst>
-      <p:ext uri="{BB962C8B-B14F-4D97-AF65-F5344CB8AC3E}">
-        <p14:creationId xmlns:p14="http://schemas.microsoft.com/office/powerpoint/2010/main" xmlns="" val="504774231"/>
-      </p:ext>
-    </p:extLst>
   </p:cSld>
   <p:clrMapOvr>
     <a:masterClrMapping/>
@@ -6994,13 +6151,7 @@
       </p:grpSpPr>
       <p:sp>
         <p:nvSpPr>
-          <p:cNvPr id="2" name="Title 1">
-            <a:extLst>
-              <a:ext uri="{FF2B5EF4-FFF2-40B4-BE49-F238E27FC236}">
-                <a16:creationId xmlns:a16="http://schemas.microsoft.com/office/drawing/2014/main" xmlns="" id="{10170BB9-FC21-2FAD-B495-FAC54A281F09}"/>
-              </a:ext>
-            </a:extLst>
-          </p:cNvPr>
+          <p:cNvPr id="2" name="Title 1"/>
           <p:cNvSpPr>
             <a:spLocks noGrp="1"/>
           </p:cNvSpPr>
@@ -7023,13 +6174,7 @@
       </p:sp>
       <p:sp>
         <p:nvSpPr>
-          <p:cNvPr id="3" name="Content Placeholder 2">
-            <a:extLst>
-              <a:ext uri="{FF2B5EF4-FFF2-40B4-BE49-F238E27FC236}">
-                <a16:creationId xmlns:a16="http://schemas.microsoft.com/office/drawing/2014/main" xmlns="" id="{1AD5CC57-5468-E071-849A-46EF0E3F4AD3}"/>
-              </a:ext>
-            </a:extLst>
-          </p:cNvPr>
+          <p:cNvPr id="3" name="Content Placeholder 2"/>
           <p:cNvSpPr>
             <a:spLocks noGrp="1"/>
           </p:cNvSpPr>
@@ -7047,6 +6192,7 @@
               <a:rPr lang="en-US"/>
               <a:t>Click to edit Master text styles</a:t>
             </a:r>
+            <a:endParaRPr lang="en-US"/>
           </a:p>
           <a:p>
             <a:pPr lvl="1"/>
@@ -7054,6 +6200,7 @@
               <a:rPr lang="en-US"/>
               <a:t>Second level</a:t>
             </a:r>
+            <a:endParaRPr lang="en-US"/>
           </a:p>
           <a:p>
             <a:pPr lvl="2"/>
@@ -7061,6 +6208,7 @@
               <a:rPr lang="en-US"/>
               <a:t>Third level</a:t>
             </a:r>
+            <a:endParaRPr lang="en-US"/>
           </a:p>
           <a:p>
             <a:pPr lvl="3"/>
@@ -7068,6 +6216,7 @@
               <a:rPr lang="en-US"/>
               <a:t>Fourth level</a:t>
             </a:r>
+            <a:endParaRPr lang="en-US"/>
           </a:p>
           <a:p>
             <a:pPr lvl="4"/>
@@ -7081,13 +6230,7 @@
       </p:sp>
       <p:sp>
         <p:nvSpPr>
-          <p:cNvPr id="4" name="Date Placeholder 3">
-            <a:extLst>
-              <a:ext uri="{FF2B5EF4-FFF2-40B4-BE49-F238E27FC236}">
-                <a16:creationId xmlns:a16="http://schemas.microsoft.com/office/drawing/2014/main" xmlns="" id="{5708F8A6-1F2D-051B-2B9E-AD753504EFD8}"/>
-              </a:ext>
-            </a:extLst>
-          </p:cNvPr>
+          <p:cNvPr id="4" name="Date Placeholder 3"/>
           <p:cNvSpPr>
             <a:spLocks noGrp="1"/>
           </p:cNvSpPr>
@@ -7110,13 +6253,7 @@
       </p:sp>
       <p:sp>
         <p:nvSpPr>
-          <p:cNvPr id="5" name="Footer Placeholder 4">
-            <a:extLst>
-              <a:ext uri="{FF2B5EF4-FFF2-40B4-BE49-F238E27FC236}">
-                <a16:creationId xmlns:a16="http://schemas.microsoft.com/office/drawing/2014/main" xmlns="" id="{12A1F0D6-DFFC-37EF-48BA-D2590CE50955}"/>
-              </a:ext>
-            </a:extLst>
-          </p:cNvPr>
+          <p:cNvPr id="5" name="Footer Placeholder 4"/>
           <p:cNvSpPr>
             <a:spLocks noGrp="1"/>
           </p:cNvSpPr>
@@ -7133,18 +6270,13 @@
               <a:rPr lang="en-IN"/>
               <a:t>Dr. Devyani Jadhav, Dept of AIML, Sanjivani University</a:t>
             </a:r>
-          </a:p>
-        </p:txBody>
-      </p:sp>
-      <p:sp>
-        <p:nvSpPr>
-          <p:cNvPr id="6" name="Slide Number Placeholder 5">
-            <a:extLst>
-              <a:ext uri="{FF2B5EF4-FFF2-40B4-BE49-F238E27FC236}">
-                <a16:creationId xmlns:a16="http://schemas.microsoft.com/office/drawing/2014/main" xmlns="" id="{E9BAA569-E335-73EC-6780-8AFB2E5AE4B3}"/>
-              </a:ext>
-            </a:extLst>
-          </p:cNvPr>
+            <a:endParaRPr lang="en-IN"/>
+          </a:p>
+        </p:txBody>
+      </p:sp>
+      <p:sp>
+        <p:nvSpPr>
+          <p:cNvPr id="6" name="Slide Number Placeholder 5"/>
           <p:cNvSpPr>
             <a:spLocks noGrp="1"/>
           </p:cNvSpPr>
@@ -7159,19 +6291,12 @@
           <a:p>
             <a:fld id="{33DAA219-780F-40A4-8E4C-A7BED1CAA639}" type="slidenum">
               <a:rPr lang="en-IN" smtClean="0"/>
-              <a:pPr/>
-              <a:t>‹#›</a:t>
             </a:fld>
             <a:endParaRPr lang="en-IN"/>
           </a:p>
         </p:txBody>
       </p:sp>
     </p:spTree>
-    <p:extLst>
-      <p:ext uri="{BB962C8B-B14F-4D97-AF65-F5344CB8AC3E}">
-        <p14:creationId xmlns:p14="http://schemas.microsoft.com/office/powerpoint/2010/main" xmlns="" val="4207569394"/>
-      </p:ext>
-    </p:extLst>
   </p:cSld>
   <p:clrMapOvr>
     <a:masterClrMapping/>
@@ -7203,13 +6328,7 @@
       </p:grpSpPr>
       <p:sp>
         <p:nvSpPr>
-          <p:cNvPr id="3" name="Text Placeholder 2">
-            <a:extLst>
-              <a:ext uri="{FF2B5EF4-FFF2-40B4-BE49-F238E27FC236}">
-                <a16:creationId xmlns:a16="http://schemas.microsoft.com/office/drawing/2014/main" xmlns="" id="{E0A077CE-6D24-4F0C-229C-99A6B8F50755}"/>
-              </a:ext>
-            </a:extLst>
-          </p:cNvPr>
+          <p:cNvPr id="3" name="Text Placeholder 2"/>
           <p:cNvSpPr>
             <a:spLocks noGrp="1"/>
           </p:cNvSpPr>
@@ -7237,6 +6356,7 @@
               <a:rPr lang="en-US" dirty="0"/>
               <a:t>Click to edit Master text styles</a:t>
             </a:r>
+            <a:endParaRPr lang="en-US" dirty="0"/>
           </a:p>
           <a:p>
             <a:pPr lvl="1"/>
@@ -7244,6 +6364,7 @@
               <a:rPr lang="en-US" dirty="0"/>
               <a:t>Second level</a:t>
             </a:r>
+            <a:endParaRPr lang="en-US" dirty="0"/>
           </a:p>
           <a:p>
             <a:pPr lvl="2"/>
@@ -7251,6 +6372,7 @@
               <a:rPr lang="en-US" dirty="0"/>
               <a:t>Third level</a:t>
             </a:r>
+            <a:endParaRPr lang="en-US" dirty="0"/>
           </a:p>
           <a:p>
             <a:pPr lvl="3"/>
@@ -7258,6 +6380,7 @@
               <a:rPr lang="en-US" dirty="0"/>
               <a:t>Fourth level</a:t>
             </a:r>
+            <a:endParaRPr lang="en-US" dirty="0"/>
           </a:p>
           <a:p>
             <a:pPr lvl="4"/>
@@ -7271,18 +6394,12 @@
       </p:sp>
       <p:pic>
         <p:nvPicPr>
-          <p:cNvPr id="8" name="Image 4">
-            <a:extLst>
-              <a:ext uri="{FF2B5EF4-FFF2-40B4-BE49-F238E27FC236}">
-                <a16:creationId xmlns:a16="http://schemas.microsoft.com/office/drawing/2014/main" xmlns="" id="{3A8CCEBC-8AD1-E2B7-DA3E-6D69FC38D74D}"/>
-              </a:ext>
-            </a:extLst>
-          </p:cNvPr>
+          <p:cNvPr id="8" name="Image 4"/>
           <p:cNvPicPr/>
           <p:nvPr userDrawn="1"/>
         </p:nvPicPr>
         <p:blipFill>
-          <a:blip r:embed="rId9" cstate="print"/>
+          <a:blip r:embed="rId8" cstate="print"/>
           <a:stretch>
             <a:fillRect/>
           </a:stretch>
@@ -7299,13 +6416,7 @@
       </p:pic>
       <p:cxnSp>
         <p:nvCxnSpPr>
-          <p:cNvPr id="9" name="Straight Connector 8">
-            <a:extLst>
-              <a:ext uri="{FF2B5EF4-FFF2-40B4-BE49-F238E27FC236}">
-                <a16:creationId xmlns:a16="http://schemas.microsoft.com/office/drawing/2014/main" xmlns="" id="{3B01F576-C1F5-6DCE-8B57-CA64AFAC09D0}"/>
-              </a:ext>
-            </a:extLst>
-          </p:cNvPr>
+          <p:cNvPr id="9" name="Straight Connector 8"/>
           <p:cNvCxnSpPr/>
           <p:nvPr userDrawn="1"/>
         </p:nvCxnSpPr>
@@ -7340,13 +6451,7 @@
       </p:cxnSp>
       <p:cxnSp>
         <p:nvCxnSpPr>
-          <p:cNvPr id="10" name="Straight Connector 9">
-            <a:extLst>
-              <a:ext uri="{FF2B5EF4-FFF2-40B4-BE49-F238E27FC236}">
-                <a16:creationId xmlns:a16="http://schemas.microsoft.com/office/drawing/2014/main" xmlns="" id="{DA8A1AD9-2A05-4DA8-7707-A7171252FC2F}"/>
-              </a:ext>
-            </a:extLst>
-          </p:cNvPr>
+          <p:cNvPr id="10" name="Straight Connector 9"/>
           <p:cNvCxnSpPr/>
           <p:nvPr userDrawn="1"/>
         </p:nvCxnSpPr>
@@ -7381,13 +6486,7 @@
       </p:cxnSp>
       <p:sp>
         <p:nvSpPr>
-          <p:cNvPr id="11" name="Flowchart: Process 10">
-            <a:extLst>
-              <a:ext uri="{FF2B5EF4-FFF2-40B4-BE49-F238E27FC236}">
-                <a16:creationId xmlns:a16="http://schemas.microsoft.com/office/drawing/2014/main" xmlns="" id="{85CEEE03-1F93-7B26-4BE3-2E21368A15F1}"/>
-              </a:ext>
-            </a:extLst>
-          </p:cNvPr>
+          <p:cNvPr id="11" name="Flowchart: Process 10"/>
           <p:cNvSpPr/>
           <p:nvPr userDrawn="1"/>
         </p:nvSpPr>
@@ -7430,13 +6529,7 @@
       </p:sp>
       <p:sp>
         <p:nvSpPr>
-          <p:cNvPr id="12" name="Date Placeholder 3">
-            <a:extLst>
-              <a:ext uri="{FF2B5EF4-FFF2-40B4-BE49-F238E27FC236}">
-                <a16:creationId xmlns:a16="http://schemas.microsoft.com/office/drawing/2014/main" xmlns="" id="{C729AF5C-11B4-24D6-7C0F-C4328ABFDE75}"/>
-              </a:ext>
-            </a:extLst>
-          </p:cNvPr>
+          <p:cNvPr id="12" name="Date Placeholder 3"/>
           <p:cNvSpPr>
             <a:spLocks noGrp="1"/>
           </p:cNvSpPr>
@@ -7477,13 +6570,7 @@
       </p:sp>
       <p:sp>
         <p:nvSpPr>
-          <p:cNvPr id="13" name="Footer Placeholder 4">
-            <a:extLst>
-              <a:ext uri="{FF2B5EF4-FFF2-40B4-BE49-F238E27FC236}">
-                <a16:creationId xmlns:a16="http://schemas.microsoft.com/office/drawing/2014/main" xmlns="" id="{89C23B09-3202-82C7-1991-C10BC90FFF0F}"/>
-              </a:ext>
-            </a:extLst>
-          </p:cNvPr>
+          <p:cNvPr id="13" name="Footer Placeholder 4"/>
           <p:cNvSpPr>
             <a:spLocks noGrp="1"/>
           </p:cNvSpPr>
@@ -7518,18 +6605,13 @@
               <a:rPr lang="en-IN" dirty="0"/>
               <a:t>Dr. Devyani Jadhav, Dept of AIML, Sanjivani University</a:t>
             </a:r>
-          </a:p>
-        </p:txBody>
-      </p:sp>
-      <p:sp>
-        <p:nvSpPr>
-          <p:cNvPr id="14" name="Slide Number Placeholder 5">
-            <a:extLst>
-              <a:ext uri="{FF2B5EF4-FFF2-40B4-BE49-F238E27FC236}">
-                <a16:creationId xmlns:a16="http://schemas.microsoft.com/office/drawing/2014/main" xmlns="" id="{8013219A-F623-B362-6BDE-635AB97641CF}"/>
-              </a:ext>
-            </a:extLst>
-          </p:cNvPr>
+            <a:endParaRPr lang="en-IN" dirty="0"/>
+          </a:p>
+        </p:txBody>
+      </p:sp>
+      <p:sp>
+        <p:nvSpPr>
+          <p:cNvPr id="14" name="Slide Number Placeholder 5"/>
           <p:cNvSpPr>
             <a:spLocks noGrp="1"/>
           </p:cNvSpPr>
@@ -7560,8 +6642,6 @@
           <a:p>
             <a:fld id="{75B0C241-D0FA-41C4-806B-7A3C5377B352}" type="slidenum">
               <a:rPr lang="en-IN" smtClean="0"/>
-              <a:pPr/>
-              <a:t>‹#›</a:t>
             </a:fld>
             <a:endParaRPr lang="en-IN"/>
           </a:p>
@@ -7569,13 +6649,7 @@
       </p:sp>
       <p:cxnSp>
         <p:nvCxnSpPr>
-          <p:cNvPr id="15" name="Straight Connector 14">
-            <a:extLst>
-              <a:ext uri="{FF2B5EF4-FFF2-40B4-BE49-F238E27FC236}">
-                <a16:creationId xmlns:a16="http://schemas.microsoft.com/office/drawing/2014/main" xmlns="" id="{39FDFD5D-2541-D558-8960-BC068B47764D}"/>
-              </a:ext>
-            </a:extLst>
-          </p:cNvPr>
+          <p:cNvPr id="15" name="Straight Connector 14"/>
           <p:cNvCxnSpPr/>
           <p:nvPr userDrawn="1"/>
         </p:nvCxnSpPr>
@@ -7610,13 +6684,7 @@
       </p:cxnSp>
       <p:cxnSp>
         <p:nvCxnSpPr>
-          <p:cNvPr id="16" name="Straight Connector 15">
-            <a:extLst>
-              <a:ext uri="{FF2B5EF4-FFF2-40B4-BE49-F238E27FC236}">
-                <a16:creationId xmlns:a16="http://schemas.microsoft.com/office/drawing/2014/main" xmlns="" id="{40943264-C7FA-75A5-9492-A8AD6D920D7E}"/>
-              </a:ext>
-            </a:extLst>
-          </p:cNvPr>
+          <p:cNvPr id="16" name="Straight Connector 15"/>
           <p:cNvCxnSpPr/>
           <p:nvPr userDrawn="1"/>
         </p:nvCxnSpPr>
@@ -7650,11 +6718,6 @@
         </p:style>
       </p:cxnSp>
     </p:spTree>
-    <p:extLst>
-      <p:ext uri="{BB962C8B-B14F-4D97-AF65-F5344CB8AC3E}">
-        <p14:creationId xmlns:p14="http://schemas.microsoft.com/office/powerpoint/2010/main" xmlns="" val="2089392427"/>
-      </p:ext>
-    </p:extLst>
   </p:cSld>
   <p:clrMap bg1="lt1" tx1="dk1" bg2="lt2" tx2="dk2" accent1="accent1" accent2="accent2" accent3="accent3" accent4="accent4" accent5="accent5" accent6="accent6" hlink="hlink" folHlink="folHlink"/>
   <p:sldLayoutIdLst>
@@ -7664,7 +6727,7 @@
     <p:sldLayoutId id="2147483652" r:id="rId4"/>
     <p:sldLayoutId id="2147483653" r:id="rId5"/>
     <p:sldLayoutId id="2147483654" r:id="rId6"/>
-    <p:sldLayoutId id="2147483657" r:id="rId7"/>
+    <p:sldLayoutId id="2147483655" r:id="rId7"/>
   </p:sldLayoutIdLst>
   <p:hf hdr="0" ftr="0" dt="0"/>
   <p:txStyles>
@@ -7695,7 +6758,7 @@
         <a:spcBef>
           <a:spcPts val="1000"/>
         </a:spcBef>
-        <a:buFont typeface="Arial" panose="020B0604020202020204" pitchFamily="34" charset="0"/>
+        <a:buFont typeface="Arial" panose="02080604020202020204" pitchFamily="34" charset="0"/>
         <a:buChar char="•"/>
         <a:defRPr sz="2800" kern="1200">
           <a:solidFill>
@@ -7713,7 +6776,7 @@
         <a:spcBef>
           <a:spcPts val="500"/>
         </a:spcBef>
-        <a:buFont typeface="Arial" panose="020B0604020202020204" pitchFamily="34" charset="0"/>
+        <a:buFont typeface="Arial" panose="02080604020202020204" pitchFamily="34" charset="0"/>
         <a:buChar char="•"/>
         <a:defRPr sz="2400" kern="1200">
           <a:solidFill>
@@ -7731,7 +6794,7 @@
         <a:spcBef>
           <a:spcPts val="500"/>
         </a:spcBef>
-        <a:buFont typeface="Arial" panose="020B0604020202020204" pitchFamily="34" charset="0"/>
+        <a:buFont typeface="Arial" panose="02080604020202020204" pitchFamily="34" charset="0"/>
         <a:buChar char="•"/>
         <a:defRPr sz="2000" kern="1200">
           <a:solidFill>
@@ -7749,7 +6812,7 @@
         <a:spcBef>
           <a:spcPts val="500"/>
         </a:spcBef>
-        <a:buFont typeface="Arial" panose="020B0604020202020204" pitchFamily="34" charset="0"/>
+        <a:buFont typeface="Arial" panose="02080604020202020204" pitchFamily="34" charset="0"/>
         <a:buChar char="•"/>
         <a:defRPr sz="1800" kern="1200">
           <a:solidFill>
@@ -7767,7 +6830,7 @@
         <a:spcBef>
           <a:spcPts val="500"/>
         </a:spcBef>
-        <a:buFont typeface="Arial" panose="020B0604020202020204" pitchFamily="34" charset="0"/>
+        <a:buFont typeface="Arial" panose="02080604020202020204" pitchFamily="34" charset="0"/>
         <a:buChar char="•"/>
         <a:defRPr sz="1800" kern="1200">
           <a:solidFill>
@@ -7785,7 +6848,7 @@
         <a:spcBef>
           <a:spcPts val="500"/>
         </a:spcBef>
-        <a:buFont typeface="Arial" panose="020B0604020202020204" pitchFamily="34" charset="0"/>
+        <a:buFont typeface="Arial" panose="02080604020202020204" pitchFamily="34" charset="0"/>
         <a:buChar char="•"/>
         <a:defRPr sz="1800" kern="1200">
           <a:solidFill>
@@ -7803,7 +6866,7 @@
         <a:spcBef>
           <a:spcPts val="500"/>
         </a:spcBef>
-        <a:buFont typeface="Arial" panose="020B0604020202020204" pitchFamily="34" charset="0"/>
+        <a:buFont typeface="Arial" panose="02080604020202020204" pitchFamily="34" charset="0"/>
         <a:buChar char="•"/>
         <a:defRPr sz="1800" kern="1200">
           <a:solidFill>
@@ -7821,7 +6884,7 @@
         <a:spcBef>
           <a:spcPts val="500"/>
         </a:spcBef>
-        <a:buFont typeface="Arial" panose="020B0604020202020204" pitchFamily="34" charset="0"/>
+        <a:buFont typeface="Arial" panose="02080604020202020204" pitchFamily="34" charset="0"/>
         <a:buChar char="•"/>
         <a:defRPr sz="1800" kern="1200">
           <a:solidFill>
@@ -7839,7 +6902,7 @@
         <a:spcBef>
           <a:spcPts val="500"/>
         </a:spcBef>
-        <a:buFont typeface="Arial" panose="020B0604020202020204" pitchFamily="34" charset="0"/>
+        <a:buFont typeface="Arial" panose="02080604020202020204" pitchFamily="34" charset="0"/>
         <a:buChar char="•"/>
         <a:defRPr sz="1800" kern="1200">
           <a:solidFill>
@@ -7974,13 +7037,7 @@
       </p:grpSpPr>
       <p:sp>
         <p:nvSpPr>
-          <p:cNvPr id="2" name="Title Placeholder 1">
-            <a:extLst>
-              <a:ext uri="{FF2B5EF4-FFF2-40B4-BE49-F238E27FC236}">
-                <a16:creationId xmlns:a16="http://schemas.microsoft.com/office/drawing/2014/main" xmlns="" id="{7E54B7E0-7805-24D6-8F82-476A2D241B7D}"/>
-              </a:ext>
-            </a:extLst>
-          </p:cNvPr>
+          <p:cNvPr id="2" name="Title Placeholder 1"/>
           <p:cNvSpPr>
             <a:spLocks noGrp="1"/>
           </p:cNvSpPr>
@@ -8013,13 +7070,7 @@
       </p:sp>
       <p:sp>
         <p:nvSpPr>
-          <p:cNvPr id="3" name="Text Placeholder 2">
-            <a:extLst>
-              <a:ext uri="{FF2B5EF4-FFF2-40B4-BE49-F238E27FC236}">
-                <a16:creationId xmlns:a16="http://schemas.microsoft.com/office/drawing/2014/main" xmlns="" id="{D13FFB65-3151-03D4-CC08-2BFF3CAB70F2}"/>
-              </a:ext>
-            </a:extLst>
-          </p:cNvPr>
+          <p:cNvPr id="3" name="Text Placeholder 2"/>
           <p:cNvSpPr>
             <a:spLocks noGrp="1"/>
           </p:cNvSpPr>
@@ -8047,6 +7098,7 @@
               <a:rPr lang="en-US"/>
               <a:t>Click to edit Master text styles</a:t>
             </a:r>
+            <a:endParaRPr lang="en-US"/>
           </a:p>
           <a:p>
             <a:pPr lvl="1"/>
@@ -8054,6 +7106,7 @@
               <a:rPr lang="en-US"/>
               <a:t>Second level</a:t>
             </a:r>
+            <a:endParaRPr lang="en-US"/>
           </a:p>
           <a:p>
             <a:pPr lvl="2"/>
@@ -8061,6 +7114,7 @@
               <a:rPr lang="en-US"/>
               <a:t>Third level</a:t>
             </a:r>
+            <a:endParaRPr lang="en-US"/>
           </a:p>
           <a:p>
             <a:pPr lvl="3"/>
@@ -8068,6 +7122,7 @@
               <a:rPr lang="en-US"/>
               <a:t>Fourth level</a:t>
             </a:r>
+            <a:endParaRPr lang="en-US"/>
           </a:p>
           <a:p>
             <a:pPr lvl="4"/>
@@ -8081,13 +7136,7 @@
       </p:sp>
       <p:sp>
         <p:nvSpPr>
-          <p:cNvPr id="4" name="Date Placeholder 3">
-            <a:extLst>
-              <a:ext uri="{FF2B5EF4-FFF2-40B4-BE49-F238E27FC236}">
-                <a16:creationId xmlns:a16="http://schemas.microsoft.com/office/drawing/2014/main" xmlns="" id="{D3E7EDD9-9D91-B93E-FD29-BB7960806897}"/>
-              </a:ext>
-            </a:extLst>
-          </p:cNvPr>
+          <p:cNvPr id="4" name="Date Placeholder 3"/>
           <p:cNvSpPr>
             <a:spLocks noGrp="1"/>
           </p:cNvSpPr>
@@ -8128,13 +7177,7 @@
       </p:sp>
       <p:sp>
         <p:nvSpPr>
-          <p:cNvPr id="5" name="Footer Placeholder 4">
-            <a:extLst>
-              <a:ext uri="{FF2B5EF4-FFF2-40B4-BE49-F238E27FC236}">
-                <a16:creationId xmlns:a16="http://schemas.microsoft.com/office/drawing/2014/main" xmlns="" id="{044B2081-C7E4-7BCF-14A9-0E814B62AAF2}"/>
-              </a:ext>
-            </a:extLst>
-          </p:cNvPr>
+          <p:cNvPr id="5" name="Footer Placeholder 4"/>
           <p:cNvSpPr>
             <a:spLocks noGrp="1"/>
           </p:cNvSpPr>
@@ -8169,18 +7212,13 @@
               <a:rPr lang="en-IN"/>
               <a:t>Dr. Devyani Jadhav, Dept of AIML, Sanjivani University</a:t>
             </a:r>
-          </a:p>
-        </p:txBody>
-      </p:sp>
-      <p:sp>
-        <p:nvSpPr>
-          <p:cNvPr id="6" name="Slide Number Placeholder 5">
-            <a:extLst>
-              <a:ext uri="{FF2B5EF4-FFF2-40B4-BE49-F238E27FC236}">
-                <a16:creationId xmlns:a16="http://schemas.microsoft.com/office/drawing/2014/main" xmlns="" id="{063006AE-BD33-DDC3-50BB-16C69791A2BA}"/>
-              </a:ext>
-            </a:extLst>
-          </p:cNvPr>
+            <a:endParaRPr lang="en-IN"/>
+          </a:p>
+        </p:txBody>
+      </p:sp>
+      <p:sp>
+        <p:nvSpPr>
+          <p:cNvPr id="6" name="Slide Number Placeholder 5"/>
           <p:cNvSpPr>
             <a:spLocks noGrp="1"/>
           </p:cNvSpPr>
@@ -8213,33 +7251,26 @@
           <a:p>
             <a:fld id="{33DAA219-780F-40A4-8E4C-A7BED1CAA639}" type="slidenum">
               <a:rPr lang="en-IN" smtClean="0"/>
-              <a:pPr/>
-              <a:t>‹#›</a:t>
             </a:fld>
             <a:endParaRPr lang="en-IN"/>
           </a:p>
         </p:txBody>
       </p:sp>
     </p:spTree>
-    <p:extLst>
-      <p:ext uri="{BB962C8B-B14F-4D97-AF65-F5344CB8AC3E}">
-        <p14:creationId xmlns:p14="http://schemas.microsoft.com/office/powerpoint/2010/main" xmlns="" val="2091991122"/>
-      </p:ext>
-    </p:extLst>
   </p:cSld>
   <p:clrMap bg1="lt1" tx1="dk1" bg2="lt2" tx2="dk2" accent1="accent1" accent2="accent2" accent3="accent3" accent4="accent4" accent5="accent5" accent6="accent6" hlink="hlink" folHlink="folHlink"/>
   <p:sldLayoutIdLst>
-    <p:sldLayoutId id="2147483659" r:id="rId1"/>
-    <p:sldLayoutId id="2147483660" r:id="rId2"/>
-    <p:sldLayoutId id="2147483661" r:id="rId3"/>
-    <p:sldLayoutId id="2147483662" r:id="rId4"/>
-    <p:sldLayoutId id="2147483663" r:id="rId5"/>
-    <p:sldLayoutId id="2147483664" r:id="rId6"/>
-    <p:sldLayoutId id="2147483665" r:id="rId7"/>
-    <p:sldLayoutId id="2147483666" r:id="rId8"/>
-    <p:sldLayoutId id="2147483667" r:id="rId9"/>
-    <p:sldLayoutId id="2147483668" r:id="rId10"/>
-    <p:sldLayoutId id="2147483669" r:id="rId11"/>
+    <p:sldLayoutId id="2147483657" r:id="rId1"/>
+    <p:sldLayoutId id="2147483658" r:id="rId2"/>
+    <p:sldLayoutId id="2147483659" r:id="rId3"/>
+    <p:sldLayoutId id="2147483660" r:id="rId4"/>
+    <p:sldLayoutId id="2147483661" r:id="rId5"/>
+    <p:sldLayoutId id="2147483662" r:id="rId6"/>
+    <p:sldLayoutId id="2147483663" r:id="rId7"/>
+    <p:sldLayoutId id="2147483664" r:id="rId8"/>
+    <p:sldLayoutId id="2147483665" r:id="rId9"/>
+    <p:sldLayoutId id="2147483666" r:id="rId10"/>
+    <p:sldLayoutId id="2147483667" r:id="rId11"/>
   </p:sldLayoutIdLst>
   <p:hf hdr="0" ftr="0" dt="0"/>
   <p:txStyles>
@@ -8270,7 +7301,7 @@
         <a:spcBef>
           <a:spcPts val="1000"/>
         </a:spcBef>
-        <a:buFont typeface="Arial" panose="020B0604020202020204" pitchFamily="34" charset="0"/>
+        <a:buFont typeface="Arial" panose="02080604020202020204" pitchFamily="34" charset="0"/>
         <a:buChar char="•"/>
         <a:defRPr sz="2800" kern="1200">
           <a:solidFill>
@@ -8288,7 +7319,7 @@
         <a:spcBef>
           <a:spcPts val="500"/>
         </a:spcBef>
-        <a:buFont typeface="Arial" panose="020B0604020202020204" pitchFamily="34" charset="0"/>
+        <a:buFont typeface="Arial" panose="02080604020202020204" pitchFamily="34" charset="0"/>
         <a:buChar char="•"/>
         <a:defRPr sz="2400" kern="1200">
           <a:solidFill>
@@ -8306,7 +7337,7 @@
         <a:spcBef>
           <a:spcPts val="500"/>
         </a:spcBef>
-        <a:buFont typeface="Arial" panose="020B0604020202020204" pitchFamily="34" charset="0"/>
+        <a:buFont typeface="Arial" panose="02080604020202020204" pitchFamily="34" charset="0"/>
         <a:buChar char="•"/>
         <a:defRPr sz="2000" kern="1200">
           <a:solidFill>
@@ -8324,7 +7355,7 @@
         <a:spcBef>
           <a:spcPts val="500"/>
         </a:spcBef>
-        <a:buFont typeface="Arial" panose="020B0604020202020204" pitchFamily="34" charset="0"/>
+        <a:buFont typeface="Arial" panose="02080604020202020204" pitchFamily="34" charset="0"/>
         <a:buChar char="•"/>
         <a:defRPr sz="1800" kern="1200">
           <a:solidFill>
@@ -8342,7 +7373,7 @@
         <a:spcBef>
           <a:spcPts val="500"/>
         </a:spcBef>
-        <a:buFont typeface="Arial" panose="020B0604020202020204" pitchFamily="34" charset="0"/>
+        <a:buFont typeface="Arial" panose="02080604020202020204" pitchFamily="34" charset="0"/>
         <a:buChar char="•"/>
         <a:defRPr sz="1800" kern="1200">
           <a:solidFill>
@@ -8360,7 +7391,7 @@
         <a:spcBef>
           <a:spcPts val="500"/>
         </a:spcBef>
-        <a:buFont typeface="Arial" panose="020B0604020202020204" pitchFamily="34" charset="0"/>
+        <a:buFont typeface="Arial" panose="02080604020202020204" pitchFamily="34" charset="0"/>
         <a:buChar char="•"/>
         <a:defRPr sz="1800" kern="1200">
           <a:solidFill>
@@ -8378,7 +7409,7 @@
         <a:spcBef>
           <a:spcPts val="500"/>
         </a:spcBef>
-        <a:buFont typeface="Arial" panose="020B0604020202020204" pitchFamily="34" charset="0"/>
+        <a:buFont typeface="Arial" panose="02080604020202020204" pitchFamily="34" charset="0"/>
         <a:buChar char="•"/>
         <a:defRPr sz="1800" kern="1200">
           <a:solidFill>
@@ -8396,7 +7427,7 @@
         <a:spcBef>
           <a:spcPts val="500"/>
         </a:spcBef>
-        <a:buFont typeface="Arial" panose="020B0604020202020204" pitchFamily="34" charset="0"/>
+        <a:buFont typeface="Arial" panose="02080604020202020204" pitchFamily="34" charset="0"/>
         <a:buChar char="•"/>
         <a:defRPr sz="1800" kern="1200">
           <a:solidFill>
@@ -8414,7 +7445,7 @@
         <a:spcBef>
           <a:spcPts val="500"/>
         </a:spcBef>
-        <a:buFont typeface="Arial" panose="020B0604020202020204" pitchFamily="34" charset="0"/>
+        <a:buFont typeface="Arial" panose="02080604020202020204" pitchFamily="34" charset="0"/>
         <a:buChar char="•"/>
         <a:defRPr sz="1800" kern="1200">
           <a:solidFill>
@@ -8544,13 +7575,7 @@
       </p:grpSpPr>
       <p:sp>
         <p:nvSpPr>
-          <p:cNvPr id="2" name="Title 1">
-            <a:extLst>
-              <a:ext uri="{FF2B5EF4-FFF2-40B4-BE49-F238E27FC236}">
-                <a16:creationId xmlns:a16="http://schemas.microsoft.com/office/drawing/2014/main" xmlns="" id="{DBCA429D-4508-1636-537F-DC9B5B415FD1}"/>
-              </a:ext>
-            </a:extLst>
-          </p:cNvPr>
+          <p:cNvPr id="2" name="Title 1"/>
           <p:cNvSpPr>
             <a:spLocks noGrp="1"/>
           </p:cNvSpPr>
@@ -8604,13 +7629,7 @@
       </p:sp>
       <p:sp>
         <p:nvSpPr>
-          <p:cNvPr id="3" name="Subtitle 2">
-            <a:extLst>
-              <a:ext uri="{FF2B5EF4-FFF2-40B4-BE49-F238E27FC236}">
-                <a16:creationId xmlns:a16="http://schemas.microsoft.com/office/drawing/2014/main" xmlns="" id="{1B97D7C4-2805-B1C8-CB01-CCC06637D2EA}"/>
-              </a:ext>
-            </a:extLst>
-          </p:cNvPr>
+          <p:cNvPr id="3" name="Subtitle 2"/>
           <p:cNvSpPr>
             <a:spLocks noGrp="1"/>
           </p:cNvSpPr>
@@ -8659,6 +7678,13 @@
               </a:rPr>
               <a:t>Course Instructor</a:t>
             </a:r>
+            <a:endParaRPr lang="en-IN" sz="3200" b="1" dirty="0">
+              <a:solidFill>
+                <a:srgbClr val="002060"/>
+              </a:solidFill>
+              <a:latin typeface="Cambria" panose="02040503050406030204" pitchFamily="18" charset="0"/>
+              <a:ea typeface="Cambria" panose="02040503050406030204" pitchFamily="18" charset="0"/>
+            </a:endParaRPr>
           </a:p>
           <a:p>
             <a:r>
@@ -8693,13 +7719,7 @@
       </p:sp>
       <p:sp>
         <p:nvSpPr>
-          <p:cNvPr id="14" name="Flowchart: Process 13">
-            <a:extLst>
-              <a:ext uri="{FF2B5EF4-FFF2-40B4-BE49-F238E27FC236}">
-                <a16:creationId xmlns:a16="http://schemas.microsoft.com/office/drawing/2014/main" xmlns="" id="{35BE7C15-B780-A3E2-0D5F-A1B042F8848D}"/>
-              </a:ext>
-            </a:extLst>
-          </p:cNvPr>
+          <p:cNvPr id="14" name="Flowchart: Process 13"/>
           <p:cNvSpPr/>
           <p:nvPr/>
         </p:nvSpPr>
@@ -8749,7 +7769,6 @@
               <a:buSzTx/>
               <a:buFontTx/>
               <a:buNone/>
-              <a:tabLst/>
               <a:defRPr/>
             </a:pPr>
             <a:endParaRPr kumimoji="0" lang="en-IN" sz="1800" b="0" i="0" u="none" strike="noStrike" kern="1200" cap="none" spc="0" normalizeH="0" baseline="0" noProof="0" dirty="0">
@@ -8771,13 +7790,7 @@
       </p:sp>
       <p:cxnSp>
         <p:nvCxnSpPr>
-          <p:cNvPr id="18" name="Straight Connector 17">
-            <a:extLst>
-              <a:ext uri="{FF2B5EF4-FFF2-40B4-BE49-F238E27FC236}">
-                <a16:creationId xmlns:a16="http://schemas.microsoft.com/office/drawing/2014/main" xmlns="" id="{4E75232B-DE41-574B-5803-89DF0748206C}"/>
-              </a:ext>
-            </a:extLst>
-          </p:cNvPr>
+          <p:cNvPr id="18" name="Straight Connector 17"/>
           <p:cNvCxnSpPr/>
           <p:nvPr/>
         </p:nvCxnSpPr>
@@ -8812,13 +7825,7 @@
       </p:cxnSp>
       <p:cxnSp>
         <p:nvCxnSpPr>
-          <p:cNvPr id="19" name="Straight Connector 18">
-            <a:extLst>
-              <a:ext uri="{FF2B5EF4-FFF2-40B4-BE49-F238E27FC236}">
-                <a16:creationId xmlns:a16="http://schemas.microsoft.com/office/drawing/2014/main" xmlns="" id="{CAAD46AD-0F1A-0E1E-9F09-7F0C45D9C0BC}"/>
-              </a:ext>
-            </a:extLst>
-          </p:cNvPr>
+          <p:cNvPr id="19" name="Straight Connector 18"/>
           <p:cNvCxnSpPr/>
           <p:nvPr/>
         </p:nvCxnSpPr>
@@ -8853,16 +7860,8 @@
       </p:cxnSp>
       <p:sp>
         <p:nvSpPr>
-          <p:cNvPr id="7" name="Title 1">
-            <a:extLst>
-              <a:ext uri="{FF2B5EF4-FFF2-40B4-BE49-F238E27FC236}">
-                <a16:creationId xmlns:a16="http://schemas.microsoft.com/office/drawing/2014/main" xmlns="" id="{DBCA429D-4508-1636-537F-DC9B5B415FD1}"/>
-              </a:ext>
-            </a:extLst>
-          </p:cNvPr>
-          <p:cNvSpPr txBox="1">
-            <a:spLocks/>
-          </p:cNvSpPr>
+          <p:cNvPr id="7" name="Title 1"/>
+          <p:cNvSpPr txBox="1"/>
           <p:nvPr/>
         </p:nvSpPr>
         <p:spPr>
@@ -8894,7 +7893,6 @@
               <a:buSzTx/>
               <a:buFontTx/>
               <a:buNone/>
-              <a:tabLst/>
               <a:defRPr/>
             </a:pPr>
             <a:r>
@@ -8915,6 +7913,21 @@
               </a:rPr>
               <a:t>UNIT-1</a:t>
             </a:r>
+            <a:endParaRPr lang="en-IN" sz="6000" dirty="0" smtClean="0">
+              <a:solidFill>
+                <a:srgbClr val="002060"/>
+              </a:solidFill>
+              <a:effectLst>
+                <a:outerShdw blurRad="38100" dist="38100" dir="2700000" algn="tl">
+                  <a:srgbClr val="000000">
+                    <a:alpha val="43137"/>
+                  </a:srgbClr>
+                </a:outerShdw>
+              </a:effectLst>
+              <a:latin typeface="Cambria" panose="02040503050406030204" pitchFamily="18" charset="0"/>
+              <a:ea typeface="Cambria" panose="02040503050406030204" pitchFamily="18" charset="0"/>
+              <a:cs typeface="+mj-cs"/>
+            </a:endParaRPr>
           </a:p>
           <a:p>
             <a:pPr marL="0" marR="0" lvl="0" indent="0" algn="ctr" defTabSz="914400" rtl="0" eaLnBrk="1" fontAlgn="auto" latinLnBrk="0" hangingPunct="1">
@@ -8931,7 +7944,6 @@
               <a:buSzTx/>
               <a:buFontTx/>
               <a:buNone/>
-              <a:tabLst/>
               <a:defRPr/>
             </a:pPr>
             <a:r>
@@ -9004,11 +8016,6 @@
         </p:txBody>
       </p:sp>
     </p:spTree>
-    <p:extLst>
-      <p:ext uri="{BB962C8B-B14F-4D97-AF65-F5344CB8AC3E}">
-        <p14:creationId xmlns:p14="http://schemas.microsoft.com/office/powerpoint/2010/main" xmlns="" val="1043121263"/>
-      </p:ext>
-    </p:extLst>
   </p:cSld>
   <p:clrMapOvr>
     <a:masterClrMapping/>
@@ -9035,13 +8042,7 @@
       </p:grpSpPr>
       <p:sp>
         <p:nvSpPr>
-          <p:cNvPr id="2" name="Title 1">
-            <a:extLst>
-              <a:ext uri="{FF2B5EF4-FFF2-40B4-BE49-F238E27FC236}">
-                <a16:creationId xmlns:a16="http://schemas.microsoft.com/office/drawing/2014/main" xmlns="" id="{8AEB4806-82C8-2965-248D-D6F3EB5F1BD7}"/>
-              </a:ext>
-            </a:extLst>
-          </p:cNvPr>
+          <p:cNvPr id="2" name="Title 1"/>
           <p:cNvSpPr>
             <a:spLocks noGrp="1"/>
           </p:cNvSpPr>
@@ -9058,18 +8059,13 @@
               <a:rPr lang="en-IN" dirty="0"/>
               <a:t>Data Structure: </a:t>
             </a:r>
-          </a:p>
-        </p:txBody>
-      </p:sp>
-      <p:sp>
-        <p:nvSpPr>
-          <p:cNvPr id="3" name="Content Placeholder 2">
-            <a:extLst>
-              <a:ext uri="{FF2B5EF4-FFF2-40B4-BE49-F238E27FC236}">
-                <a16:creationId xmlns:a16="http://schemas.microsoft.com/office/drawing/2014/main" xmlns="" id="{C4B21AFD-11F3-F1AE-6A9E-F091EC799113}"/>
-              </a:ext>
-            </a:extLst>
-          </p:cNvPr>
+            <a:endParaRPr lang="en-IN" dirty="0"/>
+          </a:p>
+        </p:txBody>
+      </p:sp>
+      <p:sp>
+        <p:nvSpPr>
+          <p:cNvPr id="3" name="Content Placeholder 2"/>
           <p:cNvSpPr>
             <a:spLocks noGrp="1"/>
           </p:cNvSpPr>
@@ -9094,6 +8090,7 @@
               <a:rPr lang="en-US" dirty="0"/>
               <a:t> </a:t>
             </a:r>
+            <a:endParaRPr lang="en-US" dirty="0"/>
           </a:p>
           <a:p>
             <a:pPr lvl="1"/>
@@ -9101,6 +8098,7 @@
               <a:rPr lang="en-US" dirty="0"/>
               <a:t>Basic data structures and are directly operated upon by the machine instructions, which is in a primitive level. </a:t>
             </a:r>
+            <a:endParaRPr lang="en-US" dirty="0"/>
           </a:p>
           <a:p>
             <a:pPr lvl="1"/>
@@ -9108,6 +8106,7 @@
               <a:rPr lang="en-US" dirty="0"/>
               <a:t>Example: integers, floating point numbers, characters, string constants, pointers etc.</a:t>
             </a:r>
+            <a:endParaRPr lang="en-US" dirty="0"/>
           </a:p>
           <a:p>
             <a:r>
@@ -9118,6 +8117,11 @@
               </a:rPr>
               <a:t>Non-primitive data structures:</a:t>
             </a:r>
+            <a:endParaRPr lang="en-US" b="1" dirty="0">
+              <a:solidFill>
+                <a:srgbClr val="FF0000"/>
+              </a:solidFill>
+            </a:endParaRPr>
           </a:p>
           <a:p>
             <a:pPr lvl="1"/>
@@ -9125,6 +8129,7 @@
               <a:rPr lang="en-US" dirty="0"/>
               <a:t>Data structure emphasizing on structuring of a group of </a:t>
             </a:r>
+            <a:endParaRPr lang="en-US" dirty="0"/>
           </a:p>
           <a:p>
             <a:pPr lvl="2"/>
@@ -9132,6 +8137,7 @@
               <a:rPr lang="en-US" dirty="0"/>
               <a:t>homogeneous (same type) or </a:t>
             </a:r>
+            <a:endParaRPr lang="en-US" dirty="0"/>
           </a:p>
           <a:p>
             <a:pPr lvl="2"/>
@@ -9139,6 +8145,7 @@
               <a:rPr lang="en-US" dirty="0"/>
               <a:t>Heterogeneous (different type) data items. </a:t>
             </a:r>
+            <a:endParaRPr lang="en-US" dirty="0"/>
           </a:p>
           <a:p>
             <a:pPr lvl="1"/>
@@ -9146,18 +8153,13 @@
               <a:rPr lang="en-US" dirty="0"/>
               <a:t>Example: Array, list, files, linked list, trees and graphs</a:t>
             </a:r>
-          </a:p>
-        </p:txBody>
-      </p:sp>
-      <p:sp>
-        <p:nvSpPr>
-          <p:cNvPr id="6" name="Slide Number Placeholder 5">
-            <a:extLst>
-              <a:ext uri="{FF2B5EF4-FFF2-40B4-BE49-F238E27FC236}">
-                <a16:creationId xmlns:a16="http://schemas.microsoft.com/office/drawing/2014/main" xmlns="" id="{82A4BCA1-925D-46AE-87B3-912EE4242B45}"/>
-              </a:ext>
-            </a:extLst>
-          </p:cNvPr>
+            <a:endParaRPr lang="en-US" dirty="0"/>
+          </a:p>
+        </p:txBody>
+      </p:sp>
+      <p:sp>
+        <p:nvSpPr>
+          <p:cNvPr id="6" name="Slide Number Placeholder 5"/>
           <p:cNvSpPr>
             <a:spLocks noGrp="1"/>
           </p:cNvSpPr>
@@ -9172,8 +8174,123 @@
           <a:p>
             <a:fld id="{75B0C241-D0FA-41C4-806B-7A3C5377B352}" type="slidenum">
               <a:rPr lang="en-IN" smtClean="0"/>
-              <a:pPr/>
-              <a:t>10</a:t>
+            </a:fld>
+            <a:endParaRPr lang="en-IN"/>
+          </a:p>
+        </p:txBody>
+      </p:sp>
+      <p:pic>
+        <p:nvPicPr>
+          <p:cNvPr id="7" name="Picture 6" descr="College-of-Engineering-Pune-Logo.png"/>
+          <p:cNvPicPr>
+            <a:picLocks noChangeAspect="1"/>
+          </p:cNvPicPr>
+          <p:nvPr/>
+        </p:nvPicPr>
+        <p:blipFill>
+          <a:blip r:embed="rId1" cstate="print"/>
+          <a:stretch>
+            <a:fillRect/>
+          </a:stretch>
+        </p:blipFill>
+        <p:spPr>
+          <a:xfrm>
+            <a:off x="0" y="0"/>
+            <a:ext cx="1794294" cy="1190445"/>
+          </a:xfrm>
+          <a:prstGeom prst="rect">
+            <a:avLst/>
+          </a:prstGeom>
+        </p:spPr>
+      </p:pic>
+    </p:spTree>
+  </p:cSld>
+  <p:clrMapOvr>
+    <a:masterClrMapping/>
+  </p:clrMapOvr>
+</p:sld>
+</file>
+
+<file path=ppt/slides/slide11.xml><?xml version="1.0" encoding="utf-8"?>
+<p:sld xmlns:a="http://schemas.openxmlformats.org/drawingml/2006/main" xmlns:r="http://schemas.openxmlformats.org/officeDocument/2006/relationships" xmlns:p="http://schemas.openxmlformats.org/presentationml/2006/main">
+  <p:cSld>
+    <p:spTree>
+      <p:nvGrpSpPr>
+        <p:cNvPr id="1" name=""/>
+        <p:cNvGrpSpPr/>
+        <p:nvPr/>
+      </p:nvGrpSpPr>
+      <p:grpSpPr>
+        <a:xfrm>
+          <a:off x="0" y="0"/>
+          <a:ext cx="0" cy="0"/>
+          <a:chOff x="0" y="0"/>
+          <a:chExt cx="0" cy="0"/>
+        </a:xfrm>
+      </p:grpSpPr>
+      <p:sp>
+        <p:nvSpPr>
+          <p:cNvPr id="2" name="Title 1"/>
+          <p:cNvSpPr>
+            <a:spLocks noGrp="1"/>
+          </p:cNvSpPr>
+          <p:nvPr>
+            <p:ph type="title"/>
+          </p:nvPr>
+        </p:nvSpPr>
+        <p:spPr/>
+        <p:txBody>
+          <a:bodyPr/>
+          <a:lstStyle/>
+          <a:p>
+            <a:r>
+              <a:rPr lang="en-IN" dirty="0"/>
+              <a:t>Classification of Data structure</a:t>
+            </a:r>
+            <a:endParaRPr lang="en-IN" dirty="0"/>
+          </a:p>
+        </p:txBody>
+      </p:sp>
+      <p:pic>
+        <p:nvPicPr>
+          <p:cNvPr id="8" name="Content Placeholder 7"/>
+          <p:cNvPicPr>
+            <a:picLocks noGrp="1" noChangeAspect="1"/>
+          </p:cNvPicPr>
+          <p:nvPr>
+            <p:ph idx="1"/>
+          </p:nvPr>
+        </p:nvPicPr>
+        <p:blipFill>
+          <a:blip r:embed="rId1" cstate="print"/>
+          <a:stretch>
+            <a:fillRect/>
+          </a:stretch>
+        </p:blipFill>
+        <p:spPr>
+          <a:xfrm>
+            <a:off x="1699722" y="1723787"/>
+            <a:ext cx="7735380" cy="3410426"/>
+          </a:xfrm>
+        </p:spPr>
+      </p:pic>
+      <p:sp>
+        <p:nvSpPr>
+          <p:cNvPr id="6" name="Slide Number Placeholder 5"/>
+          <p:cNvSpPr>
+            <a:spLocks noGrp="1"/>
+          </p:cNvSpPr>
+          <p:nvPr>
+            <p:ph type="sldNum" sz="quarter" idx="12"/>
+          </p:nvPr>
+        </p:nvSpPr>
+        <p:spPr/>
+        <p:txBody>
+          <a:bodyPr/>
+          <a:lstStyle/>
+          <a:p>
+            <a:fld id="{75B0C241-D0FA-41C4-806B-7A3C5377B352}" type="slidenum">
+              <a:rPr lang="en-IN" smtClean="0"/>
             </a:fld>
             <a:endParaRPr lang="en-IN"/>
           </a:p>
@@ -9204,152 +8321,6 @@
         </p:spPr>
       </p:pic>
     </p:spTree>
-    <p:extLst>
-      <p:ext uri="{BB962C8B-B14F-4D97-AF65-F5344CB8AC3E}">
-        <p14:creationId xmlns:p14="http://schemas.microsoft.com/office/powerpoint/2010/main" xmlns="" val="3657214621"/>
-      </p:ext>
-    </p:extLst>
-  </p:cSld>
-  <p:clrMapOvr>
-    <a:masterClrMapping/>
-  </p:clrMapOvr>
-</p:sld>
-</file>
-
-<file path=ppt/slides/slide11.xml><?xml version="1.0" encoding="utf-8"?>
-<p:sld xmlns:a="http://schemas.openxmlformats.org/drawingml/2006/main" xmlns:r="http://schemas.openxmlformats.org/officeDocument/2006/relationships" xmlns:p="http://schemas.openxmlformats.org/presentationml/2006/main">
-  <p:cSld>
-    <p:spTree>
-      <p:nvGrpSpPr>
-        <p:cNvPr id="1" name=""/>
-        <p:cNvGrpSpPr/>
-        <p:nvPr/>
-      </p:nvGrpSpPr>
-      <p:grpSpPr>
-        <a:xfrm>
-          <a:off x="0" y="0"/>
-          <a:ext cx="0" cy="0"/>
-          <a:chOff x="0" y="0"/>
-          <a:chExt cx="0" cy="0"/>
-        </a:xfrm>
-      </p:grpSpPr>
-      <p:sp>
-        <p:nvSpPr>
-          <p:cNvPr id="2" name="Title 1">
-            <a:extLst>
-              <a:ext uri="{FF2B5EF4-FFF2-40B4-BE49-F238E27FC236}">
-                <a16:creationId xmlns:a16="http://schemas.microsoft.com/office/drawing/2014/main" xmlns="" id="{869058FA-935D-E070-E778-7B71436759ED}"/>
-              </a:ext>
-            </a:extLst>
-          </p:cNvPr>
-          <p:cNvSpPr>
-            <a:spLocks noGrp="1"/>
-          </p:cNvSpPr>
-          <p:nvPr>
-            <p:ph type="title"/>
-          </p:nvPr>
-        </p:nvSpPr>
-        <p:spPr/>
-        <p:txBody>
-          <a:bodyPr/>
-          <a:lstStyle/>
-          <a:p>
-            <a:r>
-              <a:rPr lang="en-IN" dirty="0"/>
-              <a:t>Classification of Data structure</a:t>
-            </a:r>
-          </a:p>
-        </p:txBody>
-      </p:sp>
-      <p:pic>
-        <p:nvPicPr>
-          <p:cNvPr id="8" name="Content Placeholder 7">
-            <a:extLst>
-              <a:ext uri="{FF2B5EF4-FFF2-40B4-BE49-F238E27FC236}">
-                <a16:creationId xmlns:a16="http://schemas.microsoft.com/office/drawing/2014/main" xmlns="" id="{E63781F5-5826-FF0A-3B81-FEBE9256A476}"/>
-              </a:ext>
-            </a:extLst>
-          </p:cNvPr>
-          <p:cNvPicPr>
-            <a:picLocks noGrp="1" noChangeAspect="1"/>
-          </p:cNvPicPr>
-          <p:nvPr>
-            <p:ph idx="1"/>
-          </p:nvPr>
-        </p:nvPicPr>
-        <p:blipFill>
-          <a:blip r:embed="rId2" cstate="print"/>
-          <a:stretch>
-            <a:fillRect/>
-          </a:stretch>
-        </p:blipFill>
-        <p:spPr>
-          <a:xfrm>
-            <a:off x="1699722" y="1723787"/>
-            <a:ext cx="7735380" cy="3410426"/>
-          </a:xfrm>
-        </p:spPr>
-      </p:pic>
-      <p:sp>
-        <p:nvSpPr>
-          <p:cNvPr id="6" name="Slide Number Placeholder 5">
-            <a:extLst>
-              <a:ext uri="{FF2B5EF4-FFF2-40B4-BE49-F238E27FC236}">
-                <a16:creationId xmlns:a16="http://schemas.microsoft.com/office/drawing/2014/main" xmlns="" id="{87C2C915-91ED-3470-5A7A-0F009DD77685}"/>
-              </a:ext>
-            </a:extLst>
-          </p:cNvPr>
-          <p:cNvSpPr>
-            <a:spLocks noGrp="1"/>
-          </p:cNvSpPr>
-          <p:nvPr>
-            <p:ph type="sldNum" sz="quarter" idx="12"/>
-          </p:nvPr>
-        </p:nvSpPr>
-        <p:spPr/>
-        <p:txBody>
-          <a:bodyPr/>
-          <a:lstStyle/>
-          <a:p>
-            <a:fld id="{75B0C241-D0FA-41C4-806B-7A3C5377B352}" type="slidenum">
-              <a:rPr lang="en-IN" smtClean="0"/>
-              <a:pPr/>
-              <a:t>11</a:t>
-            </a:fld>
-            <a:endParaRPr lang="en-IN"/>
-          </a:p>
-        </p:txBody>
-      </p:sp>
-      <p:pic>
-        <p:nvPicPr>
-          <p:cNvPr id="7" name="Picture 6" descr="College-of-Engineering-Pune-Logo.png"/>
-          <p:cNvPicPr>
-            <a:picLocks noChangeAspect="1"/>
-          </p:cNvPicPr>
-          <p:nvPr/>
-        </p:nvPicPr>
-        <p:blipFill>
-          <a:blip r:embed="rId3" cstate="print"/>
-          <a:stretch>
-            <a:fillRect/>
-          </a:stretch>
-        </p:blipFill>
-        <p:spPr>
-          <a:xfrm>
-            <a:off x="0" y="0"/>
-            <a:ext cx="1794294" cy="1190445"/>
-          </a:xfrm>
-          <a:prstGeom prst="rect">
-            <a:avLst/>
-          </a:prstGeom>
-        </p:spPr>
-      </p:pic>
-    </p:spTree>
-    <p:extLst>
-      <p:ext uri="{BB962C8B-B14F-4D97-AF65-F5344CB8AC3E}">
-        <p14:creationId xmlns:p14="http://schemas.microsoft.com/office/powerpoint/2010/main" xmlns="" val="3774161086"/>
-      </p:ext>
-    </p:extLst>
   </p:cSld>
   <p:clrMapOvr>
     <a:masterClrMapping/>
@@ -9376,13 +8347,7 @@
       </p:grpSpPr>
       <p:sp>
         <p:nvSpPr>
-          <p:cNvPr id="2" name="Title 1">
-            <a:extLst>
-              <a:ext uri="{FF2B5EF4-FFF2-40B4-BE49-F238E27FC236}">
-                <a16:creationId xmlns:a16="http://schemas.microsoft.com/office/drawing/2014/main" xmlns="" id="{8CEB175A-6D1F-335C-FEA9-16EE9698A29F}"/>
-              </a:ext>
-            </a:extLst>
-          </p:cNvPr>
+          <p:cNvPr id="2" name="Title 1"/>
           <p:cNvSpPr>
             <a:spLocks noGrp="1"/>
           </p:cNvSpPr>
@@ -9399,18 +8364,13 @@
               <a:rPr lang="en-IN" dirty="0"/>
               <a:t>Data Structure</a:t>
             </a:r>
-          </a:p>
-        </p:txBody>
-      </p:sp>
-      <p:sp>
-        <p:nvSpPr>
-          <p:cNvPr id="3" name="Content Placeholder 2">
-            <a:extLst>
-              <a:ext uri="{FF2B5EF4-FFF2-40B4-BE49-F238E27FC236}">
-                <a16:creationId xmlns:a16="http://schemas.microsoft.com/office/drawing/2014/main" xmlns="" id="{814E6AAE-6ADC-598B-C741-CE5CA0224F4D}"/>
-              </a:ext>
-            </a:extLst>
-          </p:cNvPr>
+            <a:endParaRPr lang="en-IN" dirty="0"/>
+          </a:p>
+        </p:txBody>
+      </p:sp>
+      <p:sp>
+        <p:nvSpPr>
+          <p:cNvPr id="3" name="Content Placeholder 2"/>
           <p:cNvSpPr>
             <a:spLocks noGrp="1"/>
           </p:cNvSpPr>
@@ -9434,6 +8394,7 @@
               <a:rPr lang="en-US" sz="2800" dirty="0"/>
               <a:t>Ex: </a:t>
             </a:r>
+            <a:endParaRPr lang="en-US" sz="2800" dirty="0"/>
           </a:p>
           <a:p>
             <a:pPr marL="514350" lvl="1" indent="-228600">
@@ -9455,6 +8416,7 @@
               <a:rPr lang="en-US" sz="2800" dirty="0"/>
               <a:t>homogeneous sequence of data/ data type know as element</a:t>
             </a:r>
+            <a:endParaRPr lang="en-US" sz="2800" dirty="0"/>
           </a:p>
           <a:p>
             <a:pPr marL="971550" lvl="2" indent="-228600">
@@ -9468,6 +8430,7 @@
               <a:rPr lang="en-US" sz="2800" dirty="0"/>
               <a:t>Association is position among element. </a:t>
             </a:r>
+            <a:endParaRPr lang="en-US" sz="2800" dirty="0"/>
           </a:p>
           <a:p>
             <a:pPr marL="971550" lvl="2" indent="-228600">
@@ -9499,6 +8462,7 @@
               <a:rPr lang="en-US" sz="2800" dirty="0"/>
               <a:t>: heterogeneous combination of data into single structure with an key</a:t>
             </a:r>
+            <a:endParaRPr lang="en-US" sz="2800" dirty="0"/>
           </a:p>
           <a:p>
             <a:pPr marL="971550" lvl="2" indent="-228600">
@@ -9512,6 +8476,7 @@
               <a:rPr lang="en-US" sz="2800" dirty="0"/>
               <a:t>No association.</a:t>
             </a:r>
+            <a:endParaRPr lang="en-US" sz="2800" dirty="0"/>
           </a:p>
           <a:p>
             <a:pPr marL="57150" indent="-228600">
@@ -9525,18 +8490,13 @@
               <a:rPr lang="en-US" sz="2800" dirty="0"/>
               <a:t>Data structure can be nested: Data structure within data structure.</a:t>
             </a:r>
-          </a:p>
-        </p:txBody>
-      </p:sp>
-      <p:sp>
-        <p:nvSpPr>
-          <p:cNvPr id="6" name="Slide Number Placeholder 5">
-            <a:extLst>
-              <a:ext uri="{FF2B5EF4-FFF2-40B4-BE49-F238E27FC236}">
-                <a16:creationId xmlns:a16="http://schemas.microsoft.com/office/drawing/2014/main" xmlns="" id="{8AD67307-1302-3B51-2EA1-116122A5CAF3}"/>
-              </a:ext>
-            </a:extLst>
-          </p:cNvPr>
+            <a:endParaRPr lang="en-US" sz="2800" dirty="0"/>
+          </a:p>
+        </p:txBody>
+      </p:sp>
+      <p:sp>
+        <p:nvSpPr>
+          <p:cNvPr id="6" name="Slide Number Placeholder 5"/>
           <p:cNvSpPr>
             <a:spLocks noGrp="1"/>
           </p:cNvSpPr>
@@ -9551,8 +8511,6 @@
           <a:p>
             <a:fld id="{75B0C241-D0FA-41C4-806B-7A3C5377B352}" type="slidenum">
               <a:rPr lang="en-IN" smtClean="0"/>
-              <a:pPr/>
-              <a:t>12</a:t>
             </a:fld>
             <a:endParaRPr lang="en-IN"/>
           </a:p>
@@ -9567,7 +8525,7 @@
           <p:nvPr/>
         </p:nvPicPr>
         <p:blipFill>
-          <a:blip r:embed="rId2" cstate="print"/>
+          <a:blip r:embed="rId1" cstate="print"/>
           <a:stretch>
             <a:fillRect/>
           </a:stretch>
@@ -9583,11 +8541,6 @@
         </p:spPr>
       </p:pic>
     </p:spTree>
-    <p:extLst>
-      <p:ext uri="{BB962C8B-B14F-4D97-AF65-F5344CB8AC3E}">
-        <p14:creationId xmlns:p14="http://schemas.microsoft.com/office/powerpoint/2010/main" xmlns="" val="1997585456"/>
-      </p:ext>
-    </p:extLst>
   </p:cSld>
   <p:clrMapOvr>
     <a:masterClrMapping/>
@@ -9614,13 +8567,7 @@
       </p:grpSpPr>
       <p:sp>
         <p:nvSpPr>
-          <p:cNvPr id="2" name="Title 1">
-            <a:extLst>
-              <a:ext uri="{FF2B5EF4-FFF2-40B4-BE49-F238E27FC236}">
-                <a16:creationId xmlns:a16="http://schemas.microsoft.com/office/drawing/2014/main" xmlns="" id="{6D5B3685-0877-A1FF-E5E5-EB937F30069E}"/>
-              </a:ext>
-            </a:extLst>
-          </p:cNvPr>
+          <p:cNvPr id="2" name="Title 1"/>
           <p:cNvSpPr>
             <a:spLocks noGrp="1"/>
           </p:cNvSpPr>
@@ -9637,18 +8584,13 @@
               <a:rPr lang="en-IN" dirty="0"/>
               <a:t>Abstract Data Type: ADT</a:t>
             </a:r>
-          </a:p>
-        </p:txBody>
-      </p:sp>
-      <p:sp>
-        <p:nvSpPr>
-          <p:cNvPr id="3" name="Content Placeholder 2">
-            <a:extLst>
-              <a:ext uri="{FF2B5EF4-FFF2-40B4-BE49-F238E27FC236}">
-                <a16:creationId xmlns:a16="http://schemas.microsoft.com/office/drawing/2014/main" xmlns="" id="{C31B5E85-C512-6020-8525-71B6E3E0F29B}"/>
-              </a:ext>
-            </a:extLst>
-          </p:cNvPr>
+            <a:endParaRPr lang="en-IN" dirty="0"/>
+          </a:p>
+        </p:txBody>
+      </p:sp>
+      <p:sp>
+        <p:nvSpPr>
+          <p:cNvPr id="3" name="Content Placeholder 2"/>
           <p:cNvSpPr>
             <a:spLocks noGrp="1"/>
           </p:cNvSpPr>
@@ -9673,6 +8615,11 @@
               </a:rPr>
               <a:t>Need:</a:t>
             </a:r>
+            <a:endParaRPr lang="en-US" dirty="0">
+              <a:solidFill>
+                <a:srgbClr val="00B050"/>
+              </a:solidFill>
+            </a:endParaRPr>
           </a:p>
           <a:p>
             <a:pPr lvl="1">
@@ -9703,6 +8650,11 @@
               </a:rPr>
               <a:t>per his application requirement.</a:t>
             </a:r>
+            <a:endParaRPr lang="en-US" dirty="0">
+              <a:solidFill>
+                <a:sysClr val="windowText" lastClr="000000"/>
+              </a:solidFill>
+            </a:endParaRPr>
           </a:p>
           <a:p>
             <a:pPr lvl="1">
@@ -9717,6 +8669,11 @@
               </a:rPr>
               <a:t>Programmer’s own data referred as ADT</a:t>
             </a:r>
+            <a:endParaRPr lang="en-US" b="1" dirty="0">
+              <a:solidFill>
+                <a:srgbClr val="0070C0"/>
+              </a:solidFill>
+            </a:endParaRPr>
           </a:p>
           <a:p>
             <a:pPr>
@@ -9731,6 +8688,11 @@
               </a:rPr>
               <a:t>ADT</a:t>
             </a:r>
+            <a:endParaRPr lang="en-US" dirty="0">
+              <a:solidFill>
+                <a:srgbClr val="00B050"/>
+              </a:solidFill>
+            </a:endParaRPr>
           </a:p>
           <a:p>
             <a:pPr lvl="1">
@@ -9741,6 +8703,7 @@
               <a:rPr lang="en-US" dirty="0"/>
               <a:t>It has data structure</a:t>
             </a:r>
+            <a:endParaRPr lang="en-US" dirty="0"/>
           </a:p>
           <a:p>
             <a:pPr lvl="1">
@@ -9751,6 +8714,7 @@
               <a:rPr lang="en-US" dirty="0"/>
               <a:t>Set of operations that can be used to read that data structure.</a:t>
             </a:r>
+            <a:endParaRPr lang="en-US" dirty="0"/>
           </a:p>
           <a:p>
             <a:pPr lvl="1">
@@ -9761,6 +8725,7 @@
               <a:rPr lang="en-US" dirty="0"/>
               <a:t>Rule: allows not only to read but to doc other operations</a:t>
             </a:r>
+            <a:endParaRPr lang="en-US" dirty="0"/>
           </a:p>
           <a:p>
             <a:pPr lvl="1">
@@ -9771,6 +8736,7 @@
               <a:rPr lang="en-US" dirty="0"/>
               <a:t>With ADT </a:t>
             </a:r>
+            <a:endParaRPr lang="en-US" dirty="0"/>
           </a:p>
           <a:p>
             <a:pPr lvl="2">
@@ -9781,6 +8747,7 @@
               <a:rPr lang="en-US" dirty="0"/>
               <a:t>user not need to concern how the task is done </a:t>
             </a:r>
+            <a:endParaRPr lang="en-US" dirty="0"/>
           </a:p>
           <a:p>
             <a:pPr lvl="2">
@@ -9791,6 +8758,7 @@
               <a:rPr lang="en-US" dirty="0"/>
               <a:t>But what it can do.</a:t>
             </a:r>
+            <a:endParaRPr lang="en-US" dirty="0"/>
           </a:p>
           <a:p>
             <a:endParaRPr lang="en-IN" dirty="0"/>
@@ -9799,13 +8767,7 @@
       </p:sp>
       <p:sp>
         <p:nvSpPr>
-          <p:cNvPr id="6" name="Slide Number Placeholder 5">
-            <a:extLst>
-              <a:ext uri="{FF2B5EF4-FFF2-40B4-BE49-F238E27FC236}">
-                <a16:creationId xmlns:a16="http://schemas.microsoft.com/office/drawing/2014/main" xmlns="" id="{FB80FD86-E743-A924-A6C3-DE3E7474E801}"/>
-              </a:ext>
-            </a:extLst>
-          </p:cNvPr>
+          <p:cNvPr id="6" name="Slide Number Placeholder 5"/>
           <p:cNvSpPr>
             <a:spLocks noGrp="1"/>
           </p:cNvSpPr>
@@ -9820,8 +8782,6 @@
           <a:p>
             <a:fld id="{75B0C241-D0FA-41C4-806B-7A3C5377B352}" type="slidenum">
               <a:rPr lang="en-IN" smtClean="0"/>
-              <a:pPr/>
-              <a:t>13</a:t>
             </a:fld>
             <a:endParaRPr lang="en-IN"/>
           </a:p>
@@ -9836,7 +8796,7 @@
           <p:nvPr/>
         </p:nvPicPr>
         <p:blipFill>
-          <a:blip r:embed="rId2" cstate="print"/>
+          <a:blip r:embed="rId1" cstate="print"/>
           <a:stretch>
             <a:fillRect/>
           </a:stretch>
@@ -9852,11 +8812,6 @@
         </p:spPr>
       </p:pic>
     </p:spTree>
-    <p:extLst>
-      <p:ext uri="{BB962C8B-B14F-4D97-AF65-F5344CB8AC3E}">
-        <p14:creationId xmlns:p14="http://schemas.microsoft.com/office/powerpoint/2010/main" xmlns="" val="2021305881"/>
-      </p:ext>
-    </p:extLst>
   </p:cSld>
   <p:clrMapOvr>
     <a:masterClrMapping/>
@@ -9883,13 +8838,7 @@
       </p:grpSpPr>
       <p:sp>
         <p:nvSpPr>
-          <p:cNvPr id="2" name="Title 1">
-            <a:extLst>
-              <a:ext uri="{FF2B5EF4-FFF2-40B4-BE49-F238E27FC236}">
-                <a16:creationId xmlns:a16="http://schemas.microsoft.com/office/drawing/2014/main" xmlns="" id="{E1C2BCAA-C60C-E4A7-9394-48B85C297192}"/>
-              </a:ext>
-            </a:extLst>
-          </p:cNvPr>
+          <p:cNvPr id="2" name="Title 1"/>
           <p:cNvSpPr>
             <a:spLocks noGrp="1"/>
           </p:cNvSpPr>
@@ -9906,18 +8855,13 @@
               <a:rPr lang="en-IN" dirty="0"/>
               <a:t>Abstract Data Type: ADT</a:t>
             </a:r>
-          </a:p>
-        </p:txBody>
-      </p:sp>
-      <p:sp>
-        <p:nvSpPr>
-          <p:cNvPr id="3" name="Content Placeholder 2">
-            <a:extLst>
-              <a:ext uri="{FF2B5EF4-FFF2-40B4-BE49-F238E27FC236}">
-                <a16:creationId xmlns:a16="http://schemas.microsoft.com/office/drawing/2014/main" xmlns="" id="{760589B0-C600-6BCD-F3AE-98DA428250E5}"/>
-              </a:ext>
-            </a:extLst>
-          </p:cNvPr>
+            <a:endParaRPr lang="en-IN" dirty="0"/>
+          </a:p>
+        </p:txBody>
+      </p:sp>
+      <p:sp>
+        <p:nvSpPr>
+          <p:cNvPr id="3" name="Content Placeholder 2"/>
           <p:cNvSpPr>
             <a:spLocks noGrp="1"/>
           </p:cNvSpPr>
@@ -9942,13 +8886,14 @@
               <a:buChar char="§"/>
             </a:pPr>
             <a:r>
-              <a:rPr lang="" altLang="en-US" dirty="0"/>
+              <a:rPr lang="en-US" altLang="en-US" dirty="0"/>
               <a:t>ADT </a:t>
             </a:r>
             <a:r>
               <a:rPr lang="en-US" dirty="0"/>
               <a:t>a type (or class) for objects </a:t>
             </a:r>
+            <a:endParaRPr lang="en-US" dirty="0"/>
           </a:p>
           <a:p>
             <a:pPr lvl="1">
@@ -9959,6 +8904,7 @@
               <a:rPr lang="en-US" dirty="0"/>
               <a:t>whose behavior is defined by a set of value and a set of operations.</a:t>
             </a:r>
+            <a:endParaRPr lang="en-US" dirty="0"/>
           </a:p>
           <a:p>
             <a:pPr>
@@ -9993,6 +8939,7 @@
               <a:rPr lang="en-US" dirty="0"/>
               <a:t>these operations will be implemented.</a:t>
             </a:r>
+            <a:endParaRPr lang="en-US" dirty="0"/>
           </a:p>
           <a:p>
             <a:pPr>
@@ -10003,6 +8950,7 @@
               <a:rPr lang="en-US" dirty="0"/>
               <a:t>It does not specify how data will be organized in memory and what algorithms will be used for implementing the operations. </a:t>
             </a:r>
+            <a:endParaRPr lang="en-US" dirty="0"/>
           </a:p>
           <a:p>
             <a:pPr>
@@ -10045,6 +8993,11 @@
               </a:rPr>
               <a:t>abstraction.</a:t>
             </a:r>
+            <a:endParaRPr lang="en-US" b="1" dirty="0">
+              <a:solidFill>
+                <a:srgbClr val="00B050"/>
+              </a:solidFill>
+            </a:endParaRPr>
           </a:p>
           <a:p>
             <a:pPr>
@@ -10055,6 +9008,7 @@
               <a:rPr lang="en-US" dirty="0"/>
               <a:t>Abstractions: </a:t>
             </a:r>
+            <a:endParaRPr lang="en-US" dirty="0"/>
           </a:p>
           <a:p>
             <a:pPr lvl="1">
@@ -10065,6 +9019,7 @@
               <a:rPr lang="en-US" dirty="0"/>
               <a:t>We know what a data type can do</a:t>
             </a:r>
+            <a:endParaRPr lang="en-US" dirty="0"/>
           </a:p>
           <a:p>
             <a:pPr lvl="1">
@@ -10075,18 +9030,13 @@
               <a:rPr lang="en-US" dirty="0"/>
               <a:t>How it is done is hidden</a:t>
             </a:r>
-          </a:p>
-        </p:txBody>
-      </p:sp>
-      <p:sp>
-        <p:nvSpPr>
-          <p:cNvPr id="6" name="Slide Number Placeholder 5">
-            <a:extLst>
-              <a:ext uri="{FF2B5EF4-FFF2-40B4-BE49-F238E27FC236}">
-                <a16:creationId xmlns:a16="http://schemas.microsoft.com/office/drawing/2014/main" xmlns="" id="{0360A02C-449C-34FA-6D41-03A11326170C}"/>
-              </a:ext>
-            </a:extLst>
-          </p:cNvPr>
+            <a:endParaRPr lang="en-US" dirty="0"/>
+          </a:p>
+        </p:txBody>
+      </p:sp>
+      <p:sp>
+        <p:nvSpPr>
+          <p:cNvPr id="6" name="Slide Number Placeholder 5"/>
           <p:cNvSpPr>
             <a:spLocks noGrp="1"/>
           </p:cNvSpPr>
@@ -10101,8 +9051,6 @@
           <a:p>
             <a:fld id="{75B0C241-D0FA-41C4-806B-7A3C5377B352}" type="slidenum">
               <a:rPr lang="en-IN" smtClean="0"/>
-              <a:pPr/>
-              <a:t>14</a:t>
             </a:fld>
             <a:endParaRPr lang="en-IN"/>
           </a:p>
@@ -10117,7 +9065,7 @@
           <p:nvPr/>
         </p:nvPicPr>
         <p:blipFill>
-          <a:blip r:embed="rId2" cstate="print"/>
+          <a:blip r:embed="rId1" cstate="print"/>
           <a:stretch>
             <a:fillRect/>
           </a:stretch>
@@ -10133,11 +9081,6 @@
         </p:spPr>
       </p:pic>
     </p:spTree>
-    <p:extLst>
-      <p:ext uri="{BB962C8B-B14F-4D97-AF65-F5344CB8AC3E}">
-        <p14:creationId xmlns:p14="http://schemas.microsoft.com/office/powerpoint/2010/main" xmlns="" val="1917614693"/>
-      </p:ext>
-    </p:extLst>
   </p:cSld>
   <p:clrMapOvr>
     <a:masterClrMapping/>
@@ -10164,13 +9107,7 @@
       </p:grpSpPr>
       <p:sp>
         <p:nvSpPr>
-          <p:cNvPr id="2" name="Title 1">
-            <a:extLst>
-              <a:ext uri="{FF2B5EF4-FFF2-40B4-BE49-F238E27FC236}">
-                <a16:creationId xmlns:a16="http://schemas.microsoft.com/office/drawing/2014/main" xmlns="" id="{30178467-1AC2-DDFE-F266-DEF64234DD0A}"/>
-              </a:ext>
-            </a:extLst>
-          </p:cNvPr>
+          <p:cNvPr id="2" name="Title 1"/>
           <p:cNvSpPr>
             <a:spLocks noGrp="1"/>
           </p:cNvSpPr>
@@ -10187,18 +9124,13 @@
               <a:rPr lang="en-IN" dirty="0"/>
               <a:t>Abstract Data Type</a:t>
             </a:r>
-          </a:p>
-        </p:txBody>
-      </p:sp>
-      <p:sp>
-        <p:nvSpPr>
-          <p:cNvPr id="3" name="Content Placeholder 2">
-            <a:extLst>
-              <a:ext uri="{FF2B5EF4-FFF2-40B4-BE49-F238E27FC236}">
-                <a16:creationId xmlns:a16="http://schemas.microsoft.com/office/drawing/2014/main" xmlns="" id="{6A38A501-DD3C-3B8D-444B-E91AD3432EA2}"/>
-              </a:ext>
-            </a:extLst>
-          </p:cNvPr>
+            <a:endParaRPr lang="en-IN" dirty="0"/>
+          </a:p>
+        </p:txBody>
+      </p:sp>
+      <p:sp>
+        <p:nvSpPr>
+          <p:cNvPr id="3" name="Content Placeholder 2"/>
           <p:cNvSpPr>
             <a:spLocks noGrp="1"/>
           </p:cNvSpPr>
@@ -10226,6 +9158,7 @@
               <a:rPr lang="en-US" dirty="0"/>
               <a:t>ADT as a black box which hides the inner structure and design of the data type. </a:t>
             </a:r>
+            <a:endParaRPr lang="en-US" dirty="0"/>
           </a:p>
           <a:p>
             <a:pPr>
@@ -10236,6 +9169,7 @@
               <a:rPr lang="en-US" dirty="0"/>
               <a:t>Example: Concept of “list”</a:t>
             </a:r>
+            <a:endParaRPr lang="en-US" dirty="0"/>
           </a:p>
           <a:p>
             <a:pPr lvl="1">
@@ -10246,6 +9180,7 @@
               <a:rPr lang="en-US" dirty="0"/>
               <a:t>Three data structure supports list</a:t>
             </a:r>
+            <a:endParaRPr lang="en-US" dirty="0"/>
           </a:p>
           <a:p>
             <a:pPr lvl="2">
@@ -10256,6 +9191,7 @@
               <a:rPr lang="en-US" dirty="0"/>
               <a:t>We can use array, linked list, file.</a:t>
             </a:r>
+            <a:endParaRPr lang="en-US" dirty="0"/>
           </a:p>
           <a:p>
             <a:pPr>
@@ -10270,6 +9206,11 @@
               </a:rPr>
               <a:t>Abstract data type is a data declarations packaged together with operations that are meaningful for the data type.</a:t>
             </a:r>
+            <a:endParaRPr lang="en-US" dirty="0">
+              <a:solidFill>
+                <a:srgbClr val="0070C0"/>
+              </a:solidFill>
+            </a:endParaRPr>
           </a:p>
           <a:p>
             <a:pPr>
@@ -10308,6 +9249,17 @@
               </a:rPr>
               <a:t> data and operations on data and hide them from user</a:t>
             </a:r>
+            <a:endParaRPr kumimoji="0" lang="en-US" sz="2800" b="0" i="0" u="none" strike="noStrike" kern="1200" cap="none" spc="0" normalizeH="0" noProof="0" dirty="0">
+              <a:ln>
+                <a:noFill/>
+              </a:ln>
+              <a:solidFill>
+                <a:sysClr val="windowText" lastClr="000000"/>
+              </a:solidFill>
+              <a:effectLst/>
+              <a:uLnTx/>
+              <a:uFillTx/>
+            </a:endParaRPr>
           </a:p>
           <a:p>
             <a:pPr>
@@ -10326,6 +9278,11 @@
               </a:rPr>
               <a:t>ADT:</a:t>
             </a:r>
+            <a:endParaRPr lang="en-US" baseline="0" dirty="0">
+              <a:solidFill>
+                <a:sysClr val="windowText" lastClr="000000"/>
+              </a:solidFill>
+            </a:endParaRPr>
           </a:p>
           <a:p>
             <a:pPr lvl="1">
@@ -10350,6 +9307,17 @@
               </a:rPr>
               <a:t>Declaration of data</a:t>
             </a:r>
+            <a:endParaRPr kumimoji="0" lang="en-US" b="0" i="0" u="none" strike="noStrike" kern="1200" cap="none" spc="0" normalizeH="0" noProof="0" dirty="0">
+              <a:ln>
+                <a:noFill/>
+              </a:ln>
+              <a:solidFill>
+                <a:sysClr val="windowText" lastClr="000000"/>
+              </a:solidFill>
+              <a:effectLst/>
+              <a:uLnTx/>
+              <a:uFillTx/>
+            </a:endParaRPr>
           </a:p>
           <a:p>
             <a:pPr lvl="1">
@@ -10368,6 +9336,11 @@
               </a:rPr>
               <a:t>Declaration of operations</a:t>
             </a:r>
+            <a:endParaRPr lang="en-US" baseline="0" dirty="0">
+              <a:solidFill>
+                <a:sysClr val="windowText" lastClr="000000"/>
+              </a:solidFill>
+            </a:endParaRPr>
           </a:p>
           <a:p>
             <a:pPr lvl="1">
@@ -10408,13 +9381,7 @@
       </p:sp>
       <p:sp>
         <p:nvSpPr>
-          <p:cNvPr id="6" name="Slide Number Placeholder 5">
-            <a:extLst>
-              <a:ext uri="{FF2B5EF4-FFF2-40B4-BE49-F238E27FC236}">
-                <a16:creationId xmlns:a16="http://schemas.microsoft.com/office/drawing/2014/main" xmlns="" id="{0365B452-8CED-8AC7-FD36-FFF36ED8C077}"/>
-              </a:ext>
-            </a:extLst>
-          </p:cNvPr>
+          <p:cNvPr id="6" name="Slide Number Placeholder 5"/>
           <p:cNvSpPr>
             <a:spLocks noGrp="1"/>
           </p:cNvSpPr>
@@ -10429,8 +9396,6 @@
           <a:p>
             <a:fld id="{75B0C241-D0FA-41C4-806B-7A3C5377B352}" type="slidenum">
               <a:rPr lang="en-IN" smtClean="0"/>
-              <a:pPr/>
-              <a:t>15</a:t>
             </a:fld>
             <a:endParaRPr lang="en-IN"/>
           </a:p>
@@ -10445,7 +9410,7 @@
           <p:nvPr/>
         </p:nvPicPr>
         <p:blipFill>
-          <a:blip r:embed="rId2" cstate="print"/>
+          <a:blip r:embed="rId1" cstate="print"/>
           <a:stretch>
             <a:fillRect/>
           </a:stretch>
@@ -10461,11 +9426,6 @@
         </p:spPr>
       </p:pic>
     </p:spTree>
-    <p:extLst>
-      <p:ext uri="{BB962C8B-B14F-4D97-AF65-F5344CB8AC3E}">
-        <p14:creationId xmlns:p14="http://schemas.microsoft.com/office/powerpoint/2010/main" xmlns="" val="165898546"/>
-      </p:ext>
-    </p:extLst>
   </p:cSld>
   <p:clrMapOvr>
     <a:masterClrMapping/>
@@ -10492,13 +9452,7 @@
       </p:grpSpPr>
       <p:sp>
         <p:nvSpPr>
-          <p:cNvPr id="2" name="Title 1">
-            <a:extLst>
-              <a:ext uri="{FF2B5EF4-FFF2-40B4-BE49-F238E27FC236}">
-                <a16:creationId xmlns:a16="http://schemas.microsoft.com/office/drawing/2014/main" xmlns="" id="{4B4ED160-3148-8597-3997-94548A97C490}"/>
-              </a:ext>
-            </a:extLst>
-          </p:cNvPr>
+          <p:cNvPr id="2" name="Title 1"/>
           <p:cNvSpPr>
             <a:spLocks noGrp="1"/>
           </p:cNvSpPr>
@@ -10515,18 +9469,13 @@
               <a:rPr lang="en-IN" dirty="0"/>
               <a:t>Abstract Data Type</a:t>
             </a:r>
-          </a:p>
-        </p:txBody>
-      </p:sp>
-      <p:sp>
-        <p:nvSpPr>
-          <p:cNvPr id="3" name="Content Placeholder 2">
-            <a:extLst>
-              <a:ext uri="{FF2B5EF4-FFF2-40B4-BE49-F238E27FC236}">
-                <a16:creationId xmlns:a16="http://schemas.microsoft.com/office/drawing/2014/main" xmlns="" id="{DFDE3852-0DF2-F73B-E9AA-26B63AF749B9}"/>
-              </a:ext>
-            </a:extLst>
-          </p:cNvPr>
+            <a:endParaRPr lang="en-IN" dirty="0"/>
+          </a:p>
+        </p:txBody>
+      </p:sp>
+      <p:sp>
+        <p:nvSpPr>
+          <p:cNvPr id="3" name="Content Placeholder 2"/>
           <p:cNvSpPr>
             <a:spLocks noGrp="1"/>
           </p:cNvSpPr>
@@ -10552,6 +9501,7 @@
               <a:rPr lang="en-US" dirty="0"/>
               <a:t>Encapsulation</a:t>
             </a:r>
+            <a:endParaRPr lang="en-US" dirty="0"/>
           </a:p>
           <a:p>
             <a:pPr lvl="1">
@@ -10570,6 +9520,11 @@
               </a:rPr>
               <a:t>Operation on the ADT can only be done by calling the appropriate function</a:t>
             </a:r>
+            <a:endParaRPr lang="en-US" dirty="0">
+              <a:solidFill>
+                <a:sysClr val="windowText" lastClr="000000"/>
+              </a:solidFill>
+            </a:endParaRPr>
           </a:p>
           <a:p>
             <a:pPr lvl="1">
@@ -10588,6 +9543,11 @@
               </a:rPr>
               <a:t>not mention of how the set of operations is implemented </a:t>
             </a:r>
+            <a:endParaRPr lang="en-US" dirty="0">
+              <a:solidFill>
+                <a:sysClr val="windowText" lastClr="000000"/>
+              </a:solidFill>
+            </a:endParaRPr>
           </a:p>
           <a:p>
             <a:pPr lvl="1">
@@ -10606,6 +9566,11 @@
               </a:rPr>
               <a:t>The definition of the type and all operations on that type can be localized 	to one section of the program</a:t>
             </a:r>
+            <a:endParaRPr lang="en-US" dirty="0">
+              <a:solidFill>
+                <a:sysClr val="windowText" lastClr="000000"/>
+              </a:solidFill>
+            </a:endParaRPr>
           </a:p>
           <a:p>
             <a:pPr lvl="1">
@@ -10624,6 +9589,11 @@
               </a:rPr>
               <a:t>We can treat the ADT as a primitive type:</a:t>
             </a:r>
+            <a:endParaRPr lang="en-US" dirty="0">
+              <a:solidFill>
+                <a:sysClr val="windowText" lastClr="000000"/>
+              </a:solidFill>
+            </a:endParaRPr>
           </a:p>
           <a:p>
             <a:pPr lvl="2">
@@ -10642,6 +9612,11 @@
               </a:rPr>
               <a:t>ADT as  C++: class </a:t>
             </a:r>
+            <a:endParaRPr lang="en-US" dirty="0">
+              <a:solidFill>
+                <a:sysClr val="windowText" lastClr="000000"/>
+              </a:solidFill>
+            </a:endParaRPr>
           </a:p>
           <a:p>
             <a:pPr lvl="2">
@@ -10660,6 +9635,11 @@
               </a:rPr>
               <a:t>method as  C++: member function</a:t>
             </a:r>
+            <a:endParaRPr lang="en-US" dirty="0">
+              <a:solidFill>
+                <a:sysClr val="windowText" lastClr="000000"/>
+              </a:solidFill>
+            </a:endParaRPr>
           </a:p>
           <a:p>
             <a:pPr>
@@ -10689,13 +9669,7 @@
       </p:sp>
       <p:sp>
         <p:nvSpPr>
-          <p:cNvPr id="6" name="Slide Number Placeholder 5">
-            <a:extLst>
-              <a:ext uri="{FF2B5EF4-FFF2-40B4-BE49-F238E27FC236}">
-                <a16:creationId xmlns:a16="http://schemas.microsoft.com/office/drawing/2014/main" xmlns="" id="{4E44921F-E9A8-6174-1243-97358F54FE47}"/>
-              </a:ext>
-            </a:extLst>
-          </p:cNvPr>
+          <p:cNvPr id="6" name="Slide Number Placeholder 5"/>
           <p:cNvSpPr>
             <a:spLocks noGrp="1"/>
           </p:cNvSpPr>
@@ -10710,8 +9684,6 @@
           <a:p>
             <a:fld id="{75B0C241-D0FA-41C4-806B-7A3C5377B352}" type="slidenum">
               <a:rPr lang="en-IN" smtClean="0"/>
-              <a:pPr/>
-              <a:t>16</a:t>
             </a:fld>
             <a:endParaRPr lang="en-IN"/>
           </a:p>
@@ -10726,7 +9698,7 @@
           <p:nvPr/>
         </p:nvPicPr>
         <p:blipFill>
-          <a:blip r:embed="rId2" cstate="print"/>
+          <a:blip r:embed="rId1" cstate="print"/>
           <a:stretch>
             <a:fillRect/>
           </a:stretch>
@@ -10750,7 +9722,7 @@
           <p:nvPr/>
         </p:nvPicPr>
         <p:blipFill>
-          <a:blip r:embed="rId2" cstate="print"/>
+          <a:blip r:embed="rId1" cstate="print"/>
           <a:stretch>
             <a:fillRect/>
           </a:stretch>
@@ -10766,11 +9738,6 @@
         </p:spPr>
       </p:pic>
     </p:spTree>
-    <p:extLst>
-      <p:ext uri="{BB962C8B-B14F-4D97-AF65-F5344CB8AC3E}">
-        <p14:creationId xmlns:p14="http://schemas.microsoft.com/office/powerpoint/2010/main" xmlns="" val="156951176"/>
-      </p:ext>
-    </p:extLst>
   </p:cSld>
   <p:clrMapOvr>
     <a:masterClrMapping/>
@@ -10797,13 +9764,7 @@
       </p:grpSpPr>
       <p:sp>
         <p:nvSpPr>
-          <p:cNvPr id="2" name="Title 1">
-            <a:extLst>
-              <a:ext uri="{FF2B5EF4-FFF2-40B4-BE49-F238E27FC236}">
-                <a16:creationId xmlns:a16="http://schemas.microsoft.com/office/drawing/2014/main" xmlns="" id="{B954529E-5A66-5EBA-3386-E342798636DE}"/>
-              </a:ext>
-            </a:extLst>
-          </p:cNvPr>
+          <p:cNvPr id="2" name="Title 1"/>
           <p:cNvSpPr>
             <a:spLocks noGrp="1"/>
           </p:cNvSpPr>
@@ -10820,18 +9781,13 @@
               <a:rPr lang="en-IN" dirty="0"/>
               <a:t>Abstract Data Type</a:t>
             </a:r>
-          </a:p>
-        </p:txBody>
-      </p:sp>
-      <p:sp>
-        <p:nvSpPr>
-          <p:cNvPr id="3" name="Content Placeholder 2">
-            <a:extLst>
-              <a:ext uri="{FF2B5EF4-FFF2-40B4-BE49-F238E27FC236}">
-                <a16:creationId xmlns:a16="http://schemas.microsoft.com/office/drawing/2014/main" xmlns="" id="{4F727255-1D40-2B35-7923-EB1E6A4023E2}"/>
-              </a:ext>
-            </a:extLst>
-          </p:cNvPr>
+            <a:endParaRPr lang="en-IN" dirty="0"/>
+          </a:p>
+        </p:txBody>
+      </p:sp>
+      <p:sp>
+        <p:nvSpPr>
+          <p:cNvPr id="3" name="Content Placeholder 2"/>
           <p:cNvSpPr>
             <a:spLocks noGrp="1"/>
           </p:cNvSpPr>
@@ -10854,6 +9810,7 @@
               <a:rPr lang="en-US" dirty="0"/>
               <a:t>ADT consist of </a:t>
             </a:r>
+            <a:endParaRPr lang="en-US" dirty="0"/>
           </a:p>
           <a:p>
             <a:pPr lvl="1">
@@ -10868,6 +9825,11 @@
               </a:rPr>
               <a:t>Set of definitions that allow programmer to use functions while hiding implementations.</a:t>
             </a:r>
+            <a:endParaRPr lang="en-US" dirty="0">
+              <a:solidFill>
+                <a:srgbClr val="0070C0"/>
+              </a:solidFill>
+            </a:endParaRPr>
           </a:p>
           <a:p>
             <a:pPr>
@@ -10882,6 +9844,11 @@
               </a:rPr>
               <a:t>ADT defines:</a:t>
             </a:r>
+            <a:endParaRPr lang="en-US" dirty="0">
+              <a:solidFill>
+                <a:srgbClr val="00B050"/>
+              </a:solidFill>
+            </a:endParaRPr>
           </a:p>
           <a:p>
             <a:pPr lvl="1">
@@ -10892,6 +9859,7 @@
               <a:rPr lang="en-US" dirty="0"/>
               <a:t>Set of Domains ‘D’</a:t>
             </a:r>
+            <a:endParaRPr lang="en-US" dirty="0"/>
           </a:p>
           <a:p>
             <a:pPr lvl="1">
@@ -10902,6 +9870,7 @@
               <a:rPr lang="en-US" dirty="0"/>
               <a:t>Set of Functions ‘F’</a:t>
             </a:r>
+            <a:endParaRPr lang="en-US" dirty="0"/>
           </a:p>
           <a:p>
             <a:pPr lvl="1">
@@ -10912,6 +9881,7 @@
               <a:rPr lang="en-US" dirty="0"/>
               <a:t>Set of Rules/ Axioms ‘A’</a:t>
             </a:r>
+            <a:endParaRPr lang="en-US" dirty="0"/>
           </a:p>
           <a:p>
             <a:pPr lvl="1">
@@ -10922,6 +9892,7 @@
               <a:rPr lang="en-US" dirty="0"/>
               <a:t>ADT denotes Abstract Data Structure</a:t>
             </a:r>
+            <a:endParaRPr lang="en-US" dirty="0"/>
           </a:p>
           <a:p>
             <a:pPr>
@@ -10929,13 +9900,10 @@
               <a:buChar char="§"/>
             </a:pPr>
             <a:r>
-              <a:rPr lang="" dirty="0"/>
-              <a:t>Three </a:t>
-            </a:r>
-            <a:r>
-              <a:rPr lang="en-US" dirty="0"/>
-              <a:t>ADTs namely </a:t>
-            </a:r>
+              <a:rPr lang="en-US" dirty="0"/>
+              <a:t>Three ADTs namely </a:t>
+            </a:r>
+            <a:endParaRPr lang="en-US" dirty="0"/>
           </a:p>
           <a:p>
             <a:pPr lvl="1">
@@ -10946,6 +9914,7 @@
               <a:rPr lang="en-US" dirty="0"/>
               <a:t>List ADT</a:t>
             </a:r>
+            <a:endParaRPr lang="en-US" dirty="0"/>
           </a:p>
           <a:p>
             <a:pPr lvl="1">
@@ -10956,6 +9925,7 @@
               <a:rPr lang="en-US" dirty="0"/>
               <a:t>Stack ADT</a:t>
             </a:r>
+            <a:endParaRPr lang="en-US" dirty="0"/>
           </a:p>
           <a:p>
             <a:pPr lvl="1">
@@ -10966,18 +9936,13 @@
               <a:rPr lang="en-US" dirty="0"/>
               <a:t>Queue ADT.</a:t>
             </a:r>
-          </a:p>
-        </p:txBody>
-      </p:sp>
-      <p:sp>
-        <p:nvSpPr>
-          <p:cNvPr id="6" name="Slide Number Placeholder 5">
-            <a:extLst>
-              <a:ext uri="{FF2B5EF4-FFF2-40B4-BE49-F238E27FC236}">
-                <a16:creationId xmlns:a16="http://schemas.microsoft.com/office/drawing/2014/main" xmlns="" id="{4C4393A1-B2B8-C246-7926-E17FA9626D12}"/>
-              </a:ext>
-            </a:extLst>
-          </p:cNvPr>
+            <a:endParaRPr lang="en-US" dirty="0"/>
+          </a:p>
+        </p:txBody>
+      </p:sp>
+      <p:sp>
+        <p:nvSpPr>
+          <p:cNvPr id="6" name="Slide Number Placeholder 5"/>
           <p:cNvSpPr>
             <a:spLocks noGrp="1"/>
           </p:cNvSpPr>
@@ -10992,8 +9957,6 @@
           <a:p>
             <a:fld id="{75B0C241-D0FA-41C4-806B-7A3C5377B352}" type="slidenum">
               <a:rPr lang="en-IN" smtClean="0"/>
-              <a:pPr/>
-              <a:t>17</a:t>
             </a:fld>
             <a:endParaRPr lang="en-IN"/>
           </a:p>
@@ -11008,7 +9971,7 @@
           <p:nvPr/>
         </p:nvPicPr>
         <p:blipFill>
-          <a:blip r:embed="rId2" cstate="print"/>
+          <a:blip r:embed="rId1" cstate="print"/>
           <a:stretch>
             <a:fillRect/>
           </a:stretch>
@@ -11024,11 +9987,6 @@
         </p:spPr>
       </p:pic>
     </p:spTree>
-    <p:extLst>
-      <p:ext uri="{BB962C8B-B14F-4D97-AF65-F5344CB8AC3E}">
-        <p14:creationId xmlns:p14="http://schemas.microsoft.com/office/powerpoint/2010/main" xmlns="" val="126927912"/>
-      </p:ext>
-    </p:extLst>
   </p:cSld>
   <p:clrMapOvr>
     <a:masterClrMapping/>
@@ -11055,13 +10013,7 @@
       </p:grpSpPr>
       <p:sp>
         <p:nvSpPr>
-          <p:cNvPr id="2" name="Title 1">
-            <a:extLst>
-              <a:ext uri="{FF2B5EF4-FFF2-40B4-BE49-F238E27FC236}">
-                <a16:creationId xmlns:a16="http://schemas.microsoft.com/office/drawing/2014/main" xmlns="" id="{79239230-419C-FF7E-3A34-68F2642E0F5D}"/>
-              </a:ext>
-            </a:extLst>
-          </p:cNvPr>
+          <p:cNvPr id="2" name="Title 1"/>
           <p:cNvSpPr>
             <a:spLocks noGrp="1"/>
           </p:cNvSpPr>
@@ -11082,18 +10034,13 @@
               <a:rPr lang="en-IN"/>
               <a:t>Array as ADT</a:t>
             </a:r>
-          </a:p>
-        </p:txBody>
-      </p:sp>
-      <p:sp>
-        <p:nvSpPr>
-          <p:cNvPr id="3" name="Content Placeholder 2">
-            <a:extLst>
-              <a:ext uri="{FF2B5EF4-FFF2-40B4-BE49-F238E27FC236}">
-                <a16:creationId xmlns:a16="http://schemas.microsoft.com/office/drawing/2014/main" xmlns="" id="{276E5826-E7DF-CEE0-61AE-14C8BC02C73C}"/>
-              </a:ext>
-            </a:extLst>
-          </p:cNvPr>
+            <a:endParaRPr lang="en-IN"/>
+          </a:p>
+        </p:txBody>
+      </p:sp>
+      <p:sp>
+        <p:nvSpPr>
+          <p:cNvPr id="3" name="Content Placeholder 2"/>
           <p:cNvSpPr>
             <a:spLocks noGrp="1"/>
           </p:cNvSpPr>
@@ -11116,6 +10063,7 @@
               <a:rPr lang="en-US" dirty="0"/>
               <a:t>ADT as a black box which </a:t>
             </a:r>
+            <a:endParaRPr lang="en-US" dirty="0"/>
           </a:p>
           <a:p>
             <a:pPr lvl="1">
@@ -11126,6 +10074,7 @@
               <a:rPr lang="en-US" dirty="0"/>
               <a:t>hides the inner structure and </a:t>
             </a:r>
+            <a:endParaRPr lang="en-US" dirty="0"/>
           </a:p>
           <a:p>
             <a:pPr lvl="1">
@@ -11136,6 +10085,7 @@
               <a:rPr lang="en-US" dirty="0"/>
               <a:t>design of the data type. </a:t>
             </a:r>
+            <a:endParaRPr lang="en-US" dirty="0"/>
           </a:p>
           <a:p>
             <a:pPr>
@@ -11146,6 +10096,7 @@
               <a:rPr lang="en-US" dirty="0"/>
               <a:t>Example</a:t>
             </a:r>
+            <a:endParaRPr lang="en-US" dirty="0"/>
           </a:p>
           <a:p>
             <a:pPr lvl="1">
@@ -11156,6 +10107,7 @@
               <a:rPr lang="en-US" dirty="0"/>
               <a:t>Set as ADT;</a:t>
             </a:r>
+            <a:endParaRPr lang="en-US" dirty="0"/>
           </a:p>
           <a:p>
             <a:pPr lvl="2"/>
@@ -11163,6 +10115,7 @@
               <a:rPr lang="en-US" altLang="en-US" dirty="0"/>
               <a:t>A set of elements</a:t>
             </a:r>
+            <a:endParaRPr lang="en-US" altLang="en-US" dirty="0"/>
           </a:p>
           <a:p>
             <a:pPr lvl="2"/>
@@ -11182,6 +10135,7 @@
               <a:rPr lang="en-US" altLang="en-US" i="1" dirty="0"/>
               <a:t>complement</a:t>
             </a:r>
+            <a:endParaRPr lang="en-US" altLang="en-US" i="1" dirty="0"/>
           </a:p>
           <a:p>
             <a:pPr lvl="1">
@@ -11192,6 +10146,7 @@
               <a:rPr lang="en-US" dirty="0"/>
               <a:t>Queue ADT.</a:t>
             </a:r>
+            <a:endParaRPr lang="en-US" dirty="0"/>
           </a:p>
           <a:p>
             <a:pPr lvl="2"/>
@@ -11199,6 +10154,7 @@
               <a:rPr lang="en-US" altLang="en-US" dirty="0"/>
               <a:t>A set of sequences of elements</a:t>
             </a:r>
+            <a:endParaRPr lang="en-US" altLang="en-US" dirty="0"/>
           </a:p>
           <a:p>
             <a:pPr lvl="2"/>
@@ -11218,6 +10174,7 @@
               <a:rPr lang="en-US" altLang="en-US" i="1" dirty="0"/>
               <a:t>estroy queue</a:t>
             </a:r>
+            <a:endParaRPr lang="en-US" altLang="en-US" i="1" dirty="0"/>
           </a:p>
           <a:p>
             <a:pPr lvl="1">
@@ -11228,6 +10185,7 @@
               <a:rPr lang="en-US" dirty="0"/>
               <a:t>List as ADT</a:t>
             </a:r>
+            <a:endParaRPr lang="en-US" dirty="0"/>
           </a:p>
           <a:p>
             <a:pPr lvl="1">
@@ -11238,6 +10196,7 @@
               <a:rPr lang="en-US" dirty="0"/>
               <a:t>Stack as ADT</a:t>
             </a:r>
+            <a:endParaRPr lang="en-US" dirty="0"/>
           </a:p>
           <a:p>
             <a:pPr>
@@ -11267,13 +10226,7 @@
       </p:sp>
       <p:sp>
         <p:nvSpPr>
-          <p:cNvPr id="6" name="Slide Number Placeholder 5">
-            <a:extLst>
-              <a:ext uri="{FF2B5EF4-FFF2-40B4-BE49-F238E27FC236}">
-                <a16:creationId xmlns:a16="http://schemas.microsoft.com/office/drawing/2014/main" xmlns="" id="{3406EAD1-547C-8A87-68BC-9F2BC1CE5B1C}"/>
-              </a:ext>
-            </a:extLst>
-          </p:cNvPr>
+          <p:cNvPr id="6" name="Slide Number Placeholder 5"/>
           <p:cNvSpPr>
             <a:spLocks noGrp="1"/>
           </p:cNvSpPr>
@@ -11288,8 +10241,6 @@
           <a:p>
             <a:fld id="{75B0C241-D0FA-41C4-806B-7A3C5377B352}" type="slidenum">
               <a:rPr lang="en-IN" smtClean="0"/>
-              <a:pPr/>
-              <a:t>18</a:t>
             </a:fld>
             <a:endParaRPr lang="en-IN"/>
           </a:p>
@@ -11304,7 +10255,7 @@
           <p:nvPr/>
         </p:nvPicPr>
         <p:blipFill>
-          <a:blip r:embed="rId2" cstate="print"/>
+          <a:blip r:embed="rId1" cstate="print"/>
           <a:stretch>
             <a:fillRect/>
           </a:stretch>
@@ -11320,11 +10271,6 @@
         </p:spPr>
       </p:pic>
     </p:spTree>
-    <p:extLst>
-      <p:ext uri="{BB962C8B-B14F-4D97-AF65-F5344CB8AC3E}">
-        <p14:creationId xmlns:p14="http://schemas.microsoft.com/office/powerpoint/2010/main" xmlns="" val="852379662"/>
-      </p:ext>
-    </p:extLst>
   </p:cSld>
   <p:clrMapOvr>
     <a:masterClrMapping/>
@@ -11351,13 +10297,7 @@
       </p:grpSpPr>
       <p:sp>
         <p:nvSpPr>
-          <p:cNvPr id="2" name="Title 1">
-            <a:extLst>
-              <a:ext uri="{FF2B5EF4-FFF2-40B4-BE49-F238E27FC236}">
-                <a16:creationId xmlns:a16="http://schemas.microsoft.com/office/drawing/2014/main" xmlns="" id="{2DFA9717-CCC7-6E91-3A48-4CF81EB3D28E}"/>
-              </a:ext>
-            </a:extLst>
-          </p:cNvPr>
+          <p:cNvPr id="2" name="Title 1"/>
           <p:cNvSpPr>
             <a:spLocks noGrp="1"/>
           </p:cNvSpPr>
@@ -11383,18 +10323,13 @@
               <a:rPr lang="en-IN" dirty="0"/>
               <a:t>Array as ADT</a:t>
             </a:r>
-          </a:p>
-        </p:txBody>
-      </p:sp>
-      <p:sp>
-        <p:nvSpPr>
-          <p:cNvPr id="3" name="Content Placeholder 2">
-            <a:extLst>
-              <a:ext uri="{FF2B5EF4-FFF2-40B4-BE49-F238E27FC236}">
-                <a16:creationId xmlns:a16="http://schemas.microsoft.com/office/drawing/2014/main" xmlns="" id="{CE1462F0-AD0D-7A50-B3A5-1504394D5227}"/>
-              </a:ext>
-            </a:extLst>
-          </p:cNvPr>
+            <a:endParaRPr lang="en-IN" dirty="0"/>
+          </a:p>
+        </p:txBody>
+      </p:sp>
+      <p:sp>
+        <p:nvSpPr>
+          <p:cNvPr id="3" name="Content Placeholder 2"/>
           <p:cNvSpPr>
             <a:spLocks noGrp="1"/>
           </p:cNvSpPr>
@@ -11422,6 +10357,7 @@
               <a:rPr lang="en-US" dirty="0"/>
               <a:t>Array-1D Array-finite ordered set of homogeneous element</a:t>
             </a:r>
+            <a:endParaRPr lang="en-US" dirty="0"/>
           </a:p>
           <a:p>
             <a:pPr lvl="1">
@@ -11432,6 +10368,7 @@
               <a:rPr lang="en-US" dirty="0"/>
               <a:t>Finite: specific numbers of elements in an array</a:t>
             </a:r>
+            <a:endParaRPr lang="en-US" dirty="0"/>
           </a:p>
           <a:p>
             <a:pPr lvl="1">
@@ -11466,6 +10403,7 @@
               <a:rPr lang="en-US" dirty="0"/>
               <a:t> ….</a:t>
             </a:r>
+            <a:endParaRPr lang="en-US" dirty="0"/>
           </a:p>
           <a:p>
             <a:pPr lvl="1">
@@ -11476,6 +10414,7 @@
               <a:rPr lang="en-US" dirty="0"/>
               <a:t>Homogeneous : Same of data</a:t>
             </a:r>
+            <a:endParaRPr lang="en-US" dirty="0"/>
           </a:p>
           <a:p>
             <a:pPr>
@@ -11486,6 +10425,7 @@
               <a:rPr lang="en-US" dirty="0"/>
               <a:t>Two basic operations to access an array:</a:t>
             </a:r>
+            <a:endParaRPr lang="en-US" dirty="0"/>
           </a:p>
           <a:p>
             <a:pPr lvl="1">
@@ -11533,6 +10473,7 @@
               <a:rPr lang="en-US" dirty="0"/>
               <a:t>, and element, return updated array</a:t>
             </a:r>
+            <a:endParaRPr lang="en-US" dirty="0"/>
           </a:p>
           <a:p>
             <a:pPr marL="457200" lvl="1" indent="0">
@@ -11550,6 +10491,7 @@
               <a:rPr lang="en-US" dirty="0"/>
               <a:t>]=x</a:t>
             </a:r>
+            <a:endParaRPr lang="en-US" dirty="0"/>
           </a:p>
           <a:p>
             <a:pPr>
@@ -11564,6 +10506,7 @@
               <a:rPr lang="en-US" b="1" i="1" dirty="0"/>
               <a:t>lower bound</a:t>
             </a:r>
+            <a:endParaRPr lang="en-US" b="1" i="1" dirty="0"/>
           </a:p>
           <a:p>
             <a:pPr>
@@ -11578,6 +10521,7 @@
               <a:rPr lang="en-US" b="1" i="1" dirty="0"/>
               <a:t>upper bound</a:t>
             </a:r>
+            <a:endParaRPr lang="en-US" b="1" i="1" dirty="0"/>
           </a:p>
           <a:p>
             <a:pPr>
@@ -11600,6 +10544,11 @@
               </a:rPr>
               <a:t>upper bound - lower bound +1</a:t>
             </a:r>
+            <a:endParaRPr lang="en-US" sz="2200" b="1" i="1" dirty="0">
+              <a:solidFill>
+                <a:srgbClr val="FF0000"/>
+              </a:solidFill>
+            </a:endParaRPr>
           </a:p>
           <a:p>
             <a:pPr lvl="1">
@@ -11614,6 +10563,11 @@
               </a:rPr>
               <a:t>C array is not changed during program’s execution</a:t>
             </a:r>
+            <a:endParaRPr lang="en-US" dirty="0">
+              <a:solidFill>
+                <a:srgbClr val="0070C0"/>
+              </a:solidFill>
+            </a:endParaRPr>
           </a:p>
           <a:p>
             <a:pPr lvl="1">
@@ -11628,18 +10582,17 @@
               </a:rPr>
               <a:t>Lower bound is fixed always zero and upper is fixed at time of program written</a:t>
             </a:r>
-          </a:p>
-        </p:txBody>
-      </p:sp>
-      <p:sp>
-        <p:nvSpPr>
-          <p:cNvPr id="6" name="Slide Number Placeholder 5">
-            <a:extLst>
-              <a:ext uri="{FF2B5EF4-FFF2-40B4-BE49-F238E27FC236}">
-                <a16:creationId xmlns:a16="http://schemas.microsoft.com/office/drawing/2014/main" xmlns="" id="{1104465A-779E-2BA4-5928-964FC3DF93F0}"/>
-              </a:ext>
-            </a:extLst>
-          </p:cNvPr>
+            <a:endParaRPr lang="en-US" dirty="0">
+              <a:solidFill>
+                <a:srgbClr val="0070C0"/>
+              </a:solidFill>
+            </a:endParaRPr>
+          </a:p>
+        </p:txBody>
+      </p:sp>
+      <p:sp>
+        <p:nvSpPr>
+          <p:cNvPr id="6" name="Slide Number Placeholder 5"/>
           <p:cNvSpPr>
             <a:spLocks noGrp="1"/>
           </p:cNvSpPr>
@@ -11654,8 +10607,6 @@
           <a:p>
             <a:fld id="{75B0C241-D0FA-41C4-806B-7A3C5377B352}" type="slidenum">
               <a:rPr lang="en-IN" smtClean="0"/>
-              <a:pPr/>
-              <a:t>19</a:t>
             </a:fld>
             <a:endParaRPr lang="en-IN"/>
           </a:p>
@@ -11670,7 +10621,7 @@
           <p:nvPr/>
         </p:nvPicPr>
         <p:blipFill>
-          <a:blip r:embed="rId2" cstate="print"/>
+          <a:blip r:embed="rId1" cstate="print"/>
           <a:stretch>
             <a:fillRect/>
           </a:stretch>
@@ -11686,11 +10637,6 @@
         </p:spPr>
       </p:pic>
     </p:spTree>
-    <p:extLst>
-      <p:ext uri="{BB962C8B-B14F-4D97-AF65-F5344CB8AC3E}">
-        <p14:creationId xmlns:p14="http://schemas.microsoft.com/office/powerpoint/2010/main" xmlns="" val="3832561470"/>
-      </p:ext>
-    </p:extLst>
   </p:cSld>
   <p:clrMapOvr>
     <a:masterClrMapping/>
@@ -11717,13 +10663,7 @@
       </p:grpSpPr>
       <p:sp>
         <p:nvSpPr>
-          <p:cNvPr id="2" name="Title 1">
-            <a:extLst>
-              <a:ext uri="{FF2B5EF4-FFF2-40B4-BE49-F238E27FC236}">
-                <a16:creationId xmlns:a16="http://schemas.microsoft.com/office/drawing/2014/main" xmlns="" id="{3BEF3C80-64E0-ED90-3DE2-3C02F3E53201}"/>
-              </a:ext>
-            </a:extLst>
-          </p:cNvPr>
+          <p:cNvPr id="2" name="Title 1"/>
           <p:cNvSpPr>
             <a:spLocks noGrp="1"/>
           </p:cNvSpPr>
@@ -11740,18 +10680,13 @@
               <a:rPr lang="en-IN" dirty="0"/>
               <a:t>Key Points : ADT</a:t>
             </a:r>
-          </a:p>
-        </p:txBody>
-      </p:sp>
-      <p:sp>
-        <p:nvSpPr>
-          <p:cNvPr id="3" name="Content Placeholder 2">
-            <a:extLst>
-              <a:ext uri="{FF2B5EF4-FFF2-40B4-BE49-F238E27FC236}">
-                <a16:creationId xmlns:a16="http://schemas.microsoft.com/office/drawing/2014/main" xmlns="" id="{3BDC4FCC-2334-DE4A-E4B8-B578AF759D2F}"/>
-              </a:ext>
-            </a:extLst>
-          </p:cNvPr>
+            <a:endParaRPr lang="en-IN" dirty="0"/>
+          </a:p>
+        </p:txBody>
+      </p:sp>
+      <p:sp>
+        <p:nvSpPr>
+          <p:cNvPr id="3" name="Content Placeholder 2"/>
           <p:cNvSpPr>
             <a:spLocks noGrp="1"/>
           </p:cNvSpPr>
@@ -11776,68 +10711,6 @@
               </a:rPr>
               <a:t>Data</a:t>
             </a:r>
-          </a:p>
-          <a:p>
-            <a:pPr>
-              <a:buFont typeface="Wingdings" panose="05000000000000000000" pitchFamily="2" charset="2"/>
-              <a:buChar char="§"/>
-            </a:pPr>
-            <a:r>
-              <a:rPr lang="en-US" dirty="0">
-                <a:solidFill>
-                  <a:sysClr val="windowText" lastClr="000000"/>
-                </a:solidFill>
-              </a:rPr>
-              <a:t>Data Type</a:t>
-            </a:r>
-          </a:p>
-          <a:p>
-            <a:pPr>
-              <a:buFont typeface="Wingdings" panose="05000000000000000000" pitchFamily="2" charset="2"/>
-              <a:buChar char="§"/>
-            </a:pPr>
-            <a:r>
-              <a:rPr lang="en-US" dirty="0">
-                <a:solidFill>
-                  <a:sysClr val="windowText" lastClr="000000"/>
-                </a:solidFill>
-              </a:rPr>
-              <a:t>Data Structure</a:t>
-            </a:r>
-          </a:p>
-          <a:p>
-            <a:pPr>
-              <a:buFont typeface="Wingdings" panose="05000000000000000000" pitchFamily="2" charset="2"/>
-              <a:buChar char="§"/>
-            </a:pPr>
-            <a:r>
-              <a:rPr lang="en-US" dirty="0">
-                <a:solidFill>
-                  <a:sysClr val="windowText" lastClr="000000"/>
-                </a:solidFill>
-              </a:rPr>
-              <a:t>Abstract Data Types</a:t>
-            </a:r>
-          </a:p>
-          <a:p>
-            <a:pPr>
-              <a:buFont typeface="Wingdings" panose="05000000000000000000" pitchFamily="2" charset="2"/>
-              <a:buChar char="§"/>
-            </a:pPr>
-            <a:r>
-              <a:rPr lang="en-US" dirty="0">
-                <a:solidFill>
-                  <a:sysClr val="windowText" lastClr="000000"/>
-                </a:solidFill>
-              </a:rPr>
-              <a:t>Realization of Data Types</a:t>
-            </a:r>
-          </a:p>
-          <a:p>
-            <a:pPr>
-              <a:buFont typeface="Wingdings" panose="05000000000000000000" pitchFamily="2" charset="2"/>
-              <a:buChar char="§"/>
-            </a:pPr>
             <a:endParaRPr lang="en-US" dirty="0">
               <a:solidFill>
                 <a:sysClr val="windowText" lastClr="000000"/>
@@ -11849,6 +10722,14 @@
               <a:buFont typeface="Wingdings" panose="05000000000000000000" pitchFamily="2" charset="2"/>
               <a:buChar char="§"/>
             </a:pPr>
+            <a:r>
+              <a:rPr lang="en-US" dirty="0">
+                <a:solidFill>
+                  <a:sysClr val="windowText" lastClr="000000"/>
+                </a:solidFill>
+              </a:rPr>
+              <a:t>Data Type</a:t>
+            </a:r>
             <a:endParaRPr lang="en-US" dirty="0">
               <a:solidFill>
                 <a:sysClr val="windowText" lastClr="000000"/>
@@ -11860,6 +10741,14 @@
               <a:buFont typeface="Wingdings" panose="05000000000000000000" pitchFamily="2" charset="2"/>
               <a:buChar char="§"/>
             </a:pPr>
+            <a:r>
+              <a:rPr lang="en-US" dirty="0">
+                <a:solidFill>
+                  <a:sysClr val="windowText" lastClr="000000"/>
+                </a:solidFill>
+              </a:rPr>
+              <a:t>Data Structure</a:t>
+            </a:r>
             <a:endParaRPr lang="en-US" dirty="0">
               <a:solidFill>
                 <a:sysClr val="windowText" lastClr="000000"/>
@@ -11867,19 +10756,84 @@
             </a:endParaRPr>
           </a:p>
           <a:p>
+            <a:pPr>
+              <a:buFont typeface="Wingdings" panose="05000000000000000000" pitchFamily="2" charset="2"/>
+              <a:buChar char="§"/>
+            </a:pPr>
+            <a:r>
+              <a:rPr lang="en-US" dirty="0">
+                <a:solidFill>
+                  <a:sysClr val="windowText" lastClr="000000"/>
+                </a:solidFill>
+              </a:rPr>
+              <a:t>Abstract Data Types</a:t>
+            </a:r>
+            <a:endParaRPr lang="en-US" dirty="0">
+              <a:solidFill>
+                <a:sysClr val="windowText" lastClr="000000"/>
+              </a:solidFill>
+            </a:endParaRPr>
+          </a:p>
+          <a:p>
+            <a:pPr>
+              <a:buFont typeface="Wingdings" panose="05000000000000000000" pitchFamily="2" charset="2"/>
+              <a:buChar char="§"/>
+            </a:pPr>
+            <a:r>
+              <a:rPr lang="en-US" dirty="0">
+                <a:solidFill>
+                  <a:sysClr val="windowText" lastClr="000000"/>
+                </a:solidFill>
+              </a:rPr>
+              <a:t>Realization of Data Types</a:t>
+            </a:r>
+            <a:endParaRPr lang="en-US" dirty="0">
+              <a:solidFill>
+                <a:sysClr val="windowText" lastClr="000000"/>
+              </a:solidFill>
+            </a:endParaRPr>
+          </a:p>
+          <a:p>
+            <a:pPr>
+              <a:buFont typeface="Wingdings" panose="05000000000000000000" pitchFamily="2" charset="2"/>
+              <a:buChar char="§"/>
+            </a:pPr>
+            <a:endParaRPr lang="en-US" dirty="0">
+              <a:solidFill>
+                <a:sysClr val="windowText" lastClr="000000"/>
+              </a:solidFill>
+            </a:endParaRPr>
+          </a:p>
+          <a:p>
+            <a:pPr>
+              <a:buFont typeface="Wingdings" panose="05000000000000000000" pitchFamily="2" charset="2"/>
+              <a:buChar char="§"/>
+            </a:pPr>
+            <a:endParaRPr lang="en-US" dirty="0">
+              <a:solidFill>
+                <a:sysClr val="windowText" lastClr="000000"/>
+              </a:solidFill>
+            </a:endParaRPr>
+          </a:p>
+          <a:p>
+            <a:pPr>
+              <a:buFont typeface="Wingdings" panose="05000000000000000000" pitchFamily="2" charset="2"/>
+              <a:buChar char="§"/>
+            </a:pPr>
+            <a:endParaRPr lang="en-US" dirty="0">
+              <a:solidFill>
+                <a:sysClr val="windowText" lastClr="000000"/>
+              </a:solidFill>
+            </a:endParaRPr>
+          </a:p>
+          <a:p>
             <a:endParaRPr lang="en-IN" dirty="0"/>
           </a:p>
         </p:txBody>
       </p:sp>
       <p:sp>
         <p:nvSpPr>
-          <p:cNvPr id="6" name="Slide Number Placeholder 5">
-            <a:extLst>
-              <a:ext uri="{FF2B5EF4-FFF2-40B4-BE49-F238E27FC236}">
-                <a16:creationId xmlns:a16="http://schemas.microsoft.com/office/drawing/2014/main" xmlns="" id="{3B57563C-1906-DA9A-D762-08C986E8F026}"/>
-              </a:ext>
-            </a:extLst>
-          </p:cNvPr>
+          <p:cNvPr id="6" name="Slide Number Placeholder 5"/>
           <p:cNvSpPr>
             <a:spLocks noGrp="1"/>
           </p:cNvSpPr>
@@ -11894,8 +10848,6 @@
           <a:p>
             <a:fld id="{75B0C241-D0FA-41C4-806B-7A3C5377B352}" type="slidenum">
               <a:rPr lang="en-IN" smtClean="0"/>
-              <a:pPr/>
-              <a:t>2</a:t>
             </a:fld>
             <a:endParaRPr lang="en-IN"/>
           </a:p>
@@ -11910,7 +10862,7 @@
           <p:nvPr/>
         </p:nvPicPr>
         <p:blipFill>
-          <a:blip r:embed="rId2" cstate="print"/>
+          <a:blip r:embed="rId1" cstate="print"/>
           <a:stretch>
             <a:fillRect/>
           </a:stretch>
@@ -11926,11 +10878,6 @@
         </p:spPr>
       </p:pic>
     </p:spTree>
-    <p:extLst>
-      <p:ext uri="{BB962C8B-B14F-4D97-AF65-F5344CB8AC3E}">
-        <p14:creationId xmlns:p14="http://schemas.microsoft.com/office/powerpoint/2010/main" xmlns="" val="3504181243"/>
-      </p:ext>
-    </p:extLst>
   </p:cSld>
   <p:clrMapOvr>
     <a:masterClrMapping/>
@@ -11957,13 +10904,7 @@
       </p:grpSpPr>
       <p:sp>
         <p:nvSpPr>
-          <p:cNvPr id="2" name="Title 1">
-            <a:extLst>
-              <a:ext uri="{FF2B5EF4-FFF2-40B4-BE49-F238E27FC236}">
-                <a16:creationId xmlns:a16="http://schemas.microsoft.com/office/drawing/2014/main" xmlns="" id="{32DE05E5-C45B-EADA-6F32-1AAE83BB5151}"/>
-              </a:ext>
-            </a:extLst>
-          </p:cNvPr>
+          <p:cNvPr id="2" name="Title 1"/>
           <p:cNvSpPr>
             <a:spLocks noGrp="1"/>
           </p:cNvSpPr>
@@ -11984,18 +10925,13 @@
               <a:rPr lang="en-IN" dirty="0"/>
               <a:t>Array as ADT</a:t>
             </a:r>
-          </a:p>
-        </p:txBody>
-      </p:sp>
-      <p:sp>
-        <p:nvSpPr>
-          <p:cNvPr id="3" name="Content Placeholder 2">
-            <a:extLst>
-              <a:ext uri="{FF2B5EF4-FFF2-40B4-BE49-F238E27FC236}">
-                <a16:creationId xmlns:a16="http://schemas.microsoft.com/office/drawing/2014/main" xmlns="" id="{1F94D4D2-B3D7-89D0-DDCC-FFBB0B16FAFD}"/>
-              </a:ext>
-            </a:extLst>
-          </p:cNvPr>
+            <a:endParaRPr lang="en-IN" dirty="0"/>
+          </a:p>
+        </p:txBody>
+      </p:sp>
+      <p:sp>
+        <p:nvSpPr>
+          <p:cNvPr id="3" name="Content Placeholder 2"/>
           <p:cNvSpPr>
             <a:spLocks noGrp="1"/>
           </p:cNvSpPr>
@@ -12027,6 +10963,11 @@
               </a:rPr>
               <a:t>Array-1D </a:t>
             </a:r>
+            <a:endParaRPr lang="en-US" dirty="0">
+              <a:solidFill>
+                <a:srgbClr val="00B050"/>
+              </a:solidFill>
+            </a:endParaRPr>
           </a:p>
           <a:p>
             <a:pPr>
@@ -12037,6 +10978,7 @@
               <a:rPr lang="en-US" dirty="0"/>
               <a:t>Data: Array-finite ordered set of homogeneous element</a:t>
             </a:r>
+            <a:endParaRPr lang="en-US" dirty="0"/>
           </a:p>
           <a:p>
             <a:pPr lvl="1">
@@ -12047,6 +10989,7 @@
               <a:rPr lang="en-US" dirty="0"/>
               <a:t>Finite: specific numbers of elements in an array</a:t>
             </a:r>
+            <a:endParaRPr lang="en-US" dirty="0"/>
           </a:p>
           <a:p>
             <a:pPr lvl="1">
@@ -12081,6 +11024,7 @@
               <a:rPr lang="en-US" dirty="0"/>
               <a:t> ….</a:t>
             </a:r>
+            <a:endParaRPr lang="en-US" dirty="0"/>
           </a:p>
           <a:p>
             <a:pPr lvl="1">
@@ -12091,6 +11035,7 @@
               <a:rPr lang="en-US" dirty="0"/>
               <a:t>Homogeneous : Same of data</a:t>
             </a:r>
+            <a:endParaRPr lang="en-US" dirty="0"/>
           </a:p>
           <a:p>
             <a:pPr>
@@ -12109,6 +11054,7 @@
               <a:rPr lang="en-US" dirty="0"/>
               <a:t>:</a:t>
             </a:r>
+            <a:endParaRPr lang="en-US" dirty="0"/>
           </a:p>
           <a:p>
             <a:pPr lvl="1">
@@ -12119,6 +11065,7 @@
               <a:rPr lang="en-US" dirty="0"/>
               <a:t>Extract</a:t>
             </a:r>
+            <a:endParaRPr lang="en-US" dirty="0"/>
           </a:p>
           <a:p>
             <a:pPr lvl="1">
@@ -12129,6 +11076,7 @@
               <a:rPr lang="en-US" dirty="0"/>
               <a:t>Store</a:t>
             </a:r>
+            <a:endParaRPr lang="en-US" dirty="0"/>
           </a:p>
           <a:p>
             <a:pPr lvl="1">
@@ -12139,6 +11087,7 @@
               <a:rPr lang="en-US" dirty="0"/>
               <a:t>Delete an element</a:t>
             </a:r>
+            <a:endParaRPr lang="en-US" dirty="0"/>
           </a:p>
           <a:p>
             <a:pPr lvl="1">
@@ -12149,6 +11098,7 @@
               <a:rPr lang="en-US" dirty="0"/>
               <a:t>Insert an element</a:t>
             </a:r>
+            <a:endParaRPr lang="en-US" dirty="0"/>
           </a:p>
           <a:p>
             <a:pPr lvl="1">
@@ -12159,6 +11109,7 @@
               <a:rPr lang="en-US" dirty="0"/>
               <a:t>Display</a:t>
             </a:r>
+            <a:endParaRPr lang="en-US" dirty="0"/>
           </a:p>
           <a:p>
             <a:pPr lvl="1">
@@ -12169,6 +11120,7 @@
               <a:rPr lang="en-US" dirty="0"/>
               <a:t>Search</a:t>
             </a:r>
+            <a:endParaRPr lang="en-US" dirty="0"/>
           </a:p>
           <a:p>
             <a:pPr lvl="1">
@@ -12179,6 +11131,7 @@
               <a:rPr lang="en-US" dirty="0"/>
               <a:t>Sort</a:t>
             </a:r>
+            <a:endParaRPr lang="en-US" dirty="0"/>
           </a:p>
           <a:p>
             <a:pPr lvl="1">
@@ -12189,6 +11142,7 @@
               <a:rPr lang="en-US" dirty="0"/>
               <a:t>Display reverse array</a:t>
             </a:r>
+            <a:endParaRPr lang="en-US" dirty="0"/>
           </a:p>
           <a:p>
             <a:pPr lvl="1">
@@ -12199,6 +11153,7 @@
               <a:rPr lang="en-US" dirty="0"/>
               <a:t>Merge two arrays</a:t>
             </a:r>
+            <a:endParaRPr lang="en-US" dirty="0"/>
           </a:p>
           <a:p>
             <a:pPr lvl="1">
@@ -12209,18 +11164,13 @@
               <a:rPr lang="en-US" dirty="0"/>
               <a:t>Length of array</a:t>
             </a:r>
-          </a:p>
-        </p:txBody>
-      </p:sp>
-      <p:sp>
-        <p:nvSpPr>
-          <p:cNvPr id="6" name="Slide Number Placeholder 5">
-            <a:extLst>
-              <a:ext uri="{FF2B5EF4-FFF2-40B4-BE49-F238E27FC236}">
-                <a16:creationId xmlns:a16="http://schemas.microsoft.com/office/drawing/2014/main" xmlns="" id="{5C49D63B-7869-A6C5-4C8D-E35C11357AB5}"/>
-              </a:ext>
-            </a:extLst>
-          </p:cNvPr>
+            <a:endParaRPr lang="en-US" dirty="0"/>
+          </a:p>
+        </p:txBody>
+      </p:sp>
+      <p:sp>
+        <p:nvSpPr>
+          <p:cNvPr id="6" name="Slide Number Placeholder 5"/>
           <p:cNvSpPr>
             <a:spLocks noGrp="1"/>
           </p:cNvSpPr>
@@ -12235,8 +11185,6 @@
           <a:p>
             <a:fld id="{75B0C241-D0FA-41C4-806B-7A3C5377B352}" type="slidenum">
               <a:rPr lang="en-IN" smtClean="0"/>
-              <a:pPr/>
-              <a:t>20</a:t>
             </a:fld>
             <a:endParaRPr lang="en-IN"/>
           </a:p>
@@ -12251,7 +11199,7 @@
           <p:nvPr/>
         </p:nvPicPr>
         <p:blipFill>
-          <a:blip r:embed="rId2" cstate="print"/>
+          <a:blip r:embed="rId1" cstate="print"/>
           <a:stretch>
             <a:fillRect/>
           </a:stretch>
@@ -12267,11 +11215,6 @@
         </p:spPr>
       </p:pic>
     </p:spTree>
-    <p:extLst>
-      <p:ext uri="{BB962C8B-B14F-4D97-AF65-F5344CB8AC3E}">
-        <p14:creationId xmlns:p14="http://schemas.microsoft.com/office/powerpoint/2010/main" xmlns="" val="247950917"/>
-      </p:ext>
-    </p:extLst>
   </p:cSld>
   <p:clrMapOvr>
     <a:masterClrMapping/>
@@ -12298,13 +11241,7 @@
       </p:grpSpPr>
       <p:sp>
         <p:nvSpPr>
-          <p:cNvPr id="2" name="Title 1">
-            <a:extLst>
-              <a:ext uri="{FF2B5EF4-FFF2-40B4-BE49-F238E27FC236}">
-                <a16:creationId xmlns:a16="http://schemas.microsoft.com/office/drawing/2014/main" xmlns="" id="{76E1F7E3-5BFD-7C17-E74A-EB933BA3CAF8}"/>
-              </a:ext>
-            </a:extLst>
-          </p:cNvPr>
+          <p:cNvPr id="2" name="Title 1"/>
           <p:cNvSpPr>
             <a:spLocks noGrp="1"/>
           </p:cNvSpPr>
@@ -12325,18 +11262,13 @@
               <a:rPr lang="en-IN" dirty="0"/>
               <a:t>List as ADT</a:t>
             </a:r>
-          </a:p>
-        </p:txBody>
-      </p:sp>
-      <p:sp>
-        <p:nvSpPr>
-          <p:cNvPr id="3" name="Content Placeholder 2">
-            <a:extLst>
-              <a:ext uri="{FF2B5EF4-FFF2-40B4-BE49-F238E27FC236}">
-                <a16:creationId xmlns:a16="http://schemas.microsoft.com/office/drawing/2014/main" xmlns="" id="{9E0F60BD-D074-A7B0-59B4-DB4C8FA69E97}"/>
-              </a:ext>
-            </a:extLst>
-          </p:cNvPr>
+            <a:endParaRPr lang="en-IN" dirty="0"/>
+          </a:p>
+        </p:txBody>
+      </p:sp>
+      <p:sp>
+        <p:nvSpPr>
+          <p:cNvPr id="3" name="Content Placeholder 2"/>
           <p:cNvSpPr>
             <a:spLocks noGrp="1"/>
           </p:cNvSpPr>
@@ -12369,6 +11301,7 @@
               <a:rPr lang="en-US" dirty="0"/>
               <a:t>contains elements of the same type arranged in sequential order.</a:t>
             </a:r>
+            <a:endParaRPr lang="en-US" dirty="0"/>
           </a:p>
           <a:p>
             <a:pPr lvl="1">
@@ -12379,6 +11312,7 @@
               <a:rPr lang="en-US" altLang="en-US" dirty="0"/>
               <a:t>A sequence of zero or more elements</a:t>
             </a:r>
+            <a:endParaRPr lang="en-US" altLang="en-US" dirty="0"/>
           </a:p>
           <a:p>
             <a:pPr lvl="1">
@@ -12389,6 +11323,7 @@
               <a:rPr lang="en-US" altLang="en-US" dirty="0"/>
               <a:t>Example: A1, A2, A3, …… An</a:t>
             </a:r>
+            <a:endParaRPr lang="en-US" altLang="en-US" dirty="0"/>
           </a:p>
           <a:p>
             <a:pPr>
@@ -12399,6 +11334,7 @@
               <a:rPr lang="en-US" altLang="en-US" dirty="0"/>
               <a:t>Rules: </a:t>
             </a:r>
+            <a:endParaRPr lang="en-US" altLang="en-US" dirty="0"/>
           </a:p>
           <a:p>
             <a:pPr lvl="1">
@@ -12409,6 +11345,7 @@
               <a:rPr lang="en-US" altLang="en-US" dirty="0"/>
               <a:t>Size/ length of the list: n</a:t>
             </a:r>
+            <a:endParaRPr lang="en-US" altLang="en-US" dirty="0"/>
           </a:p>
           <a:p>
             <a:pPr lvl="1">
@@ -12419,6 +11356,7 @@
               <a:rPr lang="en-US" altLang="en-US" dirty="0"/>
               <a:t>A1: first element</a:t>
             </a:r>
+            <a:endParaRPr lang="en-US" altLang="en-US" dirty="0"/>
           </a:p>
           <a:p>
             <a:pPr lvl="1">
@@ -12429,6 +11367,7 @@
               <a:rPr lang="en-US" altLang="en-US" dirty="0"/>
               <a:t>An: last element</a:t>
             </a:r>
+            <a:endParaRPr lang="en-US" altLang="en-US" dirty="0"/>
           </a:p>
           <a:p>
             <a:pPr lvl="1">
@@ -12439,6 +11378,7 @@
               <a:rPr lang="en-US" altLang="en-US" dirty="0"/>
               <a:t>Ai: element at position I</a:t>
             </a:r>
+            <a:endParaRPr lang="en-US" altLang="en-US" dirty="0"/>
           </a:p>
           <a:p>
             <a:pPr lvl="1">
@@ -12449,6 +11389,7 @@
               <a:rPr lang="en-US" altLang="en-US" dirty="0"/>
               <a:t>Linearly ordered: Ai have Ai+1 successor and Ai-1 as predecessor</a:t>
             </a:r>
+            <a:endParaRPr lang="en-US" altLang="en-US" dirty="0"/>
           </a:p>
           <a:p>
             <a:pPr lvl="1">
@@ -12464,13 +11405,7 @@
       </p:sp>
       <p:sp>
         <p:nvSpPr>
-          <p:cNvPr id="6" name="Slide Number Placeholder 5">
-            <a:extLst>
-              <a:ext uri="{FF2B5EF4-FFF2-40B4-BE49-F238E27FC236}">
-                <a16:creationId xmlns:a16="http://schemas.microsoft.com/office/drawing/2014/main" xmlns="" id="{B1D267EC-01E2-5B7C-17A9-7F863F971163}"/>
-              </a:ext>
-            </a:extLst>
-          </p:cNvPr>
+          <p:cNvPr id="6" name="Slide Number Placeholder 5"/>
           <p:cNvSpPr>
             <a:spLocks noGrp="1"/>
           </p:cNvSpPr>
@@ -12485,8 +11420,6 @@
           <a:p>
             <a:fld id="{75B0C241-D0FA-41C4-806B-7A3C5377B352}" type="slidenum">
               <a:rPr lang="en-IN" smtClean="0"/>
-              <a:pPr/>
-              <a:t>21</a:t>
             </a:fld>
             <a:endParaRPr lang="en-IN"/>
           </a:p>
@@ -12501,7 +11434,7 @@
           <p:nvPr/>
         </p:nvPicPr>
         <p:blipFill>
-          <a:blip r:embed="rId2" cstate="print"/>
+          <a:blip r:embed="rId1" cstate="print"/>
           <a:stretch>
             <a:fillRect/>
           </a:stretch>
@@ -12517,11 +11450,6 @@
         </p:spPr>
       </p:pic>
     </p:spTree>
-    <p:extLst>
-      <p:ext uri="{BB962C8B-B14F-4D97-AF65-F5344CB8AC3E}">
-        <p14:creationId xmlns:p14="http://schemas.microsoft.com/office/powerpoint/2010/main" xmlns="" val="3431579122"/>
-      </p:ext>
-    </p:extLst>
   </p:cSld>
   <p:clrMapOvr>
     <a:masterClrMapping/>
@@ -12548,13 +11476,7 @@
       </p:grpSpPr>
       <p:sp>
         <p:nvSpPr>
-          <p:cNvPr id="2" name="Title 1">
-            <a:extLst>
-              <a:ext uri="{FF2B5EF4-FFF2-40B4-BE49-F238E27FC236}">
-                <a16:creationId xmlns:a16="http://schemas.microsoft.com/office/drawing/2014/main" xmlns="" id="{2018CF39-C971-6C27-62B9-F5CF99F14350}"/>
-              </a:ext>
-            </a:extLst>
-          </p:cNvPr>
+          <p:cNvPr id="2" name="Title 1"/>
           <p:cNvSpPr>
             <a:spLocks noGrp="1"/>
           </p:cNvSpPr>
@@ -12577,13 +11499,7 @@
       </p:sp>
       <p:sp>
         <p:nvSpPr>
-          <p:cNvPr id="3" name="Content Placeholder 2">
-            <a:extLst>
-              <a:ext uri="{FF2B5EF4-FFF2-40B4-BE49-F238E27FC236}">
-                <a16:creationId xmlns:a16="http://schemas.microsoft.com/office/drawing/2014/main" xmlns="" id="{D4A05F24-DCC7-8259-A09C-F7D89C2E5C8F}"/>
-              </a:ext>
-            </a:extLst>
-          </p:cNvPr>
+          <p:cNvPr id="3" name="Content Placeholder 2"/>
           <p:cNvSpPr>
             <a:spLocks noGrp="1"/>
           </p:cNvSpPr>
@@ -12604,6 +11520,7 @@
               <a:rPr lang="en-US" altLang="en-US" dirty="0"/>
               <a:t>Operations on List</a:t>
             </a:r>
+            <a:endParaRPr lang="en-US" altLang="en-US" dirty="0"/>
           </a:p>
           <a:p>
             <a:pPr lvl="1">
@@ -12622,6 +11539,7 @@
               <a:rPr lang="en-US" dirty="0"/>
               <a:t>– print the list / display the elements</a:t>
             </a:r>
+            <a:endParaRPr lang="en-US" dirty="0"/>
           </a:p>
           <a:p>
             <a:pPr lvl="1">
@@ -12640,6 +11558,7 @@
               <a:rPr lang="en-US" dirty="0"/>
               <a:t>– Insert an element at any position of the list.</a:t>
             </a:r>
+            <a:endParaRPr lang="en-US" dirty="0"/>
           </a:p>
           <a:p>
             <a:pPr lvl="1">
@@ -12650,6 +11569,7 @@
               <a:rPr lang="en-US" dirty="0"/>
               <a:t>Remove</a:t>
             </a:r>
+            <a:endParaRPr lang="en-US" dirty="0"/>
           </a:p>
           <a:p>
             <a:pPr lvl="2">
@@ -12676,6 +11596,7 @@
               <a:rPr lang="en-US" dirty="0"/>
               <a:t>– Remove the first occurrence of any element from a non-empty list.</a:t>
             </a:r>
+            <a:endParaRPr lang="en-US" dirty="0"/>
           </a:p>
           <a:p>
             <a:pPr lvl="2">
@@ -12702,6 +11623,7 @@
               <a:rPr lang="en-US" dirty="0"/>
               <a:t>– Remove the element at a specified location from a non-empty list.</a:t>
             </a:r>
+            <a:endParaRPr lang="en-US" dirty="0"/>
           </a:p>
           <a:p>
             <a:pPr lvl="1">
@@ -12720,6 +11642,7 @@
               <a:rPr lang="en-US" dirty="0"/>
               <a:t>– Replace an element at any position by another element.</a:t>
             </a:r>
+            <a:endParaRPr lang="en-US" dirty="0"/>
           </a:p>
           <a:p>
             <a:pPr lvl="1">
@@ -12738,6 +11661,7 @@
               <a:rPr lang="en-US" dirty="0"/>
               <a:t> – Return the number of elements in the list.</a:t>
             </a:r>
+            <a:endParaRPr lang="en-US" dirty="0"/>
           </a:p>
           <a:p>
             <a:pPr lvl="1">
@@ -12764,6 +11688,7 @@
               <a:rPr lang="en-US" dirty="0"/>
               <a:t>– Return true if the list is empty, otherwise return false.</a:t>
             </a:r>
+            <a:endParaRPr lang="en-US" dirty="0"/>
           </a:p>
           <a:p>
             <a:pPr lvl="1">
@@ -12790,18 +11715,13 @@
               <a:rPr lang="en-US" dirty="0"/>
               <a:t>– Return true if the list is full, otherwise return false.</a:t>
             </a:r>
-          </a:p>
-        </p:txBody>
-      </p:sp>
-      <p:sp>
-        <p:nvSpPr>
-          <p:cNvPr id="6" name="Slide Number Placeholder 5">
-            <a:extLst>
-              <a:ext uri="{FF2B5EF4-FFF2-40B4-BE49-F238E27FC236}">
-                <a16:creationId xmlns:a16="http://schemas.microsoft.com/office/drawing/2014/main" xmlns="" id="{CCBEAE52-3904-F967-8634-A166CBA09840}"/>
-              </a:ext>
-            </a:extLst>
-          </p:cNvPr>
+            <a:endParaRPr lang="en-US" dirty="0"/>
+          </a:p>
+        </p:txBody>
+      </p:sp>
+      <p:sp>
+        <p:nvSpPr>
+          <p:cNvPr id="6" name="Slide Number Placeholder 5"/>
           <p:cNvSpPr>
             <a:spLocks noGrp="1"/>
           </p:cNvSpPr>
@@ -12816,8 +11736,6 @@
           <a:p>
             <a:fld id="{75B0C241-D0FA-41C4-806B-7A3C5377B352}" type="slidenum">
               <a:rPr lang="en-IN" smtClean="0"/>
-              <a:pPr/>
-              <a:t>22</a:t>
             </a:fld>
             <a:endParaRPr lang="en-IN"/>
           </a:p>
@@ -12832,7 +11750,7 @@
           <p:nvPr/>
         </p:nvPicPr>
         <p:blipFill>
-          <a:blip r:embed="rId2" cstate="print"/>
+          <a:blip r:embed="rId1" cstate="print"/>
           <a:stretch>
             <a:fillRect/>
           </a:stretch>
@@ -12848,11 +11766,6 @@
         </p:spPr>
       </p:pic>
     </p:spTree>
-    <p:extLst>
-      <p:ext uri="{BB962C8B-B14F-4D97-AF65-F5344CB8AC3E}">
-        <p14:creationId xmlns:p14="http://schemas.microsoft.com/office/powerpoint/2010/main" xmlns="" val="497140874"/>
-      </p:ext>
-    </p:extLst>
   </p:cSld>
   <p:clrMapOvr>
     <a:masterClrMapping/>
@@ -12879,13 +11792,7 @@
       </p:grpSpPr>
       <p:sp>
         <p:nvSpPr>
-          <p:cNvPr id="2" name="Title 1">
-            <a:extLst>
-              <a:ext uri="{FF2B5EF4-FFF2-40B4-BE49-F238E27FC236}">
-                <a16:creationId xmlns:a16="http://schemas.microsoft.com/office/drawing/2014/main" xmlns="" id="{A72587CE-FFE2-008F-5F53-3982A9DBBE06}"/>
-              </a:ext>
-            </a:extLst>
-          </p:cNvPr>
+          <p:cNvPr id="2" name="Title 1"/>
           <p:cNvSpPr>
             <a:spLocks noGrp="1"/>
           </p:cNvSpPr>
@@ -12902,18 +11809,13 @@
               <a:rPr lang="en-IN" dirty="0"/>
               <a:t>ADT: Implementation</a:t>
             </a:r>
-          </a:p>
-        </p:txBody>
-      </p:sp>
-      <p:sp>
-        <p:nvSpPr>
-          <p:cNvPr id="3" name="Content Placeholder 2">
-            <a:extLst>
-              <a:ext uri="{FF2B5EF4-FFF2-40B4-BE49-F238E27FC236}">
-                <a16:creationId xmlns:a16="http://schemas.microsoft.com/office/drawing/2014/main" xmlns="" id="{E21EB152-A5E9-696D-6EED-0E63BC5B9B11}"/>
-              </a:ext>
-            </a:extLst>
-          </p:cNvPr>
+            <a:endParaRPr lang="en-IN" dirty="0"/>
+          </a:p>
+        </p:txBody>
+      </p:sp>
+      <p:sp>
+        <p:nvSpPr>
+          <p:cNvPr id="3" name="Content Placeholder 2"/>
           <p:cNvSpPr>
             <a:spLocks noGrp="1"/>
           </p:cNvSpPr>
@@ -12934,6 +11836,7 @@
               <a:rPr lang="en-US" altLang="en-US" dirty="0"/>
               <a:t>Choose a data structure to represent the ADT</a:t>
             </a:r>
+            <a:endParaRPr lang="en-US" altLang="en-US" dirty="0"/>
           </a:p>
           <a:p>
             <a:pPr lvl="1">
@@ -12944,6 +11847,7 @@
               <a:rPr lang="en-US" altLang="en-US" dirty="0"/>
               <a:t>E.g. arrays, records, etc.</a:t>
             </a:r>
+            <a:endParaRPr lang="en-US" altLang="en-US" dirty="0"/>
           </a:p>
           <a:p>
             <a:pPr>
@@ -12954,6 +11858,7 @@
               <a:rPr lang="en-US" altLang="en-US" dirty="0"/>
               <a:t>Each operation associated with the ADT is implemented by one or more subroutines</a:t>
             </a:r>
+            <a:endParaRPr lang="en-US" altLang="en-US" dirty="0"/>
           </a:p>
           <a:p>
             <a:pPr>
@@ -12964,6 +11869,7 @@
               <a:rPr lang="en-US" altLang="en-US" dirty="0"/>
               <a:t>Two standard implementations for the list ADT</a:t>
             </a:r>
+            <a:endParaRPr lang="en-US" altLang="en-US" dirty="0"/>
           </a:p>
           <a:p>
             <a:pPr lvl="1">
@@ -12974,6 +11880,7 @@
               <a:rPr lang="en-US" altLang="en-US" dirty="0"/>
               <a:t>Array-based:</a:t>
             </a:r>
+            <a:endParaRPr lang="en-US" altLang="en-US" dirty="0"/>
           </a:p>
           <a:p>
             <a:pPr lvl="2">
@@ -12984,6 +11891,7 @@
               <a:rPr lang="en-US" altLang="en-US" dirty="0"/>
               <a:t>Elements are stored in contiguous array positions</a:t>
             </a:r>
+            <a:endParaRPr lang="en-US" altLang="en-US" dirty="0"/>
           </a:p>
           <a:p>
             <a:pPr lvl="2">
@@ -12994,6 +11902,7 @@
               <a:rPr lang="en-US" altLang="en-US" dirty="0"/>
               <a:t>Requires an estimate of the maximum size of the list</a:t>
             </a:r>
+            <a:endParaRPr lang="en-US" altLang="en-US" dirty="0"/>
           </a:p>
           <a:p>
             <a:pPr lvl="1">
@@ -13004,6 +11913,7 @@
               <a:rPr lang="en-US" altLang="en-US" dirty="0"/>
               <a:t>Linked list:</a:t>
             </a:r>
+            <a:endParaRPr lang="en-US" altLang="en-US" dirty="0"/>
           </a:p>
           <a:p>
             <a:pPr lvl="2">
@@ -13014,18 +11924,13 @@
               <a:rPr lang="en-US" altLang="en-US" dirty="0"/>
               <a:t>Ensure that the list is not stored contiguously</a:t>
             </a:r>
-          </a:p>
-        </p:txBody>
-      </p:sp>
-      <p:sp>
-        <p:nvSpPr>
-          <p:cNvPr id="6" name="Slide Number Placeholder 5">
-            <a:extLst>
-              <a:ext uri="{FF2B5EF4-FFF2-40B4-BE49-F238E27FC236}">
-                <a16:creationId xmlns:a16="http://schemas.microsoft.com/office/drawing/2014/main" xmlns="" id="{0C6F335C-A21C-ABBF-6CC2-6A3BED6D4293}"/>
-              </a:ext>
-            </a:extLst>
-          </p:cNvPr>
+            <a:endParaRPr lang="en-US" altLang="en-US" dirty="0"/>
+          </a:p>
+        </p:txBody>
+      </p:sp>
+      <p:sp>
+        <p:nvSpPr>
+          <p:cNvPr id="6" name="Slide Number Placeholder 5"/>
           <p:cNvSpPr>
             <a:spLocks noGrp="1"/>
           </p:cNvSpPr>
@@ -13040,8 +11945,6 @@
           <a:p>
             <a:fld id="{75B0C241-D0FA-41C4-806B-7A3C5377B352}" type="slidenum">
               <a:rPr lang="en-IN" smtClean="0"/>
-              <a:pPr/>
-              <a:t>23</a:t>
             </a:fld>
             <a:endParaRPr lang="en-IN"/>
           </a:p>
@@ -13056,7 +11959,7 @@
           <p:nvPr/>
         </p:nvPicPr>
         <p:blipFill>
-          <a:blip r:embed="rId2" cstate="print"/>
+          <a:blip r:embed="rId1" cstate="print"/>
           <a:stretch>
             <a:fillRect/>
           </a:stretch>
@@ -13072,11 +11975,6 @@
         </p:spPr>
       </p:pic>
     </p:spTree>
-    <p:extLst>
-      <p:ext uri="{BB962C8B-B14F-4D97-AF65-F5344CB8AC3E}">
-        <p14:creationId xmlns:p14="http://schemas.microsoft.com/office/powerpoint/2010/main" xmlns="" val="2668277362"/>
-      </p:ext>
-    </p:extLst>
   </p:cSld>
   <p:clrMapOvr>
     <a:masterClrMapping/>
@@ -13103,13 +12001,7 @@
       </p:grpSpPr>
       <p:sp>
         <p:nvSpPr>
-          <p:cNvPr id="2" name="Title 1">
-            <a:extLst>
-              <a:ext uri="{FF2B5EF4-FFF2-40B4-BE49-F238E27FC236}">
-                <a16:creationId xmlns:a16="http://schemas.microsoft.com/office/drawing/2014/main" xmlns="" id="{0B42675A-40D4-256A-AF3A-D4D84E7E4076}"/>
-              </a:ext>
-            </a:extLst>
-          </p:cNvPr>
+          <p:cNvPr id="2" name="Title 1"/>
           <p:cNvSpPr>
             <a:spLocks noGrp="1"/>
           </p:cNvSpPr>
@@ -13132,13 +12024,7 @@
       </p:sp>
       <p:sp>
         <p:nvSpPr>
-          <p:cNvPr id="3" name="Content Placeholder 2">
-            <a:extLst>
-              <a:ext uri="{FF2B5EF4-FFF2-40B4-BE49-F238E27FC236}">
-                <a16:creationId xmlns:a16="http://schemas.microsoft.com/office/drawing/2014/main" xmlns="" id="{4572CC6A-46C1-6A92-D65B-2DDAC43E156B}"/>
-              </a:ext>
-            </a:extLst>
-          </p:cNvPr>
+          <p:cNvPr id="3" name="Content Placeholder 2"/>
           <p:cNvSpPr>
             <a:spLocks noGrp="1"/>
           </p:cNvSpPr>
@@ -13178,6 +12064,7 @@
               <a:rPr lang="en-US" dirty="0"/>
               <a:t>contains elements of the same type arranged in sequential order. </a:t>
             </a:r>
+            <a:endParaRPr lang="en-US" dirty="0"/>
           </a:p>
           <a:p>
             <a:pPr lvl="1">
@@ -13206,6 +12093,7 @@
               <a:rPr lang="en-US" dirty="0"/>
               <a:t>.</a:t>
             </a:r>
+            <a:endParaRPr lang="en-US" dirty="0"/>
           </a:p>
           <a:p>
             <a:pPr lvl="1">
@@ -13216,6 +12104,7 @@
               <a:rPr lang="en-US" dirty="0"/>
               <a:t>Last In First Out or First In Last Out</a:t>
             </a:r>
+            <a:endParaRPr lang="en-US" dirty="0"/>
           </a:p>
           <a:p>
             <a:pPr>
@@ -13226,6 +12115,7 @@
               <a:rPr lang="en-US" altLang="en-US" dirty="0"/>
               <a:t>Operations:</a:t>
             </a:r>
+            <a:endParaRPr lang="en-US" altLang="en-US" dirty="0"/>
           </a:p>
           <a:p>
             <a:pPr lvl="1"/>
@@ -13233,6 +12123,7 @@
               <a:rPr lang="en-US" dirty="0"/>
               <a:t>push() – Insert an element at one end of the stack called top.</a:t>
             </a:r>
+            <a:endParaRPr lang="en-US" dirty="0"/>
           </a:p>
           <a:p>
             <a:pPr lvl="1"/>
@@ -13240,6 +12131,7 @@
               <a:rPr lang="en-US" dirty="0"/>
               <a:t>pop() – Remove and return the element at the top of the stack, if it is not empty.</a:t>
             </a:r>
+            <a:endParaRPr lang="en-US" dirty="0"/>
           </a:p>
           <a:p>
             <a:pPr lvl="1"/>
@@ -13247,6 +12139,7 @@
               <a:rPr lang="en-US" dirty="0"/>
               <a:t>size() – Return the number of elements in the stack.</a:t>
             </a:r>
+            <a:endParaRPr lang="en-US" dirty="0"/>
           </a:p>
           <a:p>
             <a:pPr lvl="1"/>
@@ -13258,6 +12151,7 @@
               <a:rPr lang="en-US" dirty="0"/>
               <a:t>() – Return true if the stack is empty, otherwise return false.</a:t>
             </a:r>
+            <a:endParaRPr lang="en-US" dirty="0"/>
           </a:p>
           <a:p>
             <a:pPr lvl="1"/>
@@ -13269,6 +12163,7 @@
               <a:rPr lang="en-US" dirty="0"/>
               <a:t>() – Return true if the stack is full, otherwise return false.</a:t>
             </a:r>
+            <a:endParaRPr lang="en-US" dirty="0"/>
           </a:p>
           <a:p>
             <a:endParaRPr lang="en-IN" dirty="0"/>
@@ -13277,13 +12172,7 @@
       </p:sp>
       <p:sp>
         <p:nvSpPr>
-          <p:cNvPr id="6" name="Slide Number Placeholder 5">
-            <a:extLst>
-              <a:ext uri="{FF2B5EF4-FFF2-40B4-BE49-F238E27FC236}">
-                <a16:creationId xmlns:a16="http://schemas.microsoft.com/office/drawing/2014/main" xmlns="" id="{BEB8195A-5A59-378D-067A-14A8EA43BF96}"/>
-              </a:ext>
-            </a:extLst>
-          </p:cNvPr>
+          <p:cNvPr id="6" name="Slide Number Placeholder 5"/>
           <p:cNvSpPr>
             <a:spLocks noGrp="1"/>
           </p:cNvSpPr>
@@ -13298,8 +12187,6 @@
           <a:p>
             <a:fld id="{75B0C241-D0FA-41C4-806B-7A3C5377B352}" type="slidenum">
               <a:rPr lang="en-IN" smtClean="0"/>
-              <a:pPr/>
-              <a:t>24</a:t>
             </a:fld>
             <a:endParaRPr lang="en-IN"/>
           </a:p>
@@ -13314,7 +12201,7 @@
           <p:nvPr/>
         </p:nvPicPr>
         <p:blipFill>
-          <a:blip r:embed="rId2" cstate="print"/>
+          <a:blip r:embed="rId1" cstate="print"/>
           <a:stretch>
             <a:fillRect/>
           </a:stretch>
@@ -13330,11 +12217,6 @@
         </p:spPr>
       </p:pic>
     </p:spTree>
-    <p:extLst>
-      <p:ext uri="{BB962C8B-B14F-4D97-AF65-F5344CB8AC3E}">
-        <p14:creationId xmlns:p14="http://schemas.microsoft.com/office/powerpoint/2010/main" xmlns="" val="538577724"/>
-      </p:ext>
-    </p:extLst>
   </p:cSld>
   <p:clrMapOvr>
     <a:masterClrMapping/>
@@ -13361,13 +12243,7 @@
       </p:grpSpPr>
       <p:sp>
         <p:nvSpPr>
-          <p:cNvPr id="2" name="Title 1">
-            <a:extLst>
-              <a:ext uri="{FF2B5EF4-FFF2-40B4-BE49-F238E27FC236}">
-                <a16:creationId xmlns:a16="http://schemas.microsoft.com/office/drawing/2014/main" xmlns="" id="{E60FC08B-9D0E-C631-3539-11B938E6B9F4}"/>
-              </a:ext>
-            </a:extLst>
-          </p:cNvPr>
+          <p:cNvPr id="2" name="Title 1"/>
           <p:cNvSpPr>
             <a:spLocks noGrp="1"/>
           </p:cNvSpPr>
@@ -13384,18 +12260,13 @@
               <a:rPr lang="en-IN" dirty="0"/>
               <a:t>Abstract Data Type: Queue as ADT</a:t>
             </a:r>
-          </a:p>
-        </p:txBody>
-      </p:sp>
-      <p:sp>
-        <p:nvSpPr>
-          <p:cNvPr id="3" name="Content Placeholder 2">
-            <a:extLst>
-              <a:ext uri="{FF2B5EF4-FFF2-40B4-BE49-F238E27FC236}">
-                <a16:creationId xmlns:a16="http://schemas.microsoft.com/office/drawing/2014/main" xmlns="" id="{0D88708C-5B9B-D522-3B23-BE5634869120}"/>
-              </a:ext>
-            </a:extLst>
-          </p:cNvPr>
+            <a:endParaRPr lang="en-IN" dirty="0"/>
+          </a:p>
+        </p:txBody>
+      </p:sp>
+      <p:sp>
+        <p:nvSpPr>
+          <p:cNvPr id="3" name="Content Placeholder 2"/>
           <p:cNvSpPr>
             <a:spLocks noGrp="1"/>
           </p:cNvSpPr>
@@ -13430,6 +12301,7 @@
               <a:rPr lang="en-US" dirty="0"/>
               <a:t> contains elements of the same type arranged in sequential order. </a:t>
             </a:r>
+            <a:endParaRPr lang="en-US" dirty="0"/>
           </a:p>
           <a:p>
             <a:pPr lvl="1">
@@ -13440,6 +12312,7 @@
               <a:rPr lang="en-US" dirty="0"/>
               <a:t>Operations take place at both ends</a:t>
             </a:r>
+            <a:endParaRPr lang="en-US" dirty="0"/>
           </a:p>
           <a:p>
             <a:pPr lvl="1">
@@ -13520,6 +12393,7 @@
               <a:rPr lang="en-US" altLang="en-US" dirty="0"/>
               <a:t>Operations:</a:t>
             </a:r>
+            <a:endParaRPr lang="en-US" altLang="en-US" dirty="0"/>
           </a:p>
           <a:p>
             <a:pPr lvl="1"/>
@@ -13535,6 +12409,7 @@
               <a:rPr lang="en-US" dirty="0"/>
               <a:t>– Insert an element at the end of the queue.</a:t>
             </a:r>
+            <a:endParaRPr lang="en-US" dirty="0"/>
           </a:p>
           <a:p>
             <a:pPr lvl="1"/>
@@ -13550,6 +12425,7 @@
               <a:rPr lang="en-US" dirty="0"/>
               <a:t>– Remove and return the first element of the queue, if the queue is not empty.</a:t>
             </a:r>
+            <a:endParaRPr lang="en-US" dirty="0"/>
           </a:p>
           <a:p>
             <a:pPr lvl="1"/>
@@ -13565,6 +12441,7 @@
               <a:rPr lang="en-US" dirty="0"/>
               <a:t>– Return the element of the queue without removing it, if the queue is not empty.</a:t>
             </a:r>
+            <a:endParaRPr lang="en-US" dirty="0"/>
           </a:p>
           <a:p>
             <a:pPr lvl="1"/>
@@ -13580,6 +12457,7 @@
               <a:rPr lang="en-US" dirty="0"/>
               <a:t>– Return the number of elements in the queue.</a:t>
             </a:r>
+            <a:endParaRPr lang="en-US" dirty="0"/>
           </a:p>
           <a:p>
             <a:pPr lvl="1"/>
@@ -13603,6 +12481,7 @@
               <a:rPr lang="en-US" dirty="0"/>
               <a:t>– Return true if the queue is empty, otherwise return false.</a:t>
             </a:r>
+            <a:endParaRPr lang="en-US" dirty="0"/>
           </a:p>
           <a:p>
             <a:pPr lvl="1"/>
@@ -13626,18 +12505,13 @@
               <a:rPr lang="en-US" dirty="0"/>
               <a:t>– Return true if the queue is full, otherwise return false</a:t>
             </a:r>
-          </a:p>
-        </p:txBody>
-      </p:sp>
-      <p:sp>
-        <p:nvSpPr>
-          <p:cNvPr id="6" name="Slide Number Placeholder 5">
-            <a:extLst>
-              <a:ext uri="{FF2B5EF4-FFF2-40B4-BE49-F238E27FC236}">
-                <a16:creationId xmlns:a16="http://schemas.microsoft.com/office/drawing/2014/main" xmlns="" id="{D1F5005C-C683-EC9E-626A-21CB5DE7E44A}"/>
-              </a:ext>
-            </a:extLst>
-          </p:cNvPr>
+            <a:endParaRPr lang="en-US" dirty="0"/>
+          </a:p>
+        </p:txBody>
+      </p:sp>
+      <p:sp>
+        <p:nvSpPr>
+          <p:cNvPr id="6" name="Slide Number Placeholder 5"/>
           <p:cNvSpPr>
             <a:spLocks noGrp="1"/>
           </p:cNvSpPr>
@@ -13652,8 +12526,6 @@
           <a:p>
             <a:fld id="{75B0C241-D0FA-41C4-806B-7A3C5377B352}" type="slidenum">
               <a:rPr lang="en-IN" smtClean="0"/>
-              <a:pPr/>
-              <a:t>25</a:t>
             </a:fld>
             <a:endParaRPr lang="en-IN"/>
           </a:p>
@@ -13668,7 +12540,7 @@
           <p:nvPr/>
         </p:nvPicPr>
         <p:blipFill>
-          <a:blip r:embed="rId2" cstate="print"/>
+          <a:blip r:embed="rId1" cstate="print"/>
           <a:stretch>
             <a:fillRect/>
           </a:stretch>
@@ -13684,11 +12556,6 @@
         </p:spPr>
       </p:pic>
     </p:spTree>
-    <p:extLst>
-      <p:ext uri="{BB962C8B-B14F-4D97-AF65-F5344CB8AC3E}">
-        <p14:creationId xmlns:p14="http://schemas.microsoft.com/office/powerpoint/2010/main" xmlns="" val="2488313232"/>
-      </p:ext>
-    </p:extLst>
   </p:cSld>
   <p:clrMapOvr>
     <a:masterClrMapping/>
@@ -13715,13 +12582,7 @@
       </p:grpSpPr>
       <p:sp>
         <p:nvSpPr>
-          <p:cNvPr id="2" name="Title 1">
-            <a:extLst>
-              <a:ext uri="{FF2B5EF4-FFF2-40B4-BE49-F238E27FC236}">
-                <a16:creationId xmlns:a16="http://schemas.microsoft.com/office/drawing/2014/main" xmlns="" id="{79767174-F164-D79D-701C-1F7345F86083}"/>
-              </a:ext>
-            </a:extLst>
-          </p:cNvPr>
+          <p:cNvPr id="2" name="Title 1"/>
           <p:cNvSpPr>
             <a:spLocks noGrp="1"/>
           </p:cNvSpPr>
@@ -13738,18 +12599,13 @@
               <a:rPr lang="en-IN" dirty="0"/>
               <a:t>Abstract Data Type: Summary</a:t>
             </a:r>
-          </a:p>
-        </p:txBody>
-      </p:sp>
-      <p:sp>
-        <p:nvSpPr>
-          <p:cNvPr id="3" name="Content Placeholder 2">
-            <a:extLst>
-              <a:ext uri="{FF2B5EF4-FFF2-40B4-BE49-F238E27FC236}">
-                <a16:creationId xmlns:a16="http://schemas.microsoft.com/office/drawing/2014/main" xmlns="" id="{499E59FC-FE65-6684-6AE7-D8DCA189BED4}"/>
-              </a:ext>
-            </a:extLst>
-          </p:cNvPr>
+            <a:endParaRPr lang="en-IN" dirty="0"/>
+          </a:p>
+        </p:txBody>
+      </p:sp>
+      <p:sp>
+        <p:nvSpPr>
+          <p:cNvPr id="3" name="Content Placeholder 2"/>
           <p:cNvSpPr>
             <a:spLocks noGrp="1"/>
           </p:cNvSpPr>
@@ -13816,6 +12672,7 @@
               <a:rPr lang="en-US" sz="2800" dirty="0"/>
               <a:t>can be decomposed into atomic data</a:t>
             </a:r>
+            <a:endParaRPr lang="en-US" sz="2800" dirty="0"/>
           </a:p>
           <a:p>
             <a:pPr>
@@ -13855,13 +12712,7 @@
       </p:sp>
       <p:sp>
         <p:nvSpPr>
-          <p:cNvPr id="6" name="Slide Number Placeholder 5">
-            <a:extLst>
-              <a:ext uri="{FF2B5EF4-FFF2-40B4-BE49-F238E27FC236}">
-                <a16:creationId xmlns:a16="http://schemas.microsoft.com/office/drawing/2014/main" xmlns="" id="{F9319D54-188D-F6A3-7CC6-717330C6461E}"/>
-              </a:ext>
-            </a:extLst>
-          </p:cNvPr>
+          <p:cNvPr id="6" name="Slide Number Placeholder 5"/>
           <p:cNvSpPr>
             <a:spLocks noGrp="1"/>
           </p:cNvSpPr>
@@ -13876,8 +12727,6 @@
           <a:p>
             <a:fld id="{75B0C241-D0FA-41C4-806B-7A3C5377B352}" type="slidenum">
               <a:rPr lang="en-IN" smtClean="0"/>
-              <a:pPr/>
-              <a:t>26</a:t>
             </a:fld>
             <a:endParaRPr lang="en-IN"/>
           </a:p>
@@ -13892,7 +12741,7 @@
           <p:nvPr/>
         </p:nvPicPr>
         <p:blipFill>
-          <a:blip r:embed="rId2" cstate="print"/>
+          <a:blip r:embed="rId1" cstate="print"/>
           <a:stretch>
             <a:fillRect/>
           </a:stretch>
@@ -13908,11 +12757,6 @@
         </p:spPr>
       </p:pic>
     </p:spTree>
-    <p:extLst>
-      <p:ext uri="{BB962C8B-B14F-4D97-AF65-F5344CB8AC3E}">
-        <p14:creationId xmlns:p14="http://schemas.microsoft.com/office/powerpoint/2010/main" xmlns="" val="2466213642"/>
-      </p:ext>
-    </p:extLst>
   </p:cSld>
   <p:clrMapOvr>
     <a:masterClrMapping/>
@@ -13939,13 +12783,7 @@
       </p:grpSpPr>
       <p:sp>
         <p:nvSpPr>
-          <p:cNvPr id="2" name="Title 1">
-            <a:extLst>
-              <a:ext uri="{FF2B5EF4-FFF2-40B4-BE49-F238E27FC236}">
-                <a16:creationId xmlns:a16="http://schemas.microsoft.com/office/drawing/2014/main" xmlns="" id="{6F98DE17-DD22-BD5B-373E-A8BE5D354300}"/>
-              </a:ext>
-            </a:extLst>
-          </p:cNvPr>
+          <p:cNvPr id="2" name="Title 1"/>
           <p:cNvSpPr>
             <a:spLocks noGrp="1"/>
           </p:cNvSpPr>
@@ -13995,13 +12833,7 @@
       </p:sp>
       <p:sp>
         <p:nvSpPr>
-          <p:cNvPr id="6" name="Slide Number Placeholder 5">
-            <a:extLst>
-              <a:ext uri="{FF2B5EF4-FFF2-40B4-BE49-F238E27FC236}">
-                <a16:creationId xmlns:a16="http://schemas.microsoft.com/office/drawing/2014/main" xmlns="" id="{09FE59DC-C7E4-949A-2A9D-7CDFBD3C7E65}"/>
-              </a:ext>
-            </a:extLst>
-          </p:cNvPr>
+          <p:cNvPr id="6" name="Slide Number Placeholder 5"/>
           <p:cNvSpPr>
             <a:spLocks noGrp="1"/>
           </p:cNvSpPr>
@@ -14016,8 +12848,6 @@
           <a:p>
             <a:fld id="{75B0C241-D0FA-41C4-806B-7A3C5377B352}" type="slidenum">
               <a:rPr lang="en-IN" smtClean="0"/>
-              <a:pPr/>
-              <a:t>27</a:t>
             </a:fld>
             <a:endParaRPr lang="en-IN"/>
           </a:p>
@@ -14025,16 +12855,8 @@
       </p:sp>
       <p:sp>
         <p:nvSpPr>
-          <p:cNvPr id="7" name="Title 1">
-            <a:extLst>
-              <a:ext uri="{FF2B5EF4-FFF2-40B4-BE49-F238E27FC236}">
-                <a16:creationId xmlns:a16="http://schemas.microsoft.com/office/drawing/2014/main" xmlns="" id="{0D07C32C-22CB-C7FA-80BD-EB6777CB61A0}"/>
-              </a:ext>
-            </a:extLst>
-          </p:cNvPr>
-          <p:cNvSpPr txBox="1">
-            <a:spLocks/>
-          </p:cNvSpPr>
+          <p:cNvPr id="7" name="Title 1"/>
+          <p:cNvSpPr txBox="1"/>
           <p:nvPr/>
         </p:nvSpPr>
         <p:spPr>
@@ -14107,7 +12929,7 @@
           <p:nvPr/>
         </p:nvPicPr>
         <p:blipFill>
-          <a:blip r:embed="rId2" cstate="print"/>
+          <a:blip r:embed="rId1" cstate="print"/>
           <a:stretch>
             <a:fillRect/>
           </a:stretch>
@@ -14123,11 +12945,6 @@
         </p:spPr>
       </p:pic>
     </p:spTree>
-    <p:extLst>
-      <p:ext uri="{BB962C8B-B14F-4D97-AF65-F5344CB8AC3E}">
-        <p14:creationId xmlns:p14="http://schemas.microsoft.com/office/powerpoint/2010/main" xmlns="" val="4010226002"/>
-      </p:ext>
-    </p:extLst>
   </p:cSld>
   <p:clrMapOvr>
     <a:masterClrMapping/>
@@ -14432,13 +13249,7 @@
       </p:grpSpPr>
       <p:sp>
         <p:nvSpPr>
-          <p:cNvPr id="2" name="Title 1">
-            <a:extLst>
-              <a:ext uri="{FF2B5EF4-FFF2-40B4-BE49-F238E27FC236}">
-                <a16:creationId xmlns:a16="http://schemas.microsoft.com/office/drawing/2014/main" xmlns="" id="{FEB07479-56C4-810A-BAFC-B6662EB64ACB}"/>
-              </a:ext>
-            </a:extLst>
-          </p:cNvPr>
+          <p:cNvPr id="2" name="Title 1"/>
           <p:cNvSpPr>
             <a:spLocks noGrp="1"/>
           </p:cNvSpPr>
@@ -14455,18 +13266,13 @@
               <a:rPr lang="en-IN" dirty="0"/>
               <a:t>Data</a:t>
             </a:r>
-          </a:p>
-        </p:txBody>
-      </p:sp>
-      <p:sp>
-        <p:nvSpPr>
-          <p:cNvPr id="3" name="Content Placeholder 2">
-            <a:extLst>
-              <a:ext uri="{FF2B5EF4-FFF2-40B4-BE49-F238E27FC236}">
-                <a16:creationId xmlns:a16="http://schemas.microsoft.com/office/drawing/2014/main" xmlns="" id="{613A7F32-D923-AF71-CA1D-F23E88BB7F29}"/>
-              </a:ext>
-            </a:extLst>
-          </p:cNvPr>
+            <a:endParaRPr lang="en-IN" dirty="0"/>
+          </a:p>
+        </p:txBody>
+      </p:sp>
+      <p:sp>
+        <p:nvSpPr>
+          <p:cNvPr id="3" name="Content Placeholder 2"/>
           <p:cNvSpPr>
             <a:spLocks noGrp="1"/>
           </p:cNvSpPr>
@@ -14485,12 +13291,14 @@
               <a:rPr lang="en-US" dirty="0"/>
               <a:t>Simply set of values.</a:t>
             </a:r>
+            <a:endParaRPr lang="en-US" dirty="0"/>
           </a:p>
           <a:p>
             <a:r>
               <a:rPr lang="en-US" dirty="0"/>
               <a:t>In C/C++  language: </a:t>
             </a:r>
+            <a:endParaRPr lang="en-US" dirty="0"/>
           </a:p>
           <a:p>
             <a:pPr lvl="1"/>
@@ -14498,6 +13306,7 @@
               <a:rPr lang="en-US" dirty="0"/>
               <a:t>Integer data values 0……..9</a:t>
             </a:r>
+            <a:endParaRPr lang="en-US" dirty="0"/>
           </a:p>
           <a:p>
             <a:pPr lvl="1"/>
@@ -14505,6 +13314,7 @@
               <a:rPr lang="en-US" dirty="0"/>
               <a:t>Character: A…Z, a…..z</a:t>
             </a:r>
+            <a:endParaRPr lang="en-US" dirty="0"/>
           </a:p>
           <a:p>
             <a:pPr lvl="1"/>
@@ -14512,12 +13322,14 @@
               <a:rPr lang="en-US" dirty="0"/>
               <a:t>A data items refers to single unit of values.</a:t>
             </a:r>
+            <a:endParaRPr lang="en-US" dirty="0"/>
           </a:p>
           <a:p>
             <a:r>
               <a:rPr lang="en-US" dirty="0"/>
               <a:t>If Data items are divided into subitems then not called basic items</a:t>
             </a:r>
+            <a:endParaRPr lang="en-US" dirty="0"/>
           </a:p>
           <a:p>
             <a:r>
@@ -14528,18 +13340,13 @@
               <a:rPr lang="en-US" dirty="0" smtClean="0"/>
               <a:t>.</a:t>
             </a:r>
-          </a:p>
-        </p:txBody>
-      </p:sp>
-      <p:sp>
-        <p:nvSpPr>
-          <p:cNvPr id="6" name="Slide Number Placeholder 5">
-            <a:extLst>
-              <a:ext uri="{FF2B5EF4-FFF2-40B4-BE49-F238E27FC236}">
-                <a16:creationId xmlns:a16="http://schemas.microsoft.com/office/drawing/2014/main" xmlns="" id="{365ED4EE-CF72-B223-2B88-4580E9BB065B}"/>
-              </a:ext>
-            </a:extLst>
-          </p:cNvPr>
+            <a:endParaRPr lang="en-US" dirty="0" smtClean="0"/>
+          </a:p>
+        </p:txBody>
+      </p:sp>
+      <p:sp>
+        <p:nvSpPr>
+          <p:cNvPr id="6" name="Slide Number Placeholder 5"/>
           <p:cNvSpPr>
             <a:spLocks noGrp="1"/>
           </p:cNvSpPr>
@@ -14554,8 +13361,6 @@
           <a:p>
             <a:fld id="{75B0C241-D0FA-41C4-806B-7A3C5377B352}" type="slidenum">
               <a:rPr lang="en-IN" smtClean="0"/>
-              <a:pPr/>
-              <a:t>3</a:t>
             </a:fld>
             <a:endParaRPr lang="en-IN"/>
           </a:p>
@@ -14570,7 +13375,7 @@
           <p:nvPr/>
         </p:nvPicPr>
         <p:blipFill>
-          <a:blip r:embed="rId2" cstate="print"/>
+          <a:blip r:embed="rId1" cstate="print"/>
           <a:stretch>
             <a:fillRect/>
           </a:stretch>
@@ -14586,11 +13391,6 @@
         </p:spPr>
       </p:pic>
     </p:spTree>
-    <p:extLst>
-      <p:ext uri="{BB962C8B-B14F-4D97-AF65-F5344CB8AC3E}">
-        <p14:creationId xmlns:p14="http://schemas.microsoft.com/office/powerpoint/2010/main" xmlns="" val="3268105190"/>
-      </p:ext>
-    </p:extLst>
   </p:cSld>
   <p:clrMapOvr>
     <a:masterClrMapping/>
@@ -14617,13 +13417,7 @@
       </p:grpSpPr>
       <p:sp>
         <p:nvSpPr>
-          <p:cNvPr id="2" name="Title 1">
-            <a:extLst>
-              <a:ext uri="{FF2B5EF4-FFF2-40B4-BE49-F238E27FC236}">
-                <a16:creationId xmlns:a16="http://schemas.microsoft.com/office/drawing/2014/main" xmlns="" id="{22B4B22B-85A4-2127-2AA8-B7989B5ECEED}"/>
-              </a:ext>
-            </a:extLst>
-          </p:cNvPr>
+          <p:cNvPr id="2" name="Title 1"/>
           <p:cNvSpPr>
             <a:spLocks noGrp="1"/>
           </p:cNvSpPr>
@@ -14640,18 +13434,13 @@
               <a:rPr lang="en-IN" dirty="0"/>
               <a:t>Data: Atomic vs Composite Data </a:t>
             </a:r>
-          </a:p>
-        </p:txBody>
-      </p:sp>
-      <p:sp>
-        <p:nvSpPr>
-          <p:cNvPr id="3" name="Content Placeholder 2">
-            <a:extLst>
-              <a:ext uri="{FF2B5EF4-FFF2-40B4-BE49-F238E27FC236}">
-                <a16:creationId xmlns:a16="http://schemas.microsoft.com/office/drawing/2014/main" xmlns="" id="{7249A711-9ECE-FD6B-15F0-327EA30F2B9A}"/>
-              </a:ext>
-            </a:extLst>
-          </p:cNvPr>
+            <a:endParaRPr lang="en-IN" dirty="0"/>
+          </a:p>
+        </p:txBody>
+      </p:sp>
+      <p:sp>
+        <p:nvSpPr>
+          <p:cNvPr id="3" name="Content Placeholder 2"/>
           <p:cNvSpPr>
             <a:spLocks noGrp="1"/>
           </p:cNvSpPr>
@@ -14676,6 +13465,11 @@
               </a:rPr>
               <a:t>Atomic Data:</a:t>
             </a:r>
+            <a:endParaRPr lang="en-US" dirty="0">
+              <a:solidFill>
+                <a:srgbClr val="0070C0"/>
+              </a:solidFill>
+            </a:endParaRPr>
           </a:p>
           <a:p>
             <a:pPr lvl="1">
@@ -14696,6 +13490,17 @@
               </a:rPr>
               <a:t>Consider as single, Non decomposable data/entity</a:t>
             </a:r>
+            <a:endParaRPr kumimoji="0" lang="en-US" b="0" i="0" u="none" strike="noStrike" kern="1200" cap="none" spc="0" normalizeH="0" baseline="0" noProof="0" dirty="0">
+              <a:ln>
+                <a:noFill/>
+              </a:ln>
+              <a:solidFill>
+                <a:sysClr val="windowText" lastClr="000000"/>
+              </a:solidFill>
+              <a:effectLst/>
+              <a:uLnTx/>
+              <a:uFillTx/>
+            </a:endParaRPr>
           </a:p>
           <a:p>
             <a:pPr lvl="1">
@@ -14716,6 +13521,17 @@
               </a:rPr>
               <a:t>Can’t divided into subparts</a:t>
             </a:r>
+            <a:endParaRPr kumimoji="0" lang="en-US" b="0" i="0" u="none" strike="noStrike" kern="1200" cap="none" spc="0" normalizeH="0" baseline="0" noProof="0" dirty="0">
+              <a:ln>
+                <a:noFill/>
+              </a:ln>
+              <a:solidFill>
+                <a:sysClr val="windowText" lastClr="000000"/>
+              </a:solidFill>
+              <a:effectLst/>
+              <a:uLnTx/>
+              <a:uFillTx/>
+            </a:endParaRPr>
           </a:p>
           <a:p>
             <a:pPr>
@@ -14730,6 +13546,11 @@
               </a:rPr>
               <a:t>Atomic Data Type:</a:t>
             </a:r>
+            <a:endParaRPr lang="en-US" dirty="0">
+              <a:solidFill>
+                <a:srgbClr val="0070C0"/>
+              </a:solidFill>
+            </a:endParaRPr>
           </a:p>
           <a:p>
             <a:pPr lvl="1">
@@ -14743,56 +13564,6 @@
                 </a:solidFill>
               </a:rPr>
               <a:t>Set of atomic data with identical properties.</a:t>
-            </a:r>
-          </a:p>
-          <a:p>
-            <a:pPr lvl="1">
-              <a:buFont typeface="Wingdings" panose="05000000000000000000" pitchFamily="2" charset="2"/>
-              <a:buChar char="§"/>
-            </a:pPr>
-            <a:r>
-              <a:rPr lang="en-US" dirty="0">
-                <a:solidFill>
-                  <a:sysClr val="windowText" lastClr="000000"/>
-                </a:solidFill>
-              </a:rPr>
-              <a:t>It consist of set values and set of operations on values</a:t>
-            </a:r>
-          </a:p>
-          <a:p>
-            <a:pPr lvl="1">
-              <a:buFont typeface="Wingdings" panose="05000000000000000000" pitchFamily="2" charset="2"/>
-              <a:buChar char="§"/>
-            </a:pPr>
-            <a:r>
-              <a:rPr lang="en-US" dirty="0">
-                <a:solidFill>
-                  <a:sysClr val="windowText" lastClr="000000"/>
-                </a:solidFill>
-              </a:rPr>
-              <a:t>Ex:</a:t>
-            </a:r>
-          </a:p>
-          <a:p>
-            <a:pPr lvl="2">
-              <a:buFont typeface="Wingdings" panose="05000000000000000000" pitchFamily="2" charset="2"/>
-              <a:buChar char="§"/>
-            </a:pPr>
-            <a:r>
-              <a:rPr lang="en-US" dirty="0">
-                <a:solidFill>
-                  <a:sysClr val="windowText" lastClr="000000"/>
-                </a:solidFill>
-              </a:rPr>
-              <a:t>Character: ‘A’ ….’Z’, ‘a’…..’z’……’\0’ etc. Operations: compare character </a:t>
-            </a:r>
-            <a:r>
-              <a:rPr lang="en-US" dirty="0" err="1">
-                <a:solidFill>
-                  <a:sysClr val="windowText" lastClr="000000"/>
-                </a:solidFill>
-              </a:rPr>
-              <a:t>etc</a:t>
             </a:r>
             <a:endParaRPr lang="en-US" dirty="0">
               <a:solidFill>
@@ -14801,7 +13572,7 @@
             </a:endParaRPr>
           </a:p>
           <a:p>
-            <a:pPr lvl="2">
+            <a:pPr lvl="1">
               <a:buFont typeface="Wingdings" panose="05000000000000000000" pitchFamily="2" charset="2"/>
               <a:buChar char="§"/>
             </a:pPr>
@@ -14811,31 +13582,7 @@
                   <a:sysClr val="windowText" lastClr="000000"/>
                 </a:solidFill>
               </a:rPr>
-              <a:t>Integer Value: 100, 1, 67850, 7643 operation: </a:t>
-            </a:r>
-            <a:r>
-              <a:rPr lang="en-US" dirty="0" err="1">
-                <a:solidFill>
-                  <a:sysClr val="windowText" lastClr="000000"/>
-                </a:solidFill>
-              </a:rPr>
-              <a:t>Arithmatic</a:t>
-            </a:r>
-            <a:r>
-              <a:rPr lang="en-US" dirty="0">
-                <a:solidFill>
-                  <a:sysClr val="windowText" lastClr="000000"/>
-                </a:solidFill>
-              </a:rPr>
-              <a:t> operations, compare </a:t>
-            </a:r>
-            <a:r>
-              <a:rPr lang="en-US" dirty="0" err="1">
-                <a:solidFill>
-                  <a:sysClr val="windowText" lastClr="000000"/>
-                </a:solidFill>
-              </a:rPr>
-              <a:t>etc</a:t>
+              <a:t>It consist of set values and set of operations on values</a:t>
             </a:r>
             <a:endParaRPr lang="en-US" dirty="0">
               <a:solidFill>
@@ -14848,6 +13595,14 @@
               <a:buFont typeface="Wingdings" panose="05000000000000000000" pitchFamily="2" charset="2"/>
               <a:buChar char="§"/>
             </a:pPr>
+            <a:r>
+              <a:rPr lang="en-US" dirty="0">
+                <a:solidFill>
+                  <a:sysClr val="windowText" lastClr="000000"/>
+                </a:solidFill>
+              </a:rPr>
+              <a:t>Ex:</a:t>
+            </a:r>
             <a:endParaRPr lang="en-US" dirty="0">
               <a:solidFill>
                 <a:sysClr val="windowText" lastClr="000000"/>
@@ -14855,19 +13610,94 @@
             </a:endParaRPr>
           </a:p>
           <a:p>
+            <a:pPr lvl="2">
+              <a:buFont typeface="Wingdings" panose="05000000000000000000" pitchFamily="2" charset="2"/>
+              <a:buChar char="§"/>
+            </a:pPr>
+            <a:r>
+              <a:rPr lang="en-US" dirty="0">
+                <a:solidFill>
+                  <a:sysClr val="windowText" lastClr="000000"/>
+                </a:solidFill>
+              </a:rPr>
+              <a:t>Character: ‘A’ ….’Z’, ‘a’…..’z’……’\0’ etc. Operations: compare character </a:t>
+            </a:r>
+            <a:r>
+              <a:rPr lang="en-US" dirty="0" err="1">
+                <a:solidFill>
+                  <a:sysClr val="windowText" lastClr="000000"/>
+                </a:solidFill>
+              </a:rPr>
+              <a:t>etc</a:t>
+            </a:r>
+            <a:endParaRPr lang="en-US" dirty="0">
+              <a:solidFill>
+                <a:sysClr val="windowText" lastClr="000000"/>
+              </a:solidFill>
+            </a:endParaRPr>
+          </a:p>
+          <a:p>
+            <a:pPr lvl="2">
+              <a:buFont typeface="Wingdings" panose="05000000000000000000" pitchFamily="2" charset="2"/>
+              <a:buChar char="§"/>
+            </a:pPr>
+            <a:r>
+              <a:rPr lang="en-US" dirty="0">
+                <a:solidFill>
+                  <a:sysClr val="windowText" lastClr="000000"/>
+                </a:solidFill>
+              </a:rPr>
+              <a:t>Integer Value: 100, 1, 67850, 7643 operation: </a:t>
+            </a:r>
+            <a:r>
+              <a:rPr lang="en-US" dirty="0" err="1">
+                <a:solidFill>
+                  <a:sysClr val="windowText" lastClr="000000"/>
+                </a:solidFill>
+              </a:rPr>
+              <a:t>Arithmatic</a:t>
+            </a:r>
+            <a:r>
+              <a:rPr lang="en-US" dirty="0">
+                <a:solidFill>
+                  <a:sysClr val="windowText" lastClr="000000"/>
+                </a:solidFill>
+              </a:rPr>
+              <a:t> operations, compare </a:t>
+            </a:r>
+            <a:r>
+              <a:rPr lang="en-US" dirty="0" err="1">
+                <a:solidFill>
+                  <a:sysClr val="windowText" lastClr="000000"/>
+                </a:solidFill>
+              </a:rPr>
+              <a:t>etc</a:t>
+            </a:r>
+            <a:endParaRPr lang="en-US" dirty="0">
+              <a:solidFill>
+                <a:sysClr val="windowText" lastClr="000000"/>
+              </a:solidFill>
+            </a:endParaRPr>
+          </a:p>
+          <a:p>
+            <a:pPr lvl="1">
+              <a:buFont typeface="Wingdings" panose="05000000000000000000" pitchFamily="2" charset="2"/>
+              <a:buChar char="§"/>
+            </a:pPr>
+            <a:endParaRPr lang="en-US" dirty="0">
+              <a:solidFill>
+                <a:sysClr val="windowText" lastClr="000000"/>
+              </a:solidFill>
+            </a:endParaRPr>
+          </a:p>
+          <a:p>
             <a:endParaRPr lang="en-IN" dirty="0"/>
           </a:p>
         </p:txBody>
       </p:sp>
       <p:sp>
         <p:nvSpPr>
-          <p:cNvPr id="6" name="Slide Number Placeholder 5">
-            <a:extLst>
-              <a:ext uri="{FF2B5EF4-FFF2-40B4-BE49-F238E27FC236}">
-                <a16:creationId xmlns:a16="http://schemas.microsoft.com/office/drawing/2014/main" xmlns="" id="{95FAECD9-9391-9BCE-1535-B75230C94EE2}"/>
-              </a:ext>
-            </a:extLst>
-          </p:cNvPr>
+          <p:cNvPr id="6" name="Slide Number Placeholder 5"/>
           <p:cNvSpPr>
             <a:spLocks noGrp="1"/>
           </p:cNvSpPr>
@@ -14882,8 +13712,6 @@
           <a:p>
             <a:fld id="{75B0C241-D0FA-41C4-806B-7A3C5377B352}" type="slidenum">
               <a:rPr lang="en-IN" smtClean="0"/>
-              <a:pPr/>
-              <a:t>4</a:t>
             </a:fld>
             <a:endParaRPr lang="en-IN"/>
           </a:p>
@@ -14898,7 +13726,7 @@
           <p:nvPr/>
         </p:nvPicPr>
         <p:blipFill>
-          <a:blip r:embed="rId2" cstate="print"/>
+          <a:blip r:embed="rId1" cstate="print"/>
           <a:stretch>
             <a:fillRect/>
           </a:stretch>
@@ -14914,11 +13742,6 @@
         </p:spPr>
       </p:pic>
     </p:spTree>
-    <p:extLst>
-      <p:ext uri="{BB962C8B-B14F-4D97-AF65-F5344CB8AC3E}">
-        <p14:creationId xmlns:p14="http://schemas.microsoft.com/office/powerpoint/2010/main" xmlns="" val="4230804771"/>
-      </p:ext>
-    </p:extLst>
   </p:cSld>
   <p:clrMapOvr>
     <a:masterClrMapping/>
@@ -14945,13 +13768,7 @@
       </p:grpSpPr>
       <p:sp>
         <p:nvSpPr>
-          <p:cNvPr id="2" name="Title 1">
-            <a:extLst>
-              <a:ext uri="{FF2B5EF4-FFF2-40B4-BE49-F238E27FC236}">
-                <a16:creationId xmlns:a16="http://schemas.microsoft.com/office/drawing/2014/main" xmlns="" id="{DF0E1DB7-ABA8-1CBA-D51F-1523D6BC7B4A}"/>
-              </a:ext>
-            </a:extLst>
-          </p:cNvPr>
+          <p:cNvPr id="2" name="Title 1"/>
           <p:cNvSpPr>
             <a:spLocks noGrp="1"/>
           </p:cNvSpPr>
@@ -14968,18 +13785,13 @@
               <a:rPr lang="en-IN" dirty="0"/>
               <a:t>Data: Atomic vs Composite Data </a:t>
             </a:r>
-          </a:p>
-        </p:txBody>
-      </p:sp>
-      <p:sp>
-        <p:nvSpPr>
-          <p:cNvPr id="3" name="Content Placeholder 2">
-            <a:extLst>
-              <a:ext uri="{FF2B5EF4-FFF2-40B4-BE49-F238E27FC236}">
-                <a16:creationId xmlns:a16="http://schemas.microsoft.com/office/drawing/2014/main" xmlns="" id="{AD41E787-5343-6860-3DC8-827194BD150B}"/>
-              </a:ext>
-            </a:extLst>
-          </p:cNvPr>
+            <a:endParaRPr lang="en-IN" dirty="0"/>
+          </a:p>
+        </p:txBody>
+      </p:sp>
+      <p:sp>
+        <p:nvSpPr>
+          <p:cNvPr id="3" name="Content Placeholder 2"/>
           <p:cNvSpPr>
             <a:spLocks noGrp="1"/>
           </p:cNvSpPr>
@@ -15004,6 +13816,11 @@
               </a:rPr>
               <a:t>Composite Data:</a:t>
             </a:r>
+            <a:endParaRPr lang="en-US" dirty="0">
+              <a:solidFill>
+                <a:srgbClr val="0070C0"/>
+              </a:solidFill>
+            </a:endParaRPr>
           </a:p>
           <a:p>
             <a:pPr lvl="1">
@@ -15018,6 +13835,11 @@
               </a:rPr>
               <a:t>Composition of several atomic data</a:t>
             </a:r>
+            <a:endParaRPr lang="en-US" dirty="0">
+              <a:solidFill>
+                <a:sysClr val="windowText" lastClr="000000"/>
+              </a:solidFill>
+            </a:endParaRPr>
           </a:p>
           <a:p>
             <a:pPr lvl="1">
@@ -15032,6 +13854,11 @@
               </a:rPr>
               <a:t>Divided into atomic data with </a:t>
             </a:r>
+            <a:endParaRPr lang="en-US" dirty="0">
+              <a:solidFill>
+                <a:sysClr val="windowText" lastClr="000000"/>
+              </a:solidFill>
+            </a:endParaRPr>
           </a:p>
           <a:p>
             <a:pPr lvl="1">
@@ -15046,6 +13873,11 @@
               </a:rPr>
               <a:t>Ex: </a:t>
             </a:r>
+            <a:endParaRPr lang="en-US" dirty="0">
+              <a:solidFill>
+                <a:sysClr val="windowText" lastClr="000000"/>
+              </a:solidFill>
+            </a:endParaRPr>
           </a:p>
           <a:p>
             <a:pPr lvl="2">
@@ -15060,6 +13892,11 @@
               </a:rPr>
               <a:t>Employee name</a:t>
             </a:r>
+            <a:endParaRPr lang="en-US" dirty="0">
+              <a:solidFill>
+                <a:sysClr val="windowText" lastClr="000000"/>
+              </a:solidFill>
+            </a:endParaRPr>
           </a:p>
           <a:p>
             <a:pPr lvl="3">
@@ -15074,6 +13911,11 @@
               </a:rPr>
               <a:t>First name, Last name, Middle Name</a:t>
             </a:r>
+            <a:endParaRPr lang="en-US" dirty="0">
+              <a:solidFill>
+                <a:sysClr val="windowText" lastClr="000000"/>
+              </a:solidFill>
+            </a:endParaRPr>
           </a:p>
           <a:p>
             <a:pPr lvl="2">
@@ -15088,6 +13930,11 @@
               </a:rPr>
               <a:t>Telephone number:</a:t>
             </a:r>
+            <a:endParaRPr lang="en-US" dirty="0">
+              <a:solidFill>
+                <a:sysClr val="windowText" lastClr="000000"/>
+              </a:solidFill>
+            </a:endParaRPr>
           </a:p>
           <a:p>
             <a:pPr lvl="3">
@@ -15102,6 +13949,11 @@
               </a:rPr>
               <a:t>Area code, extension no, phone number,</a:t>
             </a:r>
+            <a:endParaRPr lang="en-US" dirty="0">
+              <a:solidFill>
+                <a:sysClr val="windowText" lastClr="000000"/>
+              </a:solidFill>
+            </a:endParaRPr>
           </a:p>
           <a:p>
             <a:pPr lvl="2">
@@ -15116,6 +13968,11 @@
               </a:rPr>
               <a:t>Date of birth: </a:t>
             </a:r>
+            <a:endParaRPr lang="en-US" dirty="0">
+              <a:solidFill>
+                <a:sysClr val="windowText" lastClr="000000"/>
+              </a:solidFill>
+            </a:endParaRPr>
           </a:p>
           <a:p>
             <a:pPr lvl="3">
@@ -15130,6 +13987,11 @@
               </a:rPr>
               <a:t>Day, month, year</a:t>
             </a:r>
+            <a:endParaRPr lang="en-US" dirty="0">
+              <a:solidFill>
+                <a:sysClr val="windowText" lastClr="000000"/>
+              </a:solidFill>
+            </a:endParaRPr>
           </a:p>
           <a:p>
             <a:pPr>
@@ -15144,6 +14006,11 @@
               </a:rPr>
               <a:t>Composite data are used in terms as data structure.</a:t>
             </a:r>
+            <a:endParaRPr lang="en-US" dirty="0">
+              <a:solidFill>
+                <a:sysClr val="windowText" lastClr="000000"/>
+              </a:solidFill>
+            </a:endParaRPr>
           </a:p>
           <a:p>
             <a:endParaRPr lang="en-IN" dirty="0"/>
@@ -15152,13 +14019,7 @@
       </p:sp>
       <p:sp>
         <p:nvSpPr>
-          <p:cNvPr id="6" name="Slide Number Placeholder 5">
-            <a:extLst>
-              <a:ext uri="{FF2B5EF4-FFF2-40B4-BE49-F238E27FC236}">
-                <a16:creationId xmlns:a16="http://schemas.microsoft.com/office/drawing/2014/main" xmlns="" id="{EF823441-DF15-42E0-00CB-8C10508787E7}"/>
-              </a:ext>
-            </a:extLst>
-          </p:cNvPr>
+          <p:cNvPr id="6" name="Slide Number Placeholder 5"/>
           <p:cNvSpPr>
             <a:spLocks noGrp="1"/>
           </p:cNvSpPr>
@@ -15173,8 +14034,6 @@
           <a:p>
             <a:fld id="{75B0C241-D0FA-41C4-806B-7A3C5377B352}" type="slidenum">
               <a:rPr lang="en-IN" smtClean="0"/>
-              <a:pPr/>
-              <a:t>5</a:t>
             </a:fld>
             <a:endParaRPr lang="en-IN"/>
           </a:p>
@@ -15189,7 +14048,7 @@
           <p:nvPr/>
         </p:nvPicPr>
         <p:blipFill>
-          <a:blip r:embed="rId2" cstate="print"/>
+          <a:blip r:embed="rId1" cstate="print"/>
           <a:stretch>
             <a:fillRect/>
           </a:stretch>
@@ -15205,11 +14064,6 @@
         </p:spPr>
       </p:pic>
     </p:spTree>
-    <p:extLst>
-      <p:ext uri="{BB962C8B-B14F-4D97-AF65-F5344CB8AC3E}">
-        <p14:creationId xmlns:p14="http://schemas.microsoft.com/office/powerpoint/2010/main" xmlns="" val="1022690377"/>
-      </p:ext>
-    </p:extLst>
   </p:cSld>
   <p:clrMapOvr>
     <a:masterClrMapping/>
@@ -15236,13 +14090,7 @@
       </p:grpSpPr>
       <p:sp>
         <p:nvSpPr>
-          <p:cNvPr id="2" name="Title 1">
-            <a:extLst>
-              <a:ext uri="{FF2B5EF4-FFF2-40B4-BE49-F238E27FC236}">
-                <a16:creationId xmlns:a16="http://schemas.microsoft.com/office/drawing/2014/main" xmlns="" id="{32004D2B-7EE4-F98C-2509-2A25F33915CF}"/>
-              </a:ext>
-            </a:extLst>
-          </p:cNvPr>
+          <p:cNvPr id="2" name="Title 1"/>
           <p:cNvSpPr>
             <a:spLocks noGrp="1"/>
           </p:cNvSpPr>
@@ -15259,18 +14107,13 @@
               <a:rPr lang="en-IN" dirty="0"/>
               <a:t>Data Types</a:t>
             </a:r>
-          </a:p>
-        </p:txBody>
-      </p:sp>
-      <p:sp>
-        <p:nvSpPr>
-          <p:cNvPr id="3" name="Content Placeholder 2">
-            <a:extLst>
-              <a:ext uri="{FF2B5EF4-FFF2-40B4-BE49-F238E27FC236}">
-                <a16:creationId xmlns:a16="http://schemas.microsoft.com/office/drawing/2014/main" xmlns="" id="{EC2C6683-7ED7-BD71-281F-77EAEC9535F6}"/>
-              </a:ext>
-            </a:extLst>
-          </p:cNvPr>
+            <a:endParaRPr lang="en-IN" dirty="0"/>
+          </a:p>
+        </p:txBody>
+      </p:sp>
+      <p:sp>
+        <p:nvSpPr>
+          <p:cNvPr id="3" name="Content Placeholder 2"/>
           <p:cNvSpPr>
             <a:spLocks noGrp="1"/>
           </p:cNvSpPr>
@@ -15298,6 +14141,7 @@
               <a:rPr lang="en-US" dirty="0"/>
               <a:t>A Data type consist of two parts</a:t>
             </a:r>
+            <a:endParaRPr lang="en-US" dirty="0"/>
           </a:p>
           <a:p>
             <a:pPr lvl="1">
@@ -15312,6 +14156,11 @@
               </a:rPr>
               <a:t>Set of data</a:t>
             </a:r>
+            <a:endParaRPr lang="en-US" dirty="0">
+              <a:solidFill>
+                <a:srgbClr val="0070C0"/>
+              </a:solidFill>
+            </a:endParaRPr>
           </a:p>
           <a:p>
             <a:pPr lvl="1">
@@ -15326,6 +14175,11 @@
               </a:rPr>
               <a:t>The operations that can be performed on the data.</a:t>
             </a:r>
+            <a:endParaRPr lang="en-US" dirty="0">
+              <a:solidFill>
+                <a:srgbClr val="0070C0"/>
+              </a:solidFill>
+            </a:endParaRPr>
           </a:p>
           <a:p>
             <a:pPr>
@@ -15348,6 +14202,7 @@
               <a:rPr lang="en-US" dirty="0"/>
               <a:t>that variable may hold.</a:t>
             </a:r>
+            <a:endParaRPr lang="en-US" dirty="0"/>
           </a:p>
           <a:p>
             <a:pPr>
@@ -15358,6 +14213,7 @@
               <a:rPr lang="en-US" dirty="0"/>
               <a:t>Data types are primarily used in computer programming, in which variables are created to store data. </a:t>
             </a:r>
+            <a:endParaRPr lang="en-US" dirty="0"/>
           </a:p>
           <a:p>
             <a:pPr>
@@ -15368,6 +14224,7 @@
               <a:rPr lang="en-US" dirty="0"/>
               <a:t>Each variable is assigned a data type that determines what type of data/ value the variable may contain.</a:t>
             </a:r>
+            <a:endParaRPr lang="en-US" dirty="0"/>
           </a:p>
           <a:p>
             <a:pPr>
@@ -15378,6 +14235,7 @@
               <a:rPr lang="en-US" dirty="0"/>
               <a:t>A data type is a classification of data</a:t>
             </a:r>
+            <a:endParaRPr lang="en-US" dirty="0"/>
           </a:p>
           <a:p>
             <a:pPr lvl="1">
@@ -15396,6 +14254,7 @@
               <a:rPr lang="en-US" dirty="0"/>
               <a:t>can store a specific type of information.</a:t>
             </a:r>
+            <a:endParaRPr lang="en-US" dirty="0"/>
           </a:p>
           <a:p>
             <a:pPr lvl="1">
@@ -15445,6 +14304,11 @@
               </a:rPr>
               <a:t> 90.9, 89.57</a:t>
             </a:r>
+            <a:endParaRPr lang="en-US" dirty="0">
+              <a:solidFill>
+                <a:sysClr val="windowText" lastClr="000000"/>
+              </a:solidFill>
+            </a:endParaRPr>
           </a:p>
           <a:p>
             <a:pPr lvl="1">
@@ -15490,13 +14354,7 @@
       </p:sp>
       <p:sp>
         <p:nvSpPr>
-          <p:cNvPr id="6" name="Slide Number Placeholder 5">
-            <a:extLst>
-              <a:ext uri="{FF2B5EF4-FFF2-40B4-BE49-F238E27FC236}">
-                <a16:creationId xmlns:a16="http://schemas.microsoft.com/office/drawing/2014/main" xmlns="" id="{C6B2483E-1155-C4B8-5693-3EC6DEF4FCEE}"/>
-              </a:ext>
-            </a:extLst>
-          </p:cNvPr>
+          <p:cNvPr id="6" name="Slide Number Placeholder 5"/>
           <p:cNvSpPr>
             <a:spLocks noGrp="1"/>
           </p:cNvSpPr>
@@ -15511,8 +14369,6 @@
           <a:p>
             <a:fld id="{75B0C241-D0FA-41C4-806B-7A3C5377B352}" type="slidenum">
               <a:rPr lang="en-IN" smtClean="0"/>
-              <a:pPr/>
-              <a:t>6</a:t>
             </a:fld>
             <a:endParaRPr lang="en-IN"/>
           </a:p>
@@ -15527,7 +14383,7 @@
           <p:nvPr/>
         </p:nvPicPr>
         <p:blipFill>
-          <a:blip r:embed="rId2" cstate="print"/>
+          <a:blip r:embed="rId1" cstate="print"/>
           <a:stretch>
             <a:fillRect/>
           </a:stretch>
@@ -15543,11 +14399,6 @@
         </p:spPr>
       </p:pic>
     </p:spTree>
-    <p:extLst>
-      <p:ext uri="{BB962C8B-B14F-4D97-AF65-F5344CB8AC3E}">
-        <p14:creationId xmlns:p14="http://schemas.microsoft.com/office/powerpoint/2010/main" xmlns="" val="3654497853"/>
-      </p:ext>
-    </p:extLst>
   </p:cSld>
   <p:clrMapOvr>
     <a:masterClrMapping/>
@@ -15574,13 +14425,7 @@
       </p:grpSpPr>
       <p:sp>
         <p:nvSpPr>
-          <p:cNvPr id="2" name="Title 1">
-            <a:extLst>
-              <a:ext uri="{FF2B5EF4-FFF2-40B4-BE49-F238E27FC236}">
-                <a16:creationId xmlns:a16="http://schemas.microsoft.com/office/drawing/2014/main" xmlns="" id="{44A83890-8ECE-E45A-9A5C-0DBBBB86C14B}"/>
-              </a:ext>
-            </a:extLst>
-          </p:cNvPr>
+          <p:cNvPr id="2" name="Title 1"/>
           <p:cNvSpPr>
             <a:spLocks noGrp="1"/>
           </p:cNvSpPr>
@@ -15597,18 +14442,13 @@
               <a:rPr lang="en-IN" dirty="0"/>
               <a:t>Built in Data Types</a:t>
             </a:r>
-          </a:p>
-        </p:txBody>
-      </p:sp>
-      <p:sp>
-        <p:nvSpPr>
-          <p:cNvPr id="3" name="Content Placeholder 2">
-            <a:extLst>
-              <a:ext uri="{FF2B5EF4-FFF2-40B4-BE49-F238E27FC236}">
-                <a16:creationId xmlns:a16="http://schemas.microsoft.com/office/drawing/2014/main" xmlns="" id="{4CFD05D0-EBB5-3B86-42BB-03169F9CC21F}"/>
-              </a:ext>
-            </a:extLst>
-          </p:cNvPr>
+            <a:endParaRPr lang="en-IN" dirty="0"/>
+          </a:p>
+        </p:txBody>
+      </p:sp>
+      <p:sp>
+        <p:nvSpPr>
+          <p:cNvPr id="3" name="Content Placeholder 2"/>
           <p:cNvSpPr>
             <a:spLocks noGrp="1"/>
           </p:cNvSpPr>
@@ -15652,6 +14492,7 @@
               <a:rPr lang="en-US" dirty="0"/>
               <a:t>Integer, float, character, void</a:t>
             </a:r>
+            <a:endParaRPr lang="en-US" dirty="0"/>
           </a:p>
           <a:p>
             <a:pPr>
@@ -15790,50 +14631,6 @@
               </a:rPr>
               <a:t>User Defined Data Type: </a:t>
             </a:r>
-          </a:p>
-          <a:p>
-            <a:pPr lvl="1">
-              <a:buFont typeface="Wingdings" panose="05000000000000000000" pitchFamily="2" charset="2"/>
-              <a:buChar char="§"/>
-            </a:pPr>
-            <a:r>
-              <a:rPr kumimoji="0" lang="en-US" b="0" i="0" u="none" strike="noStrike" kern="1200" cap="none" spc="0" normalizeH="0" noProof="0" dirty="0">
-                <a:ln>
-                  <a:noFill/>
-                </a:ln>
-                <a:solidFill>
-                  <a:sysClr val="windowText" lastClr="000000"/>
-                </a:solidFill>
-                <a:effectLst/>
-                <a:uLnTx/>
-                <a:uFillTx/>
-              </a:rPr>
-              <a:t>Enumeration</a:t>
-            </a:r>
-            <a:r>
-              <a:rPr lang="en-US" dirty="0">
-                <a:solidFill>
-                  <a:sysClr val="windowText" lastClr="000000"/>
-                </a:solidFill>
-              </a:rPr>
-              <a:t>, </a:t>
-            </a:r>
-            <a:r>
-              <a:rPr lang="en-US" dirty="0" err="1" smtClean="0">
-                <a:solidFill>
-                  <a:sysClr val="windowText" lastClr="000000"/>
-                </a:solidFill>
-              </a:rPr>
-              <a:t>Typedef</a:t>
-            </a:r>
-            <a:r>
-              <a:rPr lang="en-US" dirty="0" smtClean="0">
-                <a:solidFill>
-                  <a:sysClr val="windowText" lastClr="000000"/>
-                </a:solidFill>
-              </a:rPr>
-              <a:t>, Structure, Union, </a:t>
-            </a:r>
             <a:endParaRPr kumimoji="0" lang="en-US" b="0" i="0" u="none" strike="noStrike" kern="1200" cap="none" spc="0" normalizeH="0" noProof="0" dirty="0">
               <a:ln>
                 <a:noFill/>
@@ -15847,19 +14644,68 @@
             </a:endParaRPr>
           </a:p>
           <a:p>
+            <a:pPr lvl="1">
+              <a:buFont typeface="Wingdings" panose="05000000000000000000" pitchFamily="2" charset="2"/>
+              <a:buChar char="§"/>
+            </a:pPr>
+            <a:r>
+              <a:rPr kumimoji="0" lang="en-US" b="0" i="0" u="none" strike="noStrike" kern="1200" cap="none" spc="0" normalizeH="0" noProof="0" dirty="0">
+                <a:ln>
+                  <a:noFill/>
+                </a:ln>
+                <a:solidFill>
+                  <a:sysClr val="windowText" lastClr="000000"/>
+                </a:solidFill>
+                <a:effectLst/>
+                <a:uLnTx/>
+                <a:uFillTx/>
+              </a:rPr>
+              <a:t>Enumeration</a:t>
+            </a:r>
+            <a:r>
+              <a:rPr lang="en-US" dirty="0">
+                <a:solidFill>
+                  <a:sysClr val="windowText" lastClr="000000"/>
+                </a:solidFill>
+              </a:rPr>
+              <a:t>, </a:t>
+            </a:r>
+            <a:r>
+              <a:rPr lang="en-US" dirty="0" err="1" smtClean="0">
+                <a:solidFill>
+                  <a:sysClr val="windowText" lastClr="000000"/>
+                </a:solidFill>
+              </a:rPr>
+              <a:t>Typedef</a:t>
+            </a:r>
+            <a:r>
+              <a:rPr lang="en-US" dirty="0" smtClean="0">
+                <a:solidFill>
+                  <a:sysClr val="windowText" lastClr="000000"/>
+                </a:solidFill>
+              </a:rPr>
+              <a:t>, Structure, Union, </a:t>
+            </a:r>
+            <a:endParaRPr kumimoji="0" lang="en-US" b="0" i="0" u="none" strike="noStrike" kern="1200" cap="none" spc="0" normalizeH="0" noProof="0" dirty="0">
+              <a:ln>
+                <a:noFill/>
+              </a:ln>
+              <a:solidFill>
+                <a:sysClr val="windowText" lastClr="000000"/>
+              </a:solidFill>
+              <a:effectLst/>
+              <a:uLnTx/>
+              <a:uFillTx/>
+            </a:endParaRPr>
+          </a:p>
+          <a:p>
             <a:endParaRPr lang="en-IN" dirty="0"/>
           </a:p>
         </p:txBody>
       </p:sp>
       <p:sp>
         <p:nvSpPr>
-          <p:cNvPr id="6" name="Slide Number Placeholder 5">
-            <a:extLst>
-              <a:ext uri="{FF2B5EF4-FFF2-40B4-BE49-F238E27FC236}">
-                <a16:creationId xmlns:a16="http://schemas.microsoft.com/office/drawing/2014/main" xmlns="" id="{9B121ABD-53B5-4FB7-C760-7C2FD0521AAF}"/>
-              </a:ext>
-            </a:extLst>
-          </p:cNvPr>
+          <p:cNvPr id="6" name="Slide Number Placeholder 5"/>
           <p:cNvSpPr>
             <a:spLocks noGrp="1"/>
           </p:cNvSpPr>
@@ -15874,8 +14720,6 @@
           <a:p>
             <a:fld id="{75B0C241-D0FA-41C4-806B-7A3C5377B352}" type="slidenum">
               <a:rPr lang="en-IN" smtClean="0"/>
-              <a:pPr/>
-              <a:t>7</a:t>
             </a:fld>
             <a:endParaRPr lang="en-IN"/>
           </a:p>
@@ -15890,7 +14734,7 @@
           <p:nvPr/>
         </p:nvPicPr>
         <p:blipFill>
-          <a:blip r:embed="rId2" cstate="print"/>
+          <a:blip r:embed="rId1" cstate="print"/>
           <a:stretch>
             <a:fillRect/>
           </a:stretch>
@@ -15906,11 +14750,6 @@
         </p:spPr>
       </p:pic>
     </p:spTree>
-    <p:extLst>
-      <p:ext uri="{BB962C8B-B14F-4D97-AF65-F5344CB8AC3E}">
-        <p14:creationId xmlns:p14="http://schemas.microsoft.com/office/powerpoint/2010/main" xmlns="" val="52778563"/>
-      </p:ext>
-    </p:extLst>
   </p:cSld>
   <p:clrMapOvr>
     <a:masterClrMapping/>
@@ -15969,7 +14808,7 @@
           </p:nvPr>
         </p:nvPicPr>
         <p:blipFill>
-          <a:blip r:embed="rId2" cstate="print"/>
+          <a:blip r:embed="rId1" cstate="print"/>
           <a:stretch>
             <a:fillRect/>
           </a:stretch>
@@ -15998,8 +14837,6 @@
           <a:p>
             <a:fld id="{75B0C241-D0FA-41C4-806B-7A3C5377B352}" type="slidenum">
               <a:rPr lang="en-IN" smtClean="0"/>
-              <a:pPr/>
-              <a:t>8</a:t>
             </a:fld>
             <a:endParaRPr lang="en-IN"/>
           </a:p>
@@ -16014,7 +14851,7 @@
           <p:nvPr/>
         </p:nvPicPr>
         <p:blipFill>
-          <a:blip r:embed="rId3" cstate="print"/>
+          <a:blip r:embed="rId2" cstate="print"/>
           <a:stretch>
             <a:fillRect/>
           </a:stretch>
@@ -16056,13 +14893,7 @@
       </p:grpSpPr>
       <p:sp>
         <p:nvSpPr>
-          <p:cNvPr id="2" name="Title 1">
-            <a:extLst>
-              <a:ext uri="{FF2B5EF4-FFF2-40B4-BE49-F238E27FC236}">
-                <a16:creationId xmlns:a16="http://schemas.microsoft.com/office/drawing/2014/main" xmlns="" id="{7873E889-6586-32D2-CB62-FBFB7406B8D2}"/>
-              </a:ext>
-            </a:extLst>
-          </p:cNvPr>
+          <p:cNvPr id="2" name="Title 1"/>
           <p:cNvSpPr>
             <a:spLocks noGrp="1"/>
           </p:cNvSpPr>
@@ -16079,18 +14910,13 @@
               <a:rPr lang="en-IN" dirty="0"/>
               <a:t>Data Structure</a:t>
             </a:r>
-          </a:p>
-        </p:txBody>
-      </p:sp>
-      <p:sp>
-        <p:nvSpPr>
-          <p:cNvPr id="3" name="Content Placeholder 2">
-            <a:extLst>
-              <a:ext uri="{FF2B5EF4-FFF2-40B4-BE49-F238E27FC236}">
-                <a16:creationId xmlns:a16="http://schemas.microsoft.com/office/drawing/2014/main" xmlns="" id="{C3F46AF1-B5CC-224A-E67F-E87F93FA339C}"/>
-              </a:ext>
-            </a:extLst>
-          </p:cNvPr>
+            <a:endParaRPr lang="en-IN" dirty="0"/>
+          </a:p>
+        </p:txBody>
+      </p:sp>
+      <p:sp>
+        <p:nvSpPr>
+          <p:cNvPr id="3" name="Content Placeholder 2"/>
           <p:cNvSpPr>
             <a:spLocks noGrp="1"/>
           </p:cNvSpPr>
@@ -16123,6 +14949,7 @@
               <a:rPr lang="en-US" dirty="0"/>
               <a:t>type into a set with defined relationship.</a:t>
             </a:r>
+            <a:endParaRPr lang="en-US" dirty="0"/>
           </a:p>
           <a:p>
             <a:pPr>
@@ -16156,20 +14983,6 @@
                 <a:uFillTx/>
               </a:rPr>
               <a:t>: set of rules that hold the data together.</a:t>
-            </a:r>
-          </a:p>
-          <a:p>
-            <a:pPr lvl="1">
-              <a:buFont typeface="Wingdings" panose="05000000000000000000" pitchFamily="2" charset="2"/>
-              <a:buChar char="§"/>
-            </a:pPr>
-            <a:r>
-              <a:rPr lang="en-US" noProof="0" dirty="0">
-                <a:solidFill>
-                  <a:sysClr val="windowText" lastClr="000000"/>
-                </a:solidFill>
-              </a:rPr>
-              <a:t>i.e. set od association or relationship</a:t>
             </a:r>
             <a:endParaRPr kumimoji="0" lang="en-US" b="0" i="0" u="none" strike="noStrike" kern="1200" cap="none" spc="0" normalizeH="0" noProof="0" dirty="0">
               <a:ln>
@@ -16184,6 +14997,31 @@
             </a:endParaRPr>
           </a:p>
           <a:p>
+            <a:pPr lvl="1">
+              <a:buFont typeface="Wingdings" panose="05000000000000000000" pitchFamily="2" charset="2"/>
+              <a:buChar char="§"/>
+            </a:pPr>
+            <a:r>
+              <a:rPr lang="en-US" noProof="0" dirty="0">
+                <a:solidFill>
+                  <a:sysClr val="windowText" lastClr="000000"/>
+                </a:solidFill>
+              </a:rPr>
+              <a:t>i.e. set od association or relationship</a:t>
+            </a:r>
+            <a:endParaRPr kumimoji="0" lang="en-US" b="0" i="0" u="none" strike="noStrike" kern="1200" cap="none" spc="0" normalizeH="0" noProof="0" dirty="0">
+              <a:ln>
+                <a:noFill/>
+              </a:ln>
+              <a:solidFill>
+                <a:sysClr val="windowText" lastClr="000000"/>
+              </a:solidFill>
+              <a:effectLst/>
+              <a:uLnTx/>
+              <a:uFillTx/>
+            </a:endParaRPr>
+          </a:p>
+          <a:p>
             <a:pPr>
               <a:buClr>
                 <a:srgbClr val="000000"/>
@@ -16200,6 +15038,11 @@
               </a:rPr>
               <a:t>Data may be organized many different ways</a:t>
             </a:r>
+            <a:endParaRPr lang="en-US" dirty="0">
+              <a:solidFill>
+                <a:sysClr val="windowText" lastClr="000000"/>
+              </a:solidFill>
+            </a:endParaRPr>
           </a:p>
           <a:p>
             <a:pPr>
@@ -16218,6 +15061,11 @@
               </a:rPr>
               <a:t>Data structure:  Logical or mathematical model of particular organization of data.</a:t>
             </a:r>
+            <a:endParaRPr lang="en-US" dirty="0">
+              <a:solidFill>
+                <a:sysClr val="windowText" lastClr="000000"/>
+              </a:solidFill>
+            </a:endParaRPr>
           </a:p>
           <a:p>
             <a:pPr lvl="1">
@@ -16236,6 +15084,11 @@
               </a:rPr>
               <a:t>It is distinguished from data object is that describe data object and the way that they are related .</a:t>
             </a:r>
+            <a:endParaRPr lang="en-US" dirty="0">
+              <a:solidFill>
+                <a:sysClr val="windowText" lastClr="000000"/>
+              </a:solidFill>
+            </a:endParaRPr>
           </a:p>
           <a:p>
             <a:pPr lvl="1">
@@ -16254,6 +15107,11 @@
               </a:rPr>
               <a:t>Set of operations which may be applied to elements of data object </a:t>
             </a:r>
+            <a:endParaRPr lang="en-US" dirty="0">
+              <a:solidFill>
+                <a:sysClr val="windowText" lastClr="000000"/>
+              </a:solidFill>
+            </a:endParaRPr>
           </a:p>
           <a:p>
             <a:endParaRPr lang="en-IN" dirty="0"/>
@@ -16262,13 +15120,7 @@
       </p:sp>
       <p:sp>
         <p:nvSpPr>
-          <p:cNvPr id="6" name="Slide Number Placeholder 5">
-            <a:extLst>
-              <a:ext uri="{FF2B5EF4-FFF2-40B4-BE49-F238E27FC236}">
-                <a16:creationId xmlns:a16="http://schemas.microsoft.com/office/drawing/2014/main" xmlns="" id="{9C6F2F51-502F-38CC-3CEB-CAB4E5C521BF}"/>
-              </a:ext>
-            </a:extLst>
-          </p:cNvPr>
+          <p:cNvPr id="6" name="Slide Number Placeholder 5"/>
           <p:cNvSpPr>
             <a:spLocks noGrp="1"/>
           </p:cNvSpPr>
@@ -16283,8 +15135,6 @@
           <a:p>
             <a:fld id="{75B0C241-D0FA-41C4-806B-7A3C5377B352}" type="slidenum">
               <a:rPr lang="en-IN" smtClean="0"/>
-              <a:pPr/>
-              <a:t>9</a:t>
             </a:fld>
             <a:endParaRPr lang="en-IN"/>
           </a:p>
@@ -16299,7 +15149,7 @@
           <p:nvPr/>
         </p:nvPicPr>
         <p:blipFill>
-          <a:blip r:embed="rId2" cstate="print"/>
+          <a:blip r:embed="rId1" cstate="print"/>
           <a:stretch>
             <a:fillRect/>
           </a:stretch>
@@ -16315,11 +15165,6 @@
         </p:spPr>
       </p:pic>
     </p:spTree>
-    <p:extLst>
-      <p:ext uri="{BB962C8B-B14F-4D97-AF65-F5344CB8AC3E}">
-        <p14:creationId xmlns:p14="http://schemas.microsoft.com/office/powerpoint/2010/main" xmlns="" val="1438662940"/>
-      </p:ext>
-    </p:extLst>
   </p:cSld>
   <p:clrMapOvr>
     <a:masterClrMapping/>
@@ -16403,23 +15248,6 @@
         <a:font script="Viet" typeface="Times New Roman"/>
         <a:font script="Uigh" typeface="Microsoft Uighur"/>
         <a:font script="Geor" typeface="Sylfaen"/>
-        <a:font script="Armn" typeface="Arial"/>
-        <a:font script="Bugi" typeface="Leelawadee UI"/>
-        <a:font script="Bopo" typeface="Microsoft JhengHei"/>
-        <a:font script="Java" typeface="Javanese Text"/>
-        <a:font script="Lisu" typeface="Segoe UI"/>
-        <a:font script="Mymr" typeface="Myanmar Text"/>
-        <a:font script="Nkoo" typeface="Ebrima"/>
-        <a:font script="Olck" typeface="Nirmala UI"/>
-        <a:font script="Osma" typeface="Ebrima"/>
-        <a:font script="Phag" typeface="Phagspa"/>
-        <a:font script="Syrn" typeface="Estrangelo Edessa"/>
-        <a:font script="Syrj" typeface="Estrangelo Edessa"/>
-        <a:font script="Syre" typeface="Estrangelo Edessa"/>
-        <a:font script="Sora" typeface="Nirmala UI"/>
-        <a:font script="Tale" typeface="Microsoft Tai Le"/>
-        <a:font script="Talu" typeface="Microsoft New Tai Lue"/>
-        <a:font script="Tfng" typeface="Ebrima"/>
       </a:majorFont>
       <a:minorFont>
         <a:latin typeface="Calibri"/>
@@ -16455,23 +15283,6 @@
         <a:font script="Viet" typeface="Arial"/>
         <a:font script="Uigh" typeface="Microsoft Uighur"/>
         <a:font script="Geor" typeface="Sylfaen"/>
-        <a:font script="Armn" typeface="Arial"/>
-        <a:font script="Bugi" typeface="Leelawadee UI"/>
-        <a:font script="Bopo" typeface="Microsoft JhengHei"/>
-        <a:font script="Java" typeface="Javanese Text"/>
-        <a:font script="Lisu" typeface="Segoe UI"/>
-        <a:font script="Mymr" typeface="Myanmar Text"/>
-        <a:font script="Nkoo" typeface="Ebrima"/>
-        <a:font script="Olck" typeface="Nirmala UI"/>
-        <a:font script="Osma" typeface="Ebrima"/>
-        <a:font script="Phag" typeface="Phagspa"/>
-        <a:font script="Syrn" typeface="Estrangelo Edessa"/>
-        <a:font script="Syrj" typeface="Estrangelo Edessa"/>
-        <a:font script="Syre" typeface="Estrangelo Edessa"/>
-        <a:font script="Sora" typeface="Nirmala UI"/>
-        <a:font script="Tale" typeface="Microsoft Tai Le"/>
-        <a:font script="Talu" typeface="Microsoft New Tai Lue"/>
-        <a:font script="Tfng" typeface="Ebrima"/>
       </a:minorFont>
     </a:fontScheme>
     <a:fmtScheme name="Office">
@@ -16612,11 +15423,9 @@
       </a:bgFillStyleLst>
     </a:fmtScheme>
   </a:themeElements>
-  <a:objectDefaults/>
-  <a:extraClrSchemeLst/>
   <a:extLst>
     <a:ext uri="{05A4C25C-085E-4340-85A3-A5531E510DB2}">
-      <thm15:themeFamily xmlns:thm15="http://schemas.microsoft.com/office/thememl/2012/main" xmlns="" name="Office Theme" id="{62F939B6-93AF-4DB8-9C6B-D6C7DFDC589F}" vid="{4A3C46E8-61CC-4603-A589-7422A47A8E4A}"/>
+      <thm15:themeFamily xmlns:thm15="http://schemas.microsoft.com/office/thememl/2012/main" name="Office Theme" id="{62F939B6-93AF-4DB8-9C6B-D6C7DFDC589F}" vid="{4A3C46E8-61CC-4603-A589-7422A47A8E4A}"/>
     </a:ext>
   </a:extLst>
 </a:theme>
@@ -16698,23 +15507,6 @@
         <a:font script="Viet" typeface="Times New Roman"/>
         <a:font script="Uigh" typeface="Microsoft Uighur"/>
         <a:font script="Geor" typeface="Sylfaen"/>
-        <a:font script="Armn" typeface="Arial"/>
-        <a:font script="Bugi" typeface="Leelawadee UI"/>
-        <a:font script="Bopo" typeface="Microsoft JhengHei"/>
-        <a:font script="Java" typeface="Javanese Text"/>
-        <a:font script="Lisu" typeface="Segoe UI"/>
-        <a:font script="Mymr" typeface="Myanmar Text"/>
-        <a:font script="Nkoo" typeface="Ebrima"/>
-        <a:font script="Olck" typeface="Nirmala UI"/>
-        <a:font script="Osma" typeface="Ebrima"/>
-        <a:font script="Phag" typeface="Phagspa"/>
-        <a:font script="Syrn" typeface="Estrangelo Edessa"/>
-        <a:font script="Syrj" typeface="Estrangelo Edessa"/>
-        <a:font script="Syre" typeface="Estrangelo Edessa"/>
-        <a:font script="Sora" typeface="Nirmala UI"/>
-        <a:font script="Tale" typeface="Microsoft Tai Le"/>
-        <a:font script="Talu" typeface="Microsoft New Tai Lue"/>
-        <a:font script="Tfng" typeface="Ebrima"/>
       </a:majorFont>
       <a:minorFont>
         <a:latin typeface="Calibri"/>
@@ -16750,23 +15542,6 @@
         <a:font script="Viet" typeface="Arial"/>
         <a:font script="Uigh" typeface="Microsoft Uighur"/>
         <a:font script="Geor" typeface="Sylfaen"/>
-        <a:font script="Armn" typeface="Arial"/>
-        <a:font script="Bugi" typeface="Leelawadee UI"/>
-        <a:font script="Bopo" typeface="Microsoft JhengHei"/>
-        <a:font script="Java" typeface="Javanese Text"/>
-        <a:font script="Lisu" typeface="Segoe UI"/>
-        <a:font script="Mymr" typeface="Myanmar Text"/>
-        <a:font script="Nkoo" typeface="Ebrima"/>
-        <a:font script="Olck" typeface="Nirmala UI"/>
-        <a:font script="Osma" typeface="Ebrima"/>
-        <a:font script="Phag" typeface="Phagspa"/>
-        <a:font script="Syrn" typeface="Estrangelo Edessa"/>
-        <a:font script="Syrj" typeface="Estrangelo Edessa"/>
-        <a:font script="Syre" typeface="Estrangelo Edessa"/>
-        <a:font script="Sora" typeface="Nirmala UI"/>
-        <a:font script="Tale" typeface="Microsoft Tai Le"/>
-        <a:font script="Talu" typeface="Microsoft New Tai Lue"/>
-        <a:font script="Tfng" typeface="Ebrima"/>
       </a:minorFont>
     </a:fontScheme>
     <a:fmtScheme name="Office">
@@ -16907,11 +15682,9 @@
       </a:bgFillStyleLst>
     </a:fmtScheme>
   </a:themeElements>
-  <a:objectDefaults/>
-  <a:extraClrSchemeLst/>
   <a:extLst>
     <a:ext uri="{05A4C25C-085E-4340-85A3-A5531E510DB2}">
-      <thm15:themeFamily xmlns:thm15="http://schemas.microsoft.com/office/thememl/2012/main" xmlns="" name="Office Theme" id="{62F939B6-93AF-4DB8-9C6B-D6C7DFDC589F}" vid="{4A3C46E8-61CC-4603-A589-7422A47A8E4A}"/>
+      <thm15:themeFamily xmlns:thm15="http://schemas.microsoft.com/office/thememl/2012/main" name="Office Theme" id="{62F939B6-93AF-4DB8-9C6B-D6C7DFDC589F}" vid="{4A3C46E8-61CC-4603-A589-7422A47A8E4A}"/>
     </a:ext>
   </a:extLst>
 </a:theme>
@@ -16993,23 +15766,6 @@
         <a:font script="Viet" typeface="Times New Roman"/>
         <a:font script="Uigh" typeface="Microsoft Uighur"/>
         <a:font script="Geor" typeface="Sylfaen"/>
-        <a:font script="Armn" typeface="Arial"/>
-        <a:font script="Bugi" typeface="Leelawadee UI"/>
-        <a:font script="Bopo" typeface="Microsoft JhengHei"/>
-        <a:font script="Java" typeface="Javanese Text"/>
-        <a:font script="Lisu" typeface="Segoe UI"/>
-        <a:font script="Mymr" typeface="Myanmar Text"/>
-        <a:font script="Nkoo" typeface="Ebrima"/>
-        <a:font script="Olck" typeface="Nirmala UI"/>
-        <a:font script="Osma" typeface="Ebrima"/>
-        <a:font script="Phag" typeface="Phagspa"/>
-        <a:font script="Syrn" typeface="Estrangelo Edessa"/>
-        <a:font script="Syrj" typeface="Estrangelo Edessa"/>
-        <a:font script="Syre" typeface="Estrangelo Edessa"/>
-        <a:font script="Sora" typeface="Nirmala UI"/>
-        <a:font script="Tale" typeface="Microsoft Tai Le"/>
-        <a:font script="Talu" typeface="Microsoft New Tai Lue"/>
-        <a:font script="Tfng" typeface="Ebrima"/>
       </a:majorFont>
       <a:minorFont>
         <a:latin typeface="Calibri"/>
@@ -17045,23 +15801,6 @@
         <a:font script="Viet" typeface="Arial"/>
         <a:font script="Uigh" typeface="Microsoft Uighur"/>
         <a:font script="Geor" typeface="Sylfaen"/>
-        <a:font script="Armn" typeface="Arial"/>
-        <a:font script="Bugi" typeface="Leelawadee UI"/>
-        <a:font script="Bopo" typeface="Microsoft JhengHei"/>
-        <a:font script="Java" typeface="Javanese Text"/>
-        <a:font script="Lisu" typeface="Segoe UI"/>
-        <a:font script="Mymr" typeface="Myanmar Text"/>
-        <a:font script="Nkoo" typeface="Ebrima"/>
-        <a:font script="Olck" typeface="Nirmala UI"/>
-        <a:font script="Osma" typeface="Ebrima"/>
-        <a:font script="Phag" typeface="Phagspa"/>
-        <a:font script="Syrn" typeface="Estrangelo Edessa"/>
-        <a:font script="Syrj" typeface="Estrangelo Edessa"/>
-        <a:font script="Syre" typeface="Estrangelo Edessa"/>
-        <a:font script="Sora" typeface="Nirmala UI"/>
-        <a:font script="Tale" typeface="Microsoft Tai Le"/>
-        <a:font script="Talu" typeface="Microsoft New Tai Lue"/>
-        <a:font script="Tfng" typeface="Ebrima"/>
       </a:minorFont>
     </a:fontScheme>
     <a:fmtScheme name="Office">
@@ -17202,11 +15941,9 @@
       </a:bgFillStyleLst>
     </a:fmtScheme>
   </a:themeElements>
-  <a:objectDefaults/>
-  <a:extraClrSchemeLst/>
   <a:extLst>
     <a:ext uri="{05A4C25C-085E-4340-85A3-A5531E510DB2}">
-      <thm15:themeFamily xmlns:thm15="http://schemas.microsoft.com/office/thememl/2012/main" xmlns="" name="Office Theme" id="{62F939B6-93AF-4DB8-9C6B-D6C7DFDC589F}" vid="{4A3C46E8-61CC-4603-A589-7422A47A8E4A}"/>
+      <thm15:themeFamily xmlns:thm15="http://schemas.microsoft.com/office/thememl/2012/main" name="Office Theme" id="{62F939B6-93AF-4DB8-9C6B-D6C7DFDC589F}" vid="{4A3C46E8-61CC-4603-A589-7422A47A8E4A}"/>
     </a:ext>
   </a:extLst>
 </a:theme>
